--- a/组会记录/组会1215.pptx
+++ b/组会记录/组会1215.pptx
@@ -5,24 +5,25 @@
     <p:sldMasterId id="2147483648" r:id="rId1"/>
   </p:sldMasterIdLst>
   <p:notesMasterIdLst>
-    <p:notesMasterId r:id="rId12"/>
+    <p:notesMasterId r:id="rId5"/>
   </p:notesMasterIdLst>
   <p:sldIdLst>
-    <p:sldId id="397" r:id="rId2"/>
-    <p:sldId id="327" r:id="rId3"/>
-    <p:sldId id="368" r:id="rId4"/>
-    <p:sldId id="399" r:id="rId5"/>
-    <p:sldId id="398" r:id="rId6"/>
-    <p:sldId id="400" r:id="rId7"/>
-    <p:sldId id="401" r:id="rId8"/>
-    <p:sldId id="402" r:id="rId9"/>
-    <p:sldId id="403" r:id="rId10"/>
-    <p:sldId id="404" r:id="rId11"/>
+    <p:sldId id="397" r:id="rId3"/>
+    <p:sldId id="327" r:id="rId4"/>
+    <p:sldId id="368" r:id="rId6"/>
+    <p:sldId id="405" r:id="rId7"/>
+    <p:sldId id="399" r:id="rId8"/>
+    <p:sldId id="398" r:id="rId9"/>
+    <p:sldId id="400" r:id="rId10"/>
+    <p:sldId id="401" r:id="rId11"/>
+    <p:sldId id="402" r:id="rId12"/>
+    <p:sldId id="403" r:id="rId13"/>
+    <p:sldId id="404" r:id="rId14"/>
   </p:sldIdLst>
   <p:sldSz cx="12192000" cy="6858000"/>
   <p:notesSz cx="6858000" cy="9144000"/>
   <p:custDataLst>
-    <p:tags r:id="rId13"/>
+    <p:tags r:id="rId18"/>
   </p:custDataLst>
   <p:defaultTextStyle>
     <a:defPPr>
@@ -119,11 +120,6 @@
       </a:defRPr>
     </a:lvl9pPr>
   </p:defaultTextStyle>
-  <p:extLst>
-    <p:ext uri="{EFAFB233-063F-42B5-8137-9DF3F51BA10A}">
-      <p15:sldGuideLst xmlns:p15="http://schemas.microsoft.com/office/powerpoint/2012/main"/>
-    </p:ext>
-  </p:extLst>
 </p:presentation>
 </file>
 
@@ -209,7 +205,6 @@
           <a:p>
             <a:fld id="{D2A48B96-639E-45A3-A0BA-2464DFDB1FAA}" type="datetimeFigureOut">
               <a:rPr lang="zh-CN" altLang="en-US" smtClean="0"/>
-              <a:t>2025/12/15</a:t>
             </a:fld>
             <a:endParaRPr lang="zh-CN" altLang="en-US"/>
           </a:p>
@@ -276,6 +271,7 @@
               <a:rPr lang="zh-CN" altLang="en-US"/>
               <a:t>单击此处编辑母版文本样式</a:t>
             </a:r>
+            <a:endParaRPr lang="zh-CN" altLang="en-US"/>
           </a:p>
           <a:p>
             <a:pPr lvl="1"/>
@@ -283,6 +279,7 @@
               <a:rPr lang="zh-CN" altLang="en-US"/>
               <a:t>第二级</a:t>
             </a:r>
+            <a:endParaRPr lang="zh-CN" altLang="en-US"/>
           </a:p>
           <a:p>
             <a:pPr lvl="2"/>
@@ -290,6 +287,7 @@
               <a:rPr lang="zh-CN" altLang="en-US"/>
               <a:t>第三级</a:t>
             </a:r>
+            <a:endParaRPr lang="zh-CN" altLang="en-US"/>
           </a:p>
           <a:p>
             <a:pPr lvl="3"/>
@@ -297,6 +295,7 @@
               <a:rPr lang="zh-CN" altLang="en-US"/>
               <a:t>第四级</a:t>
             </a:r>
+            <a:endParaRPr lang="zh-CN" altLang="en-US"/>
           </a:p>
           <a:p>
             <a:pPr lvl="4"/>
@@ -304,6 +303,7 @@
               <a:rPr lang="zh-CN" altLang="en-US"/>
               <a:t>第五级</a:t>
             </a:r>
+            <a:endParaRPr lang="zh-CN" altLang="en-US"/>
           </a:p>
         </p:txBody>
       </p:sp>
@@ -367,7 +367,6 @@
           <a:p>
             <a:fld id="{A6837353-30EB-4A48-80EB-173D804AEFBD}" type="slidenum">
               <a:rPr lang="zh-CN" altLang="en-US" smtClean="0"/>
-              <a:t>‹#›</a:t>
             </a:fld>
             <a:endParaRPr lang="zh-CN" altLang="en-US"/>
           </a:p>
@@ -572,6 +571,7 @@
               <a:rPr lang="zh-CN" altLang="en-US"/>
               <a:t>单击此处编辑母版标题样式</a:t>
             </a:r>
+            <a:endParaRPr lang="zh-CN" altLang="en-US"/>
           </a:p>
         </p:txBody>
       </p:sp>
@@ -636,6 +636,7 @@
               <a:rPr lang="zh-CN" altLang="en-US"/>
               <a:t>单击此处编辑母版副标题样式</a:t>
             </a:r>
+            <a:endParaRPr lang="zh-CN" altLang="en-US"/>
           </a:p>
         </p:txBody>
       </p:sp>
@@ -656,7 +657,6 @@
           <a:p>
             <a:fld id="{837840E2-13A5-46A9-A265-C77FF1EECC77}" type="datetimeFigureOut">
               <a:rPr lang="zh-CN" altLang="en-US" smtClean="0"/>
-              <a:t>2025/12/15</a:t>
             </a:fld>
             <a:endParaRPr lang="zh-CN" altLang="en-US"/>
           </a:p>
@@ -698,7 +698,6 @@
           <a:p>
             <a:fld id="{079686F9-7E47-4853-B8F4-FBCF71CB48DC}" type="slidenum">
               <a:rPr lang="zh-CN" altLang="en-US" smtClean="0"/>
-              <a:t>‹#›</a:t>
             </a:fld>
             <a:endParaRPr lang="zh-CN" altLang="en-US"/>
           </a:p>
@@ -748,6 +747,7 @@
               <a:rPr lang="zh-CN" altLang="en-US"/>
               <a:t>单击此处编辑母版标题样式</a:t>
             </a:r>
+            <a:endParaRPr lang="zh-CN" altLang="en-US"/>
           </a:p>
         </p:txBody>
       </p:sp>
@@ -771,6 +771,7 @@
               <a:rPr lang="zh-CN" altLang="en-US"/>
               <a:t>单击此处编辑母版文本样式</a:t>
             </a:r>
+            <a:endParaRPr lang="zh-CN" altLang="en-US"/>
           </a:p>
           <a:p>
             <a:pPr lvl="1"/>
@@ -778,6 +779,7 @@
               <a:rPr lang="zh-CN" altLang="en-US"/>
               <a:t>二级</a:t>
             </a:r>
+            <a:endParaRPr lang="zh-CN" altLang="en-US"/>
           </a:p>
           <a:p>
             <a:pPr lvl="2"/>
@@ -785,6 +787,7 @@
               <a:rPr lang="zh-CN" altLang="en-US"/>
               <a:t>三级</a:t>
             </a:r>
+            <a:endParaRPr lang="zh-CN" altLang="en-US"/>
           </a:p>
           <a:p>
             <a:pPr lvl="3"/>
@@ -792,6 +795,7 @@
               <a:rPr lang="zh-CN" altLang="en-US"/>
               <a:t>四级</a:t>
             </a:r>
+            <a:endParaRPr lang="zh-CN" altLang="en-US"/>
           </a:p>
           <a:p>
             <a:pPr lvl="4"/>
@@ -799,6 +803,7 @@
               <a:rPr lang="zh-CN" altLang="en-US"/>
               <a:t>五级</a:t>
             </a:r>
+            <a:endParaRPr lang="zh-CN" altLang="en-US"/>
           </a:p>
         </p:txBody>
       </p:sp>
@@ -819,7 +824,6 @@
           <a:p>
             <a:fld id="{837840E2-13A5-46A9-A265-C77FF1EECC77}" type="datetimeFigureOut">
               <a:rPr lang="zh-CN" altLang="en-US" smtClean="0"/>
-              <a:t>2025/12/15</a:t>
             </a:fld>
             <a:endParaRPr lang="zh-CN" altLang="en-US"/>
           </a:p>
@@ -861,7 +865,6 @@
           <a:p>
             <a:fld id="{079686F9-7E47-4853-B8F4-FBCF71CB48DC}" type="slidenum">
               <a:rPr lang="zh-CN" altLang="en-US" smtClean="0"/>
-              <a:t>‹#›</a:t>
             </a:fld>
             <a:endParaRPr lang="zh-CN" altLang="en-US"/>
           </a:p>
@@ -916,6 +919,7 @@
               <a:rPr lang="zh-CN" altLang="en-US"/>
               <a:t>单击此处编辑母版标题样式</a:t>
             </a:r>
+            <a:endParaRPr lang="zh-CN" altLang="en-US"/>
           </a:p>
         </p:txBody>
       </p:sp>
@@ -944,6 +948,7 @@
               <a:rPr lang="zh-CN" altLang="en-US"/>
               <a:t>单击此处编辑母版文本样式</a:t>
             </a:r>
+            <a:endParaRPr lang="zh-CN" altLang="en-US"/>
           </a:p>
           <a:p>
             <a:pPr lvl="1"/>
@@ -951,6 +956,7 @@
               <a:rPr lang="zh-CN" altLang="en-US"/>
               <a:t>二级</a:t>
             </a:r>
+            <a:endParaRPr lang="zh-CN" altLang="en-US"/>
           </a:p>
           <a:p>
             <a:pPr lvl="2"/>
@@ -958,6 +964,7 @@
               <a:rPr lang="zh-CN" altLang="en-US"/>
               <a:t>三级</a:t>
             </a:r>
+            <a:endParaRPr lang="zh-CN" altLang="en-US"/>
           </a:p>
           <a:p>
             <a:pPr lvl="3"/>
@@ -965,6 +972,7 @@
               <a:rPr lang="zh-CN" altLang="en-US"/>
               <a:t>四级</a:t>
             </a:r>
+            <a:endParaRPr lang="zh-CN" altLang="en-US"/>
           </a:p>
           <a:p>
             <a:pPr lvl="4"/>
@@ -972,6 +980,7 @@
               <a:rPr lang="zh-CN" altLang="en-US"/>
               <a:t>五级</a:t>
             </a:r>
+            <a:endParaRPr lang="zh-CN" altLang="en-US"/>
           </a:p>
         </p:txBody>
       </p:sp>
@@ -992,7 +1001,6 @@
           <a:p>
             <a:fld id="{837840E2-13A5-46A9-A265-C77FF1EECC77}" type="datetimeFigureOut">
               <a:rPr lang="zh-CN" altLang="en-US" smtClean="0"/>
-              <a:t>2025/12/15</a:t>
             </a:fld>
             <a:endParaRPr lang="zh-CN" altLang="en-US"/>
           </a:p>
@@ -1034,7 +1042,6 @@
           <a:p>
             <a:fld id="{079686F9-7E47-4853-B8F4-FBCF71CB48DC}" type="slidenum">
               <a:rPr lang="zh-CN" altLang="en-US" smtClean="0"/>
-              <a:t>‹#›</a:t>
             </a:fld>
             <a:endParaRPr lang="zh-CN" altLang="en-US"/>
           </a:p>
@@ -1084,6 +1091,7 @@
               <a:rPr lang="zh-CN" altLang="en-US"/>
               <a:t>单击此处编辑母版标题样式</a:t>
             </a:r>
+            <a:endParaRPr lang="zh-CN" altLang="en-US"/>
           </a:p>
         </p:txBody>
       </p:sp>
@@ -1107,6 +1115,7 @@
               <a:rPr lang="zh-CN" altLang="en-US"/>
               <a:t>单击此处编辑母版文本样式</a:t>
             </a:r>
+            <a:endParaRPr lang="zh-CN" altLang="en-US"/>
           </a:p>
           <a:p>
             <a:pPr lvl="1"/>
@@ -1114,6 +1123,7 @@
               <a:rPr lang="zh-CN" altLang="en-US"/>
               <a:t>二级</a:t>
             </a:r>
+            <a:endParaRPr lang="zh-CN" altLang="en-US"/>
           </a:p>
           <a:p>
             <a:pPr lvl="2"/>
@@ -1121,6 +1131,7 @@
               <a:rPr lang="zh-CN" altLang="en-US"/>
               <a:t>三级</a:t>
             </a:r>
+            <a:endParaRPr lang="zh-CN" altLang="en-US"/>
           </a:p>
           <a:p>
             <a:pPr lvl="3"/>
@@ -1128,6 +1139,7 @@
               <a:rPr lang="zh-CN" altLang="en-US"/>
               <a:t>四级</a:t>
             </a:r>
+            <a:endParaRPr lang="zh-CN" altLang="en-US"/>
           </a:p>
           <a:p>
             <a:pPr lvl="4"/>
@@ -1135,6 +1147,7 @@
               <a:rPr lang="zh-CN" altLang="en-US"/>
               <a:t>五级</a:t>
             </a:r>
+            <a:endParaRPr lang="zh-CN" altLang="en-US"/>
           </a:p>
         </p:txBody>
       </p:sp>
@@ -1155,7 +1168,6 @@
           <a:p>
             <a:fld id="{837840E2-13A5-46A9-A265-C77FF1EECC77}" type="datetimeFigureOut">
               <a:rPr lang="zh-CN" altLang="en-US" smtClean="0"/>
-              <a:t>2025/12/15</a:t>
             </a:fld>
             <a:endParaRPr lang="zh-CN" altLang="en-US"/>
           </a:p>
@@ -1197,7 +1209,6 @@
           <a:p>
             <a:fld id="{079686F9-7E47-4853-B8F4-FBCF71CB48DC}" type="slidenum">
               <a:rPr lang="zh-CN" altLang="en-US" smtClean="0"/>
-              <a:t>‹#›</a:t>
             </a:fld>
             <a:endParaRPr lang="zh-CN" altLang="en-US"/>
           </a:p>
@@ -1256,6 +1267,7 @@
               <a:rPr lang="zh-CN" altLang="en-US"/>
               <a:t>单击此处编辑母版标题样式</a:t>
             </a:r>
+            <a:endParaRPr lang="zh-CN" altLang="en-US"/>
           </a:p>
         </p:txBody>
       </p:sp>
@@ -1375,6 +1387,7 @@
               <a:rPr lang="zh-CN" altLang="en-US"/>
               <a:t>单击此处编辑母版文本样式</a:t>
             </a:r>
+            <a:endParaRPr lang="zh-CN" altLang="en-US"/>
           </a:p>
         </p:txBody>
       </p:sp>
@@ -1395,7 +1408,6 @@
           <a:p>
             <a:fld id="{837840E2-13A5-46A9-A265-C77FF1EECC77}" type="datetimeFigureOut">
               <a:rPr lang="zh-CN" altLang="en-US" smtClean="0"/>
-              <a:t>2025/12/15</a:t>
             </a:fld>
             <a:endParaRPr lang="zh-CN" altLang="en-US"/>
           </a:p>
@@ -1437,7 +1449,6 @@
           <a:p>
             <a:fld id="{079686F9-7E47-4853-B8F4-FBCF71CB48DC}" type="slidenum">
               <a:rPr lang="zh-CN" altLang="en-US" smtClean="0"/>
-              <a:t>‹#›</a:t>
             </a:fld>
             <a:endParaRPr lang="zh-CN" altLang="en-US"/>
           </a:p>
@@ -1487,6 +1498,7 @@
               <a:rPr lang="zh-CN" altLang="en-US"/>
               <a:t>单击此处编辑母版标题样式</a:t>
             </a:r>
+            <a:endParaRPr lang="zh-CN" altLang="en-US"/>
           </a:p>
         </p:txBody>
       </p:sp>
@@ -1515,6 +1527,7 @@
               <a:rPr lang="zh-CN" altLang="en-US"/>
               <a:t>单击此处编辑母版文本样式</a:t>
             </a:r>
+            <a:endParaRPr lang="zh-CN" altLang="en-US"/>
           </a:p>
           <a:p>
             <a:pPr lvl="1"/>
@@ -1522,6 +1535,7 @@
               <a:rPr lang="zh-CN" altLang="en-US"/>
               <a:t>二级</a:t>
             </a:r>
+            <a:endParaRPr lang="zh-CN" altLang="en-US"/>
           </a:p>
           <a:p>
             <a:pPr lvl="2"/>
@@ -1529,6 +1543,7 @@
               <a:rPr lang="zh-CN" altLang="en-US"/>
               <a:t>三级</a:t>
             </a:r>
+            <a:endParaRPr lang="zh-CN" altLang="en-US"/>
           </a:p>
           <a:p>
             <a:pPr lvl="3"/>
@@ -1536,6 +1551,7 @@
               <a:rPr lang="zh-CN" altLang="en-US"/>
               <a:t>四级</a:t>
             </a:r>
+            <a:endParaRPr lang="zh-CN" altLang="en-US"/>
           </a:p>
           <a:p>
             <a:pPr lvl="4"/>
@@ -1543,6 +1559,7 @@
               <a:rPr lang="zh-CN" altLang="en-US"/>
               <a:t>五级</a:t>
             </a:r>
+            <a:endParaRPr lang="zh-CN" altLang="en-US"/>
           </a:p>
         </p:txBody>
       </p:sp>
@@ -1571,6 +1588,7 @@
               <a:rPr lang="zh-CN" altLang="en-US"/>
               <a:t>单击此处编辑母版文本样式</a:t>
             </a:r>
+            <a:endParaRPr lang="zh-CN" altLang="en-US"/>
           </a:p>
           <a:p>
             <a:pPr lvl="1"/>
@@ -1578,6 +1596,7 @@
               <a:rPr lang="zh-CN" altLang="en-US"/>
               <a:t>二级</a:t>
             </a:r>
+            <a:endParaRPr lang="zh-CN" altLang="en-US"/>
           </a:p>
           <a:p>
             <a:pPr lvl="2"/>
@@ -1585,6 +1604,7 @@
               <a:rPr lang="zh-CN" altLang="en-US"/>
               <a:t>三级</a:t>
             </a:r>
+            <a:endParaRPr lang="zh-CN" altLang="en-US"/>
           </a:p>
           <a:p>
             <a:pPr lvl="3"/>
@@ -1592,6 +1612,7 @@
               <a:rPr lang="zh-CN" altLang="en-US"/>
               <a:t>四级</a:t>
             </a:r>
+            <a:endParaRPr lang="zh-CN" altLang="en-US"/>
           </a:p>
           <a:p>
             <a:pPr lvl="4"/>
@@ -1599,6 +1620,7 @@
               <a:rPr lang="zh-CN" altLang="en-US"/>
               <a:t>五级</a:t>
             </a:r>
+            <a:endParaRPr lang="zh-CN" altLang="en-US"/>
           </a:p>
         </p:txBody>
       </p:sp>
@@ -1619,7 +1641,6 @@
           <a:p>
             <a:fld id="{837840E2-13A5-46A9-A265-C77FF1EECC77}" type="datetimeFigureOut">
               <a:rPr lang="zh-CN" altLang="en-US" smtClean="0"/>
-              <a:t>2025/12/15</a:t>
             </a:fld>
             <a:endParaRPr lang="zh-CN" altLang="en-US"/>
           </a:p>
@@ -1661,7 +1682,6 @@
           <a:p>
             <a:fld id="{079686F9-7E47-4853-B8F4-FBCF71CB48DC}" type="slidenum">
               <a:rPr lang="zh-CN" altLang="en-US" smtClean="0"/>
-              <a:t>‹#›</a:t>
             </a:fld>
             <a:endParaRPr lang="zh-CN" altLang="en-US"/>
           </a:p>
@@ -1716,6 +1736,7 @@
               <a:rPr lang="zh-CN" altLang="en-US"/>
               <a:t>单击此处编辑母版标题样式</a:t>
             </a:r>
+            <a:endParaRPr lang="zh-CN" altLang="en-US"/>
           </a:p>
         </p:txBody>
       </p:sp>
@@ -1781,6 +1802,7 @@
               <a:rPr lang="zh-CN" altLang="en-US"/>
               <a:t>单击此处编辑母版文本样式</a:t>
             </a:r>
+            <a:endParaRPr lang="zh-CN" altLang="en-US"/>
           </a:p>
         </p:txBody>
       </p:sp>
@@ -1809,6 +1831,7 @@
               <a:rPr lang="zh-CN" altLang="en-US"/>
               <a:t>单击此处编辑母版文本样式</a:t>
             </a:r>
+            <a:endParaRPr lang="zh-CN" altLang="en-US"/>
           </a:p>
           <a:p>
             <a:pPr lvl="1"/>
@@ -1816,6 +1839,7 @@
               <a:rPr lang="zh-CN" altLang="en-US"/>
               <a:t>二级</a:t>
             </a:r>
+            <a:endParaRPr lang="zh-CN" altLang="en-US"/>
           </a:p>
           <a:p>
             <a:pPr lvl="2"/>
@@ -1823,6 +1847,7 @@
               <a:rPr lang="zh-CN" altLang="en-US"/>
               <a:t>三级</a:t>
             </a:r>
+            <a:endParaRPr lang="zh-CN" altLang="en-US"/>
           </a:p>
           <a:p>
             <a:pPr lvl="3"/>
@@ -1830,6 +1855,7 @@
               <a:rPr lang="zh-CN" altLang="en-US"/>
               <a:t>四级</a:t>
             </a:r>
+            <a:endParaRPr lang="zh-CN" altLang="en-US"/>
           </a:p>
           <a:p>
             <a:pPr lvl="4"/>
@@ -1837,6 +1863,7 @@
               <a:rPr lang="zh-CN" altLang="en-US"/>
               <a:t>五级</a:t>
             </a:r>
+            <a:endParaRPr lang="zh-CN" altLang="en-US"/>
           </a:p>
         </p:txBody>
       </p:sp>
@@ -1902,6 +1929,7 @@
               <a:rPr lang="zh-CN" altLang="en-US"/>
               <a:t>单击此处编辑母版文本样式</a:t>
             </a:r>
+            <a:endParaRPr lang="zh-CN" altLang="en-US"/>
           </a:p>
         </p:txBody>
       </p:sp>
@@ -1930,6 +1958,7 @@
               <a:rPr lang="zh-CN" altLang="en-US"/>
               <a:t>单击此处编辑母版文本样式</a:t>
             </a:r>
+            <a:endParaRPr lang="zh-CN" altLang="en-US"/>
           </a:p>
           <a:p>
             <a:pPr lvl="1"/>
@@ -1937,6 +1966,7 @@
               <a:rPr lang="zh-CN" altLang="en-US"/>
               <a:t>二级</a:t>
             </a:r>
+            <a:endParaRPr lang="zh-CN" altLang="en-US"/>
           </a:p>
           <a:p>
             <a:pPr lvl="2"/>
@@ -1944,6 +1974,7 @@
               <a:rPr lang="zh-CN" altLang="en-US"/>
               <a:t>三级</a:t>
             </a:r>
+            <a:endParaRPr lang="zh-CN" altLang="en-US"/>
           </a:p>
           <a:p>
             <a:pPr lvl="3"/>
@@ -1951,6 +1982,7 @@
               <a:rPr lang="zh-CN" altLang="en-US"/>
               <a:t>四级</a:t>
             </a:r>
+            <a:endParaRPr lang="zh-CN" altLang="en-US"/>
           </a:p>
           <a:p>
             <a:pPr lvl="4"/>
@@ -1958,6 +1990,7 @@
               <a:rPr lang="zh-CN" altLang="en-US"/>
               <a:t>五级</a:t>
             </a:r>
+            <a:endParaRPr lang="zh-CN" altLang="en-US"/>
           </a:p>
         </p:txBody>
       </p:sp>
@@ -1978,7 +2011,6 @@
           <a:p>
             <a:fld id="{837840E2-13A5-46A9-A265-C77FF1EECC77}" type="datetimeFigureOut">
               <a:rPr lang="zh-CN" altLang="en-US" smtClean="0"/>
-              <a:t>2025/12/15</a:t>
             </a:fld>
             <a:endParaRPr lang="zh-CN" altLang="en-US"/>
           </a:p>
@@ -2020,7 +2052,6 @@
           <a:p>
             <a:fld id="{079686F9-7E47-4853-B8F4-FBCF71CB48DC}" type="slidenum">
               <a:rPr lang="zh-CN" altLang="en-US" smtClean="0"/>
-              <a:t>‹#›</a:t>
             </a:fld>
             <a:endParaRPr lang="zh-CN" altLang="en-US"/>
           </a:p>
@@ -2070,6 +2101,7 @@
               <a:rPr lang="zh-CN" altLang="en-US"/>
               <a:t>单击此处编辑母版标题样式</a:t>
             </a:r>
+            <a:endParaRPr lang="zh-CN" altLang="en-US"/>
           </a:p>
         </p:txBody>
       </p:sp>
@@ -2090,7 +2122,6 @@
           <a:p>
             <a:fld id="{837840E2-13A5-46A9-A265-C77FF1EECC77}" type="datetimeFigureOut">
               <a:rPr lang="zh-CN" altLang="en-US" smtClean="0"/>
-              <a:t>2025/12/15</a:t>
             </a:fld>
             <a:endParaRPr lang="zh-CN" altLang="en-US"/>
           </a:p>
@@ -2132,7 +2163,6 @@
           <a:p>
             <a:fld id="{079686F9-7E47-4853-B8F4-FBCF71CB48DC}" type="slidenum">
               <a:rPr lang="zh-CN" altLang="en-US" smtClean="0"/>
-              <a:t>‹#›</a:t>
             </a:fld>
             <a:endParaRPr lang="zh-CN" altLang="en-US"/>
           </a:p>
@@ -2180,7 +2210,6 @@
           <a:p>
             <a:fld id="{837840E2-13A5-46A9-A265-C77FF1EECC77}" type="datetimeFigureOut">
               <a:rPr lang="zh-CN" altLang="en-US" smtClean="0"/>
-              <a:t>2025/12/15</a:t>
             </a:fld>
             <a:endParaRPr lang="zh-CN" altLang="en-US"/>
           </a:p>
@@ -2222,7 +2251,6 @@
           <a:p>
             <a:fld id="{079686F9-7E47-4853-B8F4-FBCF71CB48DC}" type="slidenum">
               <a:rPr lang="zh-CN" altLang="en-US" smtClean="0"/>
-              <a:t>‹#›</a:t>
             </a:fld>
             <a:endParaRPr lang="zh-CN" altLang="en-US"/>
           </a:p>
@@ -2281,6 +2309,7 @@
               <a:rPr lang="zh-CN" altLang="en-US"/>
               <a:t>单击此处编辑母版标题样式</a:t>
             </a:r>
+            <a:endParaRPr lang="zh-CN" altLang="en-US"/>
           </a:p>
         </p:txBody>
       </p:sp>
@@ -2337,6 +2366,7 @@
               <a:rPr lang="zh-CN" altLang="en-US"/>
               <a:t>单击此处编辑母版文本样式</a:t>
             </a:r>
+            <a:endParaRPr lang="zh-CN" altLang="en-US"/>
           </a:p>
           <a:p>
             <a:pPr lvl="1"/>
@@ -2344,6 +2374,7 @@
               <a:rPr lang="zh-CN" altLang="en-US"/>
               <a:t>二级</a:t>
             </a:r>
+            <a:endParaRPr lang="zh-CN" altLang="en-US"/>
           </a:p>
           <a:p>
             <a:pPr lvl="2"/>
@@ -2351,6 +2382,7 @@
               <a:rPr lang="zh-CN" altLang="en-US"/>
               <a:t>三级</a:t>
             </a:r>
+            <a:endParaRPr lang="zh-CN" altLang="en-US"/>
           </a:p>
           <a:p>
             <a:pPr lvl="3"/>
@@ -2358,6 +2390,7 @@
               <a:rPr lang="zh-CN" altLang="en-US"/>
               <a:t>四级</a:t>
             </a:r>
+            <a:endParaRPr lang="zh-CN" altLang="en-US"/>
           </a:p>
           <a:p>
             <a:pPr lvl="4"/>
@@ -2365,6 +2398,7 @@
               <a:rPr lang="zh-CN" altLang="en-US"/>
               <a:t>五级</a:t>
             </a:r>
+            <a:endParaRPr lang="zh-CN" altLang="en-US"/>
           </a:p>
         </p:txBody>
       </p:sp>
@@ -2430,6 +2464,7 @@
               <a:rPr lang="zh-CN" altLang="en-US"/>
               <a:t>单击此处编辑母版文本样式</a:t>
             </a:r>
+            <a:endParaRPr lang="zh-CN" altLang="en-US"/>
           </a:p>
         </p:txBody>
       </p:sp>
@@ -2450,7 +2485,6 @@
           <a:p>
             <a:fld id="{837840E2-13A5-46A9-A265-C77FF1EECC77}" type="datetimeFigureOut">
               <a:rPr lang="zh-CN" altLang="en-US" smtClean="0"/>
-              <a:t>2025/12/15</a:t>
             </a:fld>
             <a:endParaRPr lang="zh-CN" altLang="en-US"/>
           </a:p>
@@ -2492,7 +2526,6 @@
           <a:p>
             <a:fld id="{079686F9-7E47-4853-B8F4-FBCF71CB48DC}" type="slidenum">
               <a:rPr lang="zh-CN" altLang="en-US" smtClean="0"/>
-              <a:t>‹#›</a:t>
             </a:fld>
             <a:endParaRPr lang="zh-CN" altLang="en-US"/>
           </a:p>
@@ -2551,6 +2584,7 @@
               <a:rPr lang="zh-CN" altLang="en-US"/>
               <a:t>单击此处编辑母版标题样式</a:t>
             </a:r>
+            <a:endParaRPr lang="zh-CN" altLang="en-US"/>
           </a:p>
         </p:txBody>
       </p:sp>
@@ -2677,6 +2711,7 @@
               <a:rPr lang="zh-CN" altLang="en-US"/>
               <a:t>单击此处编辑母版文本样式</a:t>
             </a:r>
+            <a:endParaRPr lang="zh-CN" altLang="en-US"/>
           </a:p>
         </p:txBody>
       </p:sp>
@@ -2697,7 +2732,6 @@
           <a:p>
             <a:fld id="{837840E2-13A5-46A9-A265-C77FF1EECC77}" type="datetimeFigureOut">
               <a:rPr lang="zh-CN" altLang="en-US" smtClean="0"/>
-              <a:t>2025/12/15</a:t>
             </a:fld>
             <a:endParaRPr lang="zh-CN" altLang="en-US"/>
           </a:p>
@@ -2739,7 +2773,6 @@
           <a:p>
             <a:fld id="{079686F9-7E47-4853-B8F4-FBCF71CB48DC}" type="slidenum">
               <a:rPr lang="zh-CN" altLang="en-US" smtClean="0"/>
-              <a:t>‹#›</a:t>
             </a:fld>
             <a:endParaRPr lang="zh-CN" altLang="en-US"/>
           </a:p>
@@ -2804,6 +2837,7 @@
               <a:rPr lang="zh-CN" altLang="en-US"/>
               <a:t>单击此处编辑母版标题样式</a:t>
             </a:r>
+            <a:endParaRPr lang="zh-CN" altLang="en-US"/>
           </a:p>
         </p:txBody>
       </p:sp>
@@ -2837,6 +2871,7 @@
               <a:rPr lang="zh-CN" altLang="en-US"/>
               <a:t>单击此处编辑母版文本样式</a:t>
             </a:r>
+            <a:endParaRPr lang="zh-CN" altLang="en-US"/>
           </a:p>
           <a:p>
             <a:pPr lvl="1"/>
@@ -2844,6 +2879,7 @@
               <a:rPr lang="zh-CN" altLang="en-US"/>
               <a:t>二级</a:t>
             </a:r>
+            <a:endParaRPr lang="zh-CN" altLang="en-US"/>
           </a:p>
           <a:p>
             <a:pPr lvl="2"/>
@@ -2851,6 +2887,7 @@
               <a:rPr lang="zh-CN" altLang="en-US"/>
               <a:t>三级</a:t>
             </a:r>
+            <a:endParaRPr lang="zh-CN" altLang="en-US"/>
           </a:p>
           <a:p>
             <a:pPr lvl="3"/>
@@ -2858,6 +2895,7 @@
               <a:rPr lang="zh-CN" altLang="en-US"/>
               <a:t>四级</a:t>
             </a:r>
+            <a:endParaRPr lang="zh-CN" altLang="en-US"/>
           </a:p>
           <a:p>
             <a:pPr lvl="4"/>
@@ -2865,6 +2903,7 @@
               <a:rPr lang="zh-CN" altLang="en-US"/>
               <a:t>五级</a:t>
             </a:r>
+            <a:endParaRPr lang="zh-CN" altLang="en-US"/>
           </a:p>
         </p:txBody>
       </p:sp>
@@ -2903,7 +2942,6 @@
           <a:p>
             <a:fld id="{837840E2-13A5-46A9-A265-C77FF1EECC77}" type="datetimeFigureOut">
               <a:rPr lang="zh-CN" altLang="en-US" smtClean="0"/>
-              <a:t>2025/12/15</a:t>
             </a:fld>
             <a:endParaRPr lang="zh-CN" altLang="en-US"/>
           </a:p>
@@ -2981,7 +3019,6 @@
           <a:p>
             <a:fld id="{079686F9-7E47-4853-B8F4-FBCF71CB48DC}" type="slidenum">
               <a:rPr lang="zh-CN" altLang="en-US" smtClean="0"/>
-              <a:t>‹#›</a:t>
             </a:fld>
             <a:endParaRPr lang="zh-CN" altLang="en-US"/>
           </a:p>
@@ -3353,6 +3390,9 @@
               </a:rPr>
               <a:t>11</a:t>
             </a:r>
+            <a:endParaRPr lang="en-US" altLang="zh-CN" sz="3200" dirty="0">
+              <a:sym typeface="+mn-ea"/>
+            </a:endParaRPr>
           </a:p>
         </p:txBody>
       </p:sp>
@@ -3528,6 +3568,15 @@
               </a:rPr>
               <a:t>条左右是</a:t>
             </a:r>
+            <a:endParaRPr lang="zh-CN" altLang="en-US" sz="2000" dirty="0">
+              <a:solidFill>
+                <a:schemeClr val="tx2">
+                  <a:lumMod val="75000"/>
+                  <a:lumOff val="25000"/>
+                </a:schemeClr>
+              </a:solidFill>
+              <a:sym typeface="+mn-ea"/>
+            </a:endParaRPr>
           </a:p>
           <a:p>
             <a:pPr indent="0" algn="l">
@@ -3608,6 +3657,15 @@
               </a:rPr>
               <a:t>微调和评估，对比结果发现提升幅度更小</a:t>
             </a:r>
+            <a:endParaRPr lang="zh-CN" altLang="en-US" sz="2000" dirty="0">
+              <a:solidFill>
+                <a:schemeClr val="tx2">
+                  <a:lumMod val="75000"/>
+                  <a:lumOff val="25000"/>
+                </a:schemeClr>
+              </a:solidFill>
+              <a:sym typeface="+mn-ea"/>
+            </a:endParaRPr>
           </a:p>
           <a:p>
             <a:pPr indent="0" algn="l">
@@ -3712,6 +3770,15 @@
               </a:rPr>
               <a:t>微调和评估，整体表现不错</a:t>
             </a:r>
+            <a:endParaRPr lang="zh-CN" altLang="en-US" sz="2000" dirty="0">
+              <a:solidFill>
+                <a:schemeClr val="tx2">
+                  <a:lumMod val="75000"/>
+                  <a:lumOff val="25000"/>
+                </a:schemeClr>
+              </a:solidFill>
+              <a:sym typeface="+mn-ea"/>
+            </a:endParaRPr>
           </a:p>
           <a:p>
             <a:pPr indent="0" algn="l">
@@ -3756,6 +3823,9 @@
               </a:rPr>
               <a:t>非推理）与模型参数</a:t>
             </a:r>
+            <a:endParaRPr lang="zh-CN" altLang="en-US" sz="2000" dirty="0">
+              <a:sym typeface="+mn-ea"/>
+            </a:endParaRPr>
           </a:p>
           <a:p>
             <a:pPr indent="0" algn="l">
@@ -3842,6 +3912,9 @@
               </a:rPr>
               <a:t>--- P0 ---</a:t>
             </a:r>
+            <a:endParaRPr lang="en-US" altLang="zh-CN" sz="2000" dirty="0">
+              <a:sym typeface="+mn-ea"/>
+            </a:endParaRPr>
           </a:p>
           <a:p>
             <a:pPr indent="0" algn="l">
@@ -3960,18 +4033,774 @@
               </a:rPr>
               <a:t> NeurIPS 2024</a:t>
             </a:r>
-          </a:p>
-        </p:txBody>
-      </p:sp>
-      <p:sp>
-        <p:nvSpPr>
-          <p:cNvPr id="3" name="文本框 2">
-            <a:extLst>
-              <a:ext uri="{FF2B5EF4-FFF2-40B4-BE49-F238E27FC236}">
-                <a16:creationId xmlns:a16="http://schemas.microsoft.com/office/drawing/2014/main" id="{90601AF6-3E80-4649-81BF-575887790C77}"/>
-              </a:ext>
-            </a:extLst>
-          </p:cNvPr>
+            <a:endParaRPr lang="en-US" altLang="zh-CN" sz="2000" dirty="0">
+              <a:effectLst/>
+              <a:latin typeface="Times New Roman" panose="02020603050405020304" pitchFamily="18" charset="0"/>
+              <a:cs typeface="Times New Roman" panose="02020603050405020304" pitchFamily="18" charset="0"/>
+            </a:endParaRPr>
+          </a:p>
+        </p:txBody>
+      </p:sp>
+      <p:sp>
+        <p:nvSpPr>
+          <p:cNvPr id="3" name="文本框 2"/>
+          <p:cNvSpPr txBox="1"/>
+          <p:nvPr/>
+        </p:nvSpPr>
+        <p:spPr>
+          <a:xfrm>
+            <a:off x="176570" y="911905"/>
+            <a:ext cx="11761078" cy="1162819"/>
+          </a:xfrm>
+          <a:prstGeom prst="rect">
+            <a:avLst/>
+          </a:prstGeom>
+          <a:ln>
+            <a:solidFill>
+              <a:schemeClr val="bg1"/>
+            </a:solidFill>
+          </a:ln>
+        </p:spPr>
+        <p:style>
+          <a:lnRef idx="2">
+            <a:schemeClr val="dk1"/>
+          </a:lnRef>
+          <a:fillRef idx="1">
+            <a:schemeClr val="lt1"/>
+          </a:fillRef>
+          <a:effectRef idx="0">
+            <a:schemeClr val="dk1"/>
+          </a:effectRef>
+          <a:fontRef idx="minor">
+            <a:schemeClr val="dk1"/>
+          </a:fontRef>
+        </p:style>
+        <p:txBody>
+          <a:bodyPr wrap="square" rtlCol="0">
+            <a:spAutoFit/>
+          </a:bodyPr>
+          <a:lstStyle/>
+          <a:p>
+            <a:pPr>
+              <a:lnSpc>
+                <a:spcPct val="150000"/>
+              </a:lnSpc>
+            </a:pPr>
+            <a:r>
+              <a:rPr lang="zh-CN" altLang="en-US" sz="1600" dirty="0">
+                <a:latin typeface="+mn-ea"/>
+              </a:rPr>
+              <a:t>方法论：</a:t>
+            </a:r>
+            <a:r>
+              <a:rPr lang="zh-CN" altLang="en-US" sz="1600" b="0" i="0" dirty="0">
+                <a:solidFill>
+                  <a:srgbClr val="000000"/>
+                </a:solidFill>
+                <a:effectLst/>
+                <a:latin typeface="+mn-ea"/>
+              </a:rPr>
+              <a:t>数据集</a:t>
+            </a:r>
+            <a:r>
+              <a:rPr lang="en-US" altLang="zh-CN" sz="1600" b="0" i="0" dirty="0">
+                <a:solidFill>
+                  <a:srgbClr val="000000"/>
+                </a:solidFill>
+                <a:effectLst/>
+                <a:latin typeface="+mn-ea"/>
+              </a:rPr>
+              <a:t>PYX</a:t>
+            </a:r>
+            <a:r>
+              <a:rPr lang="zh-CN" altLang="en-US" sz="1600" dirty="0">
+                <a:solidFill>
+                  <a:srgbClr val="000000"/>
+                </a:solidFill>
+                <a:latin typeface="+mn-ea"/>
+              </a:rPr>
+              <a:t>构建和训练方案</a:t>
+            </a:r>
+            <a:endParaRPr lang="en-US" altLang="zh-CN" sz="1600" b="0" i="0" dirty="0">
+              <a:solidFill>
+                <a:srgbClr val="000000"/>
+              </a:solidFill>
+              <a:effectLst/>
+              <a:latin typeface="+mn-ea"/>
+            </a:endParaRPr>
+          </a:p>
+          <a:p>
+            <a:pPr>
+              <a:lnSpc>
+                <a:spcPct val="150000"/>
+              </a:lnSpc>
+            </a:pPr>
+            <a:r>
+              <a:rPr lang="en-US" altLang="zh-CN" sz="1600" dirty="0">
+                <a:solidFill>
+                  <a:srgbClr val="000000"/>
+                </a:solidFill>
+                <a:latin typeface="+mn-ea"/>
+              </a:rPr>
+              <a:t>	1. </a:t>
+            </a:r>
+            <a:r>
+              <a:rPr lang="zh-CN" altLang="en-US" sz="1600" b="0" i="0" dirty="0">
+                <a:effectLst/>
+                <a:latin typeface="+mn-ea"/>
+              </a:rPr>
+              <a:t>仅使用可执行数据进行训练；先将代码解析为抽象语法树，再采样子树作为可解析的种子启发大模型生产</a:t>
+            </a:r>
+            <a:endParaRPr lang="en-US" altLang="zh-CN" sz="1600" dirty="0">
+              <a:solidFill>
+                <a:srgbClr val="000000"/>
+              </a:solidFill>
+              <a:latin typeface="+mn-ea"/>
+            </a:endParaRPr>
+          </a:p>
+          <a:p>
+            <a:pPr>
+              <a:lnSpc>
+                <a:spcPct val="150000"/>
+              </a:lnSpc>
+            </a:pPr>
+            <a:r>
+              <a:rPr lang="en-US" altLang="zh-CN" sz="1600" dirty="0">
+                <a:solidFill>
+                  <a:srgbClr val="000000"/>
+                </a:solidFill>
+                <a:latin typeface="+mn-ea"/>
+              </a:rPr>
+              <a:t>	2. </a:t>
+            </a:r>
+            <a:r>
+              <a:rPr lang="zh-CN" altLang="en-US" sz="1600" b="0" i="0" dirty="0">
+                <a:effectLst/>
+                <a:latin typeface="+mn-ea"/>
+              </a:rPr>
+              <a:t>“自然语言到代码样本 </a:t>
+            </a:r>
+            <a:r>
+              <a:rPr lang="en-US" altLang="zh-CN" sz="1600" b="0" i="0" dirty="0">
+                <a:effectLst/>
+                <a:latin typeface="+mn-ea"/>
+              </a:rPr>
+              <a:t>+ </a:t>
+            </a:r>
+            <a:r>
+              <a:rPr lang="zh-CN" altLang="en-US" sz="1600" b="0" i="0" dirty="0">
+                <a:effectLst/>
+                <a:latin typeface="+mn-ea"/>
+              </a:rPr>
+              <a:t>正向独白 </a:t>
+            </a:r>
+            <a:r>
+              <a:rPr lang="en-US" altLang="zh-CN" sz="1600" b="0" i="0" dirty="0">
+                <a:effectLst/>
+                <a:latin typeface="+mn-ea"/>
+              </a:rPr>
+              <a:t>+ </a:t>
+            </a:r>
+            <a:r>
+              <a:rPr lang="zh-CN" altLang="en-US" sz="1600" b="0" i="0" dirty="0">
+                <a:effectLst/>
+                <a:latin typeface="+mn-ea"/>
+              </a:rPr>
+              <a:t>反向独白” 的联合数据集训练，损失通过代码和独白 </a:t>
+            </a:r>
+            <a:r>
+              <a:rPr lang="en-US" altLang="zh-CN" sz="1600" b="0" i="0" dirty="0">
+                <a:effectLst/>
+                <a:latin typeface="+mn-ea"/>
+              </a:rPr>
+              <a:t>token </a:t>
+            </a:r>
+            <a:r>
+              <a:rPr lang="zh-CN" altLang="en-US" sz="1600" b="0" i="0" dirty="0">
+                <a:effectLst/>
+                <a:latin typeface="+mn-ea"/>
+              </a:rPr>
+              <a:t>的交叉熵损失累积计算</a:t>
+            </a:r>
+            <a:endParaRPr lang="zh-CN" altLang="en-US" sz="1600" dirty="0">
+              <a:latin typeface="+mn-ea"/>
+            </a:endParaRPr>
+          </a:p>
+        </p:txBody>
+      </p:sp>
+      <p:sp>
+        <p:nvSpPr>
+          <p:cNvPr id="5" name="文本框 4"/>
+          <p:cNvSpPr txBox="1"/>
+          <p:nvPr/>
+        </p:nvSpPr>
+        <p:spPr>
+          <a:xfrm>
+            <a:off x="176572" y="2393632"/>
+            <a:ext cx="11761078" cy="793359"/>
+          </a:xfrm>
+          <a:prstGeom prst="rect">
+            <a:avLst/>
+          </a:prstGeom>
+          <a:ln>
+            <a:solidFill>
+              <a:schemeClr val="bg1"/>
+            </a:solidFill>
+          </a:ln>
+        </p:spPr>
+        <p:style>
+          <a:lnRef idx="2">
+            <a:schemeClr val="dk1"/>
+          </a:lnRef>
+          <a:fillRef idx="1">
+            <a:schemeClr val="lt1"/>
+          </a:fillRef>
+          <a:effectRef idx="0">
+            <a:schemeClr val="dk1"/>
+          </a:effectRef>
+          <a:fontRef idx="minor">
+            <a:schemeClr val="dk1"/>
+          </a:fontRef>
+        </p:style>
+        <p:txBody>
+          <a:bodyPr wrap="square" rtlCol="0">
+            <a:spAutoFit/>
+          </a:bodyPr>
+          <a:lstStyle/>
+          <a:p>
+            <a:pPr>
+              <a:lnSpc>
+                <a:spcPct val="150000"/>
+              </a:lnSpc>
+            </a:pPr>
+            <a:r>
+              <a:rPr lang="zh-CN" altLang="en-US" sz="1600" dirty="0">
+                <a:latin typeface="+mn-ea"/>
+              </a:rPr>
+              <a:t>训练集：  </a:t>
+            </a:r>
+            <a:r>
+              <a:rPr lang="en-US" altLang="zh-CN" sz="1600" dirty="0">
+                <a:latin typeface="+mn-ea"/>
+              </a:rPr>
+              <a:t>1.</a:t>
+            </a:r>
+            <a:r>
+              <a:rPr lang="zh-CN" altLang="en-US" sz="1600" b="0" i="0" dirty="0">
+                <a:effectLst/>
+                <a:latin typeface="+mn-ea"/>
+              </a:rPr>
+              <a:t>仅使用可执行数据进行训练；</a:t>
+            </a:r>
+            <a:endParaRPr lang="en-US" altLang="zh-CN" sz="1600" b="0" i="0" dirty="0">
+              <a:effectLst/>
+              <a:latin typeface="+mn-ea"/>
+            </a:endParaRPr>
+          </a:p>
+          <a:p>
+            <a:pPr>
+              <a:lnSpc>
+                <a:spcPct val="150000"/>
+              </a:lnSpc>
+            </a:pPr>
+            <a:r>
+              <a:rPr lang="en-US" altLang="zh-CN" sz="1600" dirty="0">
+                <a:solidFill>
+                  <a:srgbClr val="000000"/>
+                </a:solidFill>
+                <a:latin typeface="+mn-ea"/>
+              </a:rPr>
+              <a:t>	2.</a:t>
+            </a:r>
+            <a:r>
+              <a:rPr lang="zh-CN" altLang="en-US" sz="1600" b="0" i="0" dirty="0">
+                <a:effectLst/>
+                <a:latin typeface="+mn-ea"/>
+              </a:rPr>
+              <a:t>先将真实的代码解析为抽象语法树，再采样子树作为可解析的种子启发大模型生产（</a:t>
+            </a:r>
+            <a:r>
+              <a:rPr lang="en-US" altLang="zh-CN" sz="1600" b="0" i="0" dirty="0">
+                <a:effectLst/>
+                <a:latin typeface="+mn-ea"/>
+              </a:rPr>
+              <a:t>GPT-3.5-turbo </a:t>
+            </a:r>
+            <a:r>
+              <a:rPr lang="zh-CN" altLang="en-US" sz="1600" b="0" i="0" dirty="0">
+                <a:effectLst/>
+                <a:latin typeface="+mn-ea"/>
+              </a:rPr>
+              <a:t>）</a:t>
+            </a:r>
+            <a:endParaRPr lang="en-US" altLang="zh-CN" sz="1600" dirty="0">
+              <a:solidFill>
+                <a:srgbClr val="000000"/>
+              </a:solidFill>
+              <a:latin typeface="+mn-ea"/>
+            </a:endParaRPr>
+          </a:p>
+        </p:txBody>
+      </p:sp>
+      <p:sp>
+        <p:nvSpPr>
+          <p:cNvPr id="6" name="文本框 5"/>
+          <p:cNvSpPr txBox="1"/>
+          <p:nvPr/>
+        </p:nvSpPr>
+        <p:spPr>
+          <a:xfrm>
+            <a:off x="176571" y="3505899"/>
+            <a:ext cx="11761078" cy="424155"/>
+          </a:xfrm>
+          <a:prstGeom prst="rect">
+            <a:avLst/>
+          </a:prstGeom>
+          <a:ln>
+            <a:solidFill>
+              <a:schemeClr val="bg1"/>
+            </a:solidFill>
+          </a:ln>
+        </p:spPr>
+        <p:style>
+          <a:lnRef idx="2">
+            <a:schemeClr val="dk1"/>
+          </a:lnRef>
+          <a:fillRef idx="1">
+            <a:schemeClr val="lt1"/>
+          </a:fillRef>
+          <a:effectRef idx="0">
+            <a:schemeClr val="dk1"/>
+          </a:effectRef>
+          <a:fontRef idx="minor">
+            <a:schemeClr val="dk1"/>
+          </a:fontRef>
+        </p:style>
+        <p:txBody>
+          <a:bodyPr wrap="square" rtlCol="0">
+            <a:spAutoFit/>
+          </a:bodyPr>
+          <a:lstStyle/>
+          <a:p>
+            <a:pPr>
+              <a:lnSpc>
+                <a:spcPct val="150000"/>
+              </a:lnSpc>
+            </a:pPr>
+            <a:r>
+              <a:rPr lang="zh-CN" altLang="en-US" sz="1600" dirty="0">
+                <a:latin typeface="+mn-ea"/>
+              </a:rPr>
+              <a:t>测试集：</a:t>
+            </a:r>
+            <a:r>
+              <a:rPr lang="en-US" altLang="zh-CN" sz="1600" b="0" i="0" dirty="0">
+                <a:effectLst/>
+                <a:latin typeface="+mn-ea"/>
+              </a:rPr>
+              <a:t> </a:t>
+            </a:r>
+            <a:r>
+              <a:rPr lang="en-US" altLang="zh-CN" sz="1600" b="0" i="0" dirty="0" err="1">
+                <a:effectLst/>
+                <a:latin typeface="+mn-ea"/>
+              </a:rPr>
+              <a:t>EvalPlus</a:t>
+            </a:r>
+            <a:r>
+              <a:rPr lang="zh-CN" altLang="en-US" sz="1600" dirty="0">
+                <a:latin typeface="+mn-ea"/>
+              </a:rPr>
+              <a:t>、</a:t>
+            </a:r>
+            <a:r>
+              <a:rPr lang="en-US" altLang="zh-CN" sz="1600" b="0" i="0" dirty="0">
+                <a:effectLst/>
+                <a:latin typeface="+mn-ea"/>
+              </a:rPr>
+              <a:t> LiveCodeBench-Lite</a:t>
+            </a:r>
+            <a:r>
+              <a:rPr lang="zh-CN" altLang="en-US" sz="1600" b="0" i="0" dirty="0">
+                <a:effectLst/>
+                <a:latin typeface="+mn-ea"/>
+              </a:rPr>
+              <a:t>、</a:t>
+            </a:r>
+            <a:r>
+              <a:rPr lang="en-US" altLang="zh-CN" sz="1600" b="0" i="0" dirty="0">
+                <a:effectLst/>
+                <a:latin typeface="+mn-ea"/>
+              </a:rPr>
+              <a:t> CRUXEval </a:t>
+            </a:r>
+            <a:r>
+              <a:rPr lang="zh-CN" altLang="en-US" sz="1600" b="0" i="0" dirty="0">
+                <a:effectLst/>
+                <a:latin typeface="+mn-ea"/>
+              </a:rPr>
+              <a:t>、</a:t>
+            </a:r>
+            <a:r>
+              <a:rPr lang="en-US" altLang="zh-CN" sz="1600" b="0" i="0" dirty="0">
+                <a:effectLst/>
+                <a:latin typeface="+mn-ea"/>
+              </a:rPr>
+              <a:t> LiveCodeBench -Exec</a:t>
+            </a:r>
+            <a:r>
+              <a:rPr lang="zh-CN" altLang="en-US" sz="1600" b="0" i="0" dirty="0">
+                <a:effectLst/>
+                <a:latin typeface="+mn-ea"/>
+              </a:rPr>
+              <a:t>、</a:t>
+            </a:r>
+            <a:r>
+              <a:rPr lang="en-US" altLang="zh-CN" sz="1600" dirty="0">
+                <a:latin typeface="+mn-ea"/>
+              </a:rPr>
+              <a:t>MBPP</a:t>
+            </a:r>
+            <a:r>
+              <a:rPr lang="zh-CN" altLang="en-US" sz="1600" dirty="0">
+                <a:latin typeface="+mn-ea"/>
+              </a:rPr>
+              <a:t>、</a:t>
+            </a:r>
+            <a:r>
+              <a:rPr lang="en-US" altLang="zh-CN" sz="1600" dirty="0" err="1">
+                <a:latin typeface="+mn-ea"/>
+              </a:rPr>
+              <a:t>HEval</a:t>
+            </a:r>
+            <a:endParaRPr lang="zh-CN" altLang="en-US" sz="1600" b="0" i="0" dirty="0">
+              <a:solidFill>
+                <a:srgbClr val="000000"/>
+              </a:solidFill>
+              <a:effectLst/>
+              <a:latin typeface="+mn-ea"/>
+            </a:endParaRPr>
+          </a:p>
+        </p:txBody>
+      </p:sp>
+      <p:sp>
+        <p:nvSpPr>
+          <p:cNvPr id="7" name="文本框 6"/>
+          <p:cNvSpPr txBox="1"/>
+          <p:nvPr/>
+        </p:nvSpPr>
+        <p:spPr>
+          <a:xfrm>
+            <a:off x="176570" y="4248962"/>
+            <a:ext cx="11761078" cy="793487"/>
+          </a:xfrm>
+          <a:prstGeom prst="rect">
+            <a:avLst/>
+          </a:prstGeom>
+          <a:ln>
+            <a:solidFill>
+              <a:schemeClr val="bg1"/>
+            </a:solidFill>
+          </a:ln>
+        </p:spPr>
+        <p:style>
+          <a:lnRef idx="2">
+            <a:schemeClr val="dk1"/>
+          </a:lnRef>
+          <a:fillRef idx="1">
+            <a:schemeClr val="lt1"/>
+          </a:fillRef>
+          <a:effectRef idx="0">
+            <a:schemeClr val="dk1"/>
+          </a:effectRef>
+          <a:fontRef idx="minor">
+            <a:schemeClr val="dk1"/>
+          </a:fontRef>
+        </p:style>
+        <p:txBody>
+          <a:bodyPr wrap="square" rtlCol="0">
+            <a:spAutoFit/>
+          </a:bodyPr>
+          <a:lstStyle/>
+          <a:p>
+            <a:pPr>
+              <a:lnSpc>
+                <a:spcPct val="150000"/>
+              </a:lnSpc>
+            </a:pPr>
+            <a:r>
+              <a:rPr lang="zh-CN" altLang="en-US" sz="1600" dirty="0">
+                <a:latin typeface="+mn-ea"/>
+              </a:rPr>
+              <a:t>训练情况：</a:t>
+            </a:r>
+            <a:r>
+              <a:rPr lang="en-US" altLang="zh-CN" sz="1600" dirty="0">
+                <a:latin typeface="+mn-ea"/>
+              </a:rPr>
+              <a:t>1. </a:t>
+            </a:r>
+            <a:r>
+              <a:rPr lang="zh-CN" altLang="en-US" sz="1600" dirty="0">
+                <a:latin typeface="+mn-ea"/>
+              </a:rPr>
+              <a:t>对</a:t>
+            </a:r>
+            <a:r>
+              <a:rPr lang="en-US" altLang="zh-CN" sz="1600" b="0" i="0" dirty="0" err="1">
+                <a:effectLst/>
+                <a:latin typeface="+mn-ea"/>
+              </a:rPr>
+              <a:t>DeepSeekCoder</a:t>
+            </a:r>
+            <a:r>
+              <a:rPr lang="en-US" altLang="zh-CN" sz="1600" b="0" i="0" dirty="0">
+                <a:effectLst/>
+                <a:latin typeface="+mn-ea"/>
+              </a:rPr>
+              <a:t> </a:t>
+            </a:r>
+            <a:r>
+              <a:rPr lang="zh-CN" altLang="en-US" sz="1600" b="0" i="0" dirty="0">
+                <a:effectLst/>
+                <a:latin typeface="+mn-ea"/>
+              </a:rPr>
+              <a:t> </a:t>
+            </a:r>
+            <a:r>
+              <a:rPr lang="en-US" altLang="zh-CN" sz="1600" b="0" i="0" dirty="0">
+                <a:effectLst/>
+                <a:latin typeface="+mn-ea"/>
+              </a:rPr>
+              <a:t>6</a:t>
+            </a:r>
+            <a:r>
+              <a:rPr lang="en-US" altLang="zh-CN" sz="1600" dirty="0">
+                <a:latin typeface="+mn-ea"/>
+              </a:rPr>
+              <a:t>.</a:t>
+            </a:r>
+            <a:r>
+              <a:rPr lang="en-US" altLang="zh-CN" sz="1600" b="0" i="0" dirty="0">
+                <a:effectLst/>
+                <a:latin typeface="+mn-ea"/>
+              </a:rPr>
+              <a:t>7B </a:t>
+            </a:r>
+            <a:r>
+              <a:rPr lang="zh-CN" altLang="en-US" sz="1600" b="0" i="0" dirty="0">
+                <a:effectLst/>
+                <a:latin typeface="+mn-ea"/>
+              </a:rPr>
+              <a:t>进行训练</a:t>
+            </a:r>
+            <a:endParaRPr lang="en-US" altLang="zh-CN" sz="1600" b="0" i="0" dirty="0">
+              <a:effectLst/>
+              <a:latin typeface="+mn-ea"/>
+            </a:endParaRPr>
+          </a:p>
+          <a:p>
+            <a:pPr>
+              <a:lnSpc>
+                <a:spcPct val="150000"/>
+              </a:lnSpc>
+            </a:pPr>
+            <a:r>
+              <a:rPr lang="en-US" altLang="zh-CN" sz="1600" dirty="0">
+                <a:solidFill>
+                  <a:srgbClr val="000000"/>
+                </a:solidFill>
+                <a:latin typeface="+mn-ea"/>
+              </a:rPr>
+              <a:t>	  2. </a:t>
+            </a:r>
+            <a:r>
+              <a:rPr lang="zh-CN" altLang="en-US" sz="1600" b="0" i="0" dirty="0">
+                <a:effectLst/>
+                <a:latin typeface="+mn-ea"/>
+              </a:rPr>
+              <a:t> </a:t>
+            </a:r>
+            <a:r>
+              <a:rPr lang="en-US" altLang="zh-CN" sz="1600" b="0" i="0" dirty="0">
+                <a:effectLst/>
+                <a:latin typeface="+mn-ea"/>
+              </a:rPr>
+              <a:t>8 </a:t>
+            </a:r>
+            <a:r>
+              <a:rPr lang="zh-CN" altLang="en-US" sz="1600" b="0" i="0" dirty="0">
+                <a:effectLst/>
+                <a:latin typeface="+mn-ea"/>
+              </a:rPr>
+              <a:t>张 </a:t>
+            </a:r>
+            <a:r>
+              <a:rPr lang="en-US" altLang="zh-CN" sz="1600" b="0" i="0" dirty="0">
+                <a:effectLst/>
+                <a:latin typeface="+mn-ea"/>
+              </a:rPr>
+              <a:t>NVIDIA RTX A6000 GPU</a:t>
+            </a:r>
+            <a:r>
+              <a:rPr lang="zh-CN" altLang="en-US" sz="1600" b="0" i="0" dirty="0">
+                <a:effectLst/>
+                <a:latin typeface="+mn-ea"/>
+              </a:rPr>
+              <a:t>、训练 </a:t>
+            </a:r>
+            <a:r>
+              <a:rPr lang="en-US" altLang="zh-CN" sz="1600" b="0" i="0" dirty="0">
+                <a:effectLst/>
+                <a:latin typeface="+mn-ea"/>
+              </a:rPr>
+              <a:t>2 </a:t>
+            </a:r>
+            <a:r>
+              <a:rPr lang="zh-CN" altLang="en-US" sz="1600" b="0" i="0" dirty="0">
+                <a:effectLst/>
+                <a:latin typeface="+mn-ea"/>
+              </a:rPr>
+              <a:t>个 </a:t>
+            </a:r>
+            <a:r>
+              <a:rPr lang="en-US" altLang="zh-CN" sz="1600" b="0" i="0" dirty="0">
+                <a:effectLst/>
+                <a:latin typeface="+mn-ea"/>
+              </a:rPr>
+              <a:t>epoch</a:t>
+            </a:r>
+            <a:r>
+              <a:rPr lang="zh-CN" altLang="en-US" sz="1600" b="0" i="0" dirty="0">
+                <a:effectLst/>
+                <a:latin typeface="+mn-ea"/>
+              </a:rPr>
+              <a:t>、</a:t>
+            </a:r>
+            <a:r>
+              <a:rPr lang="en-US" altLang="zh-CN" sz="1600" b="0" i="0" dirty="0">
+                <a:effectLst/>
+                <a:latin typeface="+mn-ea"/>
+              </a:rPr>
+              <a:t>5e-5 </a:t>
+            </a:r>
+            <a:r>
+              <a:rPr lang="zh-CN" altLang="en-US" sz="1600" b="0" i="0" dirty="0">
+                <a:effectLst/>
+                <a:latin typeface="+mn-ea"/>
+              </a:rPr>
+              <a:t>的初始学习率</a:t>
+            </a:r>
+            <a:r>
+              <a:rPr lang="zh-CN" altLang="en-US" sz="1600" dirty="0">
+                <a:latin typeface="+mn-ea"/>
+              </a:rPr>
+              <a:t>、</a:t>
+            </a:r>
+            <a:r>
+              <a:rPr lang="zh-CN" altLang="en-US" sz="1600" b="0" i="0" dirty="0">
+                <a:effectLst/>
+                <a:latin typeface="+mn-ea"/>
+              </a:rPr>
+              <a:t>余弦衰减策略降至 </a:t>
+            </a:r>
+            <a:r>
+              <a:rPr lang="en-US" altLang="zh-CN" sz="1600" b="0" i="0" dirty="0">
+                <a:effectLst/>
+                <a:latin typeface="+mn-ea"/>
+              </a:rPr>
+              <a:t>5e-6</a:t>
+            </a:r>
+            <a:endParaRPr lang="en-US" altLang="zh-CN" sz="1600" dirty="0">
+              <a:solidFill>
+                <a:srgbClr val="000000"/>
+              </a:solidFill>
+              <a:latin typeface="+mn-ea"/>
+            </a:endParaRPr>
+          </a:p>
+        </p:txBody>
+      </p:sp>
+    </p:spTree>
+  </p:cSld>
+  <p:clrMapOvr>
+    <a:masterClrMapping/>
+  </p:clrMapOvr>
+</p:sld>
+</file>
+
+<file path=ppt/slides/slide11.xml><?xml version="1.0" encoding="utf-8"?>
+<p:sld xmlns:a="http://schemas.openxmlformats.org/drawingml/2006/main" xmlns:r="http://schemas.openxmlformats.org/officeDocument/2006/relationships" xmlns:p="http://schemas.openxmlformats.org/presentationml/2006/main">
+  <p:cSld>
+    <p:spTree>
+      <p:nvGrpSpPr>
+        <p:cNvPr id="1" name=""/>
+        <p:cNvGrpSpPr/>
+        <p:nvPr/>
+      </p:nvGrpSpPr>
+      <p:grpSpPr>
+        <a:xfrm>
+          <a:off x="0" y="0"/>
+          <a:ext cx="0" cy="0"/>
+          <a:chOff x="0" y="0"/>
+          <a:chExt cx="0" cy="0"/>
+        </a:xfrm>
+      </p:grpSpPr>
+      <p:sp>
+        <p:nvSpPr>
+          <p:cNvPr id="4" name="文本框 3"/>
+          <p:cNvSpPr txBox="1"/>
+          <p:nvPr/>
+        </p:nvSpPr>
+        <p:spPr>
+          <a:xfrm>
+            <a:off x="176573" y="189385"/>
+            <a:ext cx="11655907" cy="400110"/>
+          </a:xfrm>
+          <a:prstGeom prst="rect">
+            <a:avLst/>
+          </a:prstGeom>
+          <a:noFill/>
+        </p:spPr>
+        <p:txBody>
+          <a:bodyPr wrap="square" rtlCol="0">
+            <a:spAutoFit/>
+          </a:bodyPr>
+          <a:lstStyle/>
+          <a:p>
+            <a:r>
+              <a:rPr lang="en-US" altLang="zh-CN" sz="2000" i="1" dirty="0">
+                <a:latin typeface="Times New Roman" panose="02020603050405020304" pitchFamily="18" charset="0"/>
+                <a:cs typeface="Times New Roman" panose="02020603050405020304" pitchFamily="18" charset="0"/>
+              </a:rPr>
+              <a:t>4. </a:t>
+            </a:r>
+            <a:r>
+              <a:rPr lang="en-US" altLang="zh-CN" sz="2000" i="1" dirty="0">
+                <a:effectLst/>
+                <a:latin typeface="Times New Roman" panose="02020603050405020304" pitchFamily="18" charset="0"/>
+                <a:cs typeface="Times New Roman" panose="02020603050405020304" pitchFamily="18" charset="0"/>
+              </a:rPr>
+              <a:t>Semcoder: Training code language models with comprehensive semantics reasoning</a:t>
+            </a:r>
+            <a:r>
+              <a:rPr lang="en-US" altLang="zh-CN" sz="2000" dirty="0">
+                <a:effectLst/>
+                <a:latin typeface="Times New Roman" panose="02020603050405020304" pitchFamily="18" charset="0"/>
+                <a:cs typeface="Times New Roman" panose="02020603050405020304" pitchFamily="18" charset="0"/>
+              </a:rPr>
+              <a:t> NeurIPS 2024</a:t>
+            </a:r>
+            <a:endParaRPr lang="en-US" altLang="zh-CN" sz="2000" dirty="0">
+              <a:effectLst/>
+              <a:latin typeface="Times New Roman" panose="02020603050405020304" pitchFamily="18" charset="0"/>
+              <a:cs typeface="Times New Roman" panose="02020603050405020304" pitchFamily="18" charset="0"/>
+            </a:endParaRPr>
+          </a:p>
+        </p:txBody>
+      </p:sp>
+      <p:sp>
+        <p:nvSpPr>
+          <p:cNvPr id="3" name="文本框 2"/>
           <p:cNvSpPr txBox="1"/>
           <p:nvPr/>
         </p:nvSpPr>
@@ -4020,25 +4849,22 @@
               </a:rPr>
               <a:t>实验评估：</a:t>
             </a:r>
+            <a:endParaRPr lang="zh-CN" altLang="en-US" sz="1600" dirty="0">
+              <a:latin typeface="+mn-ea"/>
+            </a:endParaRPr>
           </a:p>
         </p:txBody>
       </p:sp>
       <p:pic>
         <p:nvPicPr>
-          <p:cNvPr id="8" name="图片 7">
-            <a:extLst>
-              <a:ext uri="{FF2B5EF4-FFF2-40B4-BE49-F238E27FC236}">
-                <a16:creationId xmlns:a16="http://schemas.microsoft.com/office/drawing/2014/main" id="{94D2B453-1810-1EE6-AC0A-085C7E6ECD8A}"/>
-              </a:ext>
-            </a:extLst>
-          </p:cNvPr>
+          <p:cNvPr id="8" name="图片 7"/>
           <p:cNvPicPr>
             <a:picLocks noChangeAspect="1"/>
           </p:cNvPicPr>
           <p:nvPr/>
         </p:nvPicPr>
         <p:blipFill>
-          <a:blip r:embed="rId2"/>
+          <a:blip r:embed="rId1"/>
           <a:stretch>
             <a:fillRect/>
           </a:stretch>
@@ -4054,11 +4880,6 @@
         </p:spPr>
       </p:pic>
     </p:spTree>
-    <p:extLst>
-      <p:ext uri="{BB962C8B-B14F-4D97-AF65-F5344CB8AC3E}">
-        <p14:creationId xmlns:p14="http://schemas.microsoft.com/office/powerpoint/2010/main" val="1650021653"/>
-      </p:ext>
-    </p:extLst>
   </p:cSld>
   <p:clrMapOvr>
     <a:masterClrMapping/>
@@ -4109,6 +4930,7 @@
               <a:rPr lang="zh-CN" altLang="en-US" sz="3200" dirty="0"/>
               <a:t>本周内容总结</a:t>
             </a:r>
+            <a:endParaRPr lang="zh-CN" altLang="en-US" sz="3200" dirty="0"/>
           </a:p>
         </p:txBody>
       </p:sp>
@@ -4122,11 +4944,6 @@
             <p:custDataLst>
               <p:tags r:id="rId1"/>
             </p:custDataLst>
-            <p:extLst>
-              <p:ext uri="{D42A27DB-BD31-4B8C-83A1-F6EECF244321}">
-                <p14:modId xmlns:p14="http://schemas.microsoft.com/office/powerpoint/2010/main" val="997177020"/>
-              </p:ext>
-            </p:extLst>
           </p:nvPr>
         </p:nvGraphicFramePr>
         <p:xfrm>
@@ -4140,20 +4957,8 @@
                 <a:tableStyleId>{073A0DAA-6AF3-43AB-8588-CEC1D06C72B9}</a:tableStyleId>
               </a:tblPr>
               <a:tblGrid>
-                <a:gridCol w="1210310">
-                  <a:extLst>
-                    <a:ext uri="{9D8B030D-6E8A-4147-A177-3AD203B41FA5}">
-                      <a16:colId xmlns:a16="http://schemas.microsoft.com/office/drawing/2014/main" val="20000"/>
-                    </a:ext>
-                  </a:extLst>
-                </a:gridCol>
-                <a:gridCol w="10587990">
-                  <a:extLst>
-                    <a:ext uri="{9D8B030D-6E8A-4147-A177-3AD203B41FA5}">
-                      <a16:colId xmlns:a16="http://schemas.microsoft.com/office/drawing/2014/main" val="20001"/>
-                    </a:ext>
-                  </a:extLst>
-                </a:gridCol>
+                <a:gridCol w="1210310"/>
+                <a:gridCol w="10587990"/>
               </a:tblGrid>
               <a:tr h="1453515">
                 <a:tc>
@@ -4172,6 +4977,13 @@
                         </a:rPr>
                         <a:t>细节进展</a:t>
                       </a:r>
+                      <a:endParaRPr lang="zh-CN" altLang="en-US" sz="1800" b="0" dirty="0">
+                        <a:solidFill>
+                          <a:schemeClr val="tx1"/>
+                        </a:solidFill>
+                        <a:latin typeface="+mn-ea"/>
+                        <a:ea typeface="+mn-ea"/>
+                      </a:endParaRPr>
                     </a:p>
                   </a:txBody>
                   <a:tcPr anchor="ctr">
@@ -4243,7 +5055,6 @@
                         <a:buSzTx/>
                         <a:buFontTx/>
                         <a:buAutoNum type="arabicPeriod"/>
-                        <a:tabLst/>
                         <a:defRPr/>
                       </a:pPr>
                       <a:r>
@@ -4252,7 +5063,7 @@
                             <a:schemeClr val="tx1"/>
                           </a:solidFill>
                           <a:latin typeface="+mn-ea"/>
-                          <a:ea typeface="+mn-ea"/>
+                          <a:cs typeface="+mn-ea"/>
                           <a:sym typeface="+mn-ea"/>
                         </a:rPr>
                         <a:t>[NEW] </a:t>
@@ -4263,17 +5074,87 @@
                             <a:schemeClr val="tx1"/>
                           </a:solidFill>
                           <a:latin typeface="+mn-ea"/>
-                          <a:ea typeface="+mn-ea"/>
+                          <a:cs typeface="+mn-ea"/>
                           <a:sym typeface="+mn-ea"/>
                         </a:rPr>
                         <a:t>调研了四篇相关性很强的最新工作，均与后训练微调代码推理有关</a:t>
                       </a:r>
-                      <a:endParaRPr lang="en-US" altLang="zh-CN" sz="1800" b="0" dirty="0">
+                      <a:endParaRPr lang="zh-CN" altLang="en-US" sz="1800" b="0" dirty="0">
                         <a:solidFill>
                           <a:schemeClr val="tx1"/>
                         </a:solidFill>
                         <a:latin typeface="+mn-ea"/>
-                        <a:ea typeface="+mn-ea"/>
+                        <a:cs typeface="+mn-ea"/>
+                        <a:sym typeface="+mn-ea"/>
+                      </a:endParaRPr>
+                    </a:p>
+                    <a:p>
+                      <a:pPr marL="342900" marR="0" lvl="0" indent="-342900" algn="l" defTabSz="914400" rtl="0" eaLnBrk="1" fontAlgn="auto" latinLnBrk="0" hangingPunct="1">
+                        <a:lnSpc>
+                          <a:spcPct val="150000"/>
+                        </a:lnSpc>
+                        <a:spcBef>
+                          <a:spcPts val="0"/>
+                        </a:spcBef>
+                        <a:spcAft>
+                          <a:spcPts val="0"/>
+                        </a:spcAft>
+                        <a:buClrTx/>
+                        <a:buSzTx/>
+                        <a:buFontTx/>
+                        <a:buAutoNum type="arabicPeriod"/>
+                        <a:defRPr/>
+                      </a:pPr>
+                      <a:r>
+                        <a:rPr lang="en-US" altLang="zh-CN" sz="1800" b="0" dirty="0">
+                          <a:solidFill>
+                            <a:schemeClr val="tx1"/>
+                          </a:solidFill>
+                          <a:latin typeface="+mn-ea"/>
+                          <a:cs typeface="+mn-ea"/>
+                          <a:sym typeface="+mn-ea"/>
+                        </a:rPr>
+                        <a:t>[NEW] </a:t>
+                      </a:r>
+                      <a:r>
+                        <a:rPr lang="zh-CN" altLang="en-US" sz="1800" b="0">
+                          <a:solidFill>
+                            <a:schemeClr val="tx1"/>
+                          </a:solidFill>
+                          <a:latin typeface="+mn-ea"/>
+                          <a:cs typeface="+mn-ea"/>
+                          <a:sym typeface="+mn-ea"/>
+                        </a:rPr>
+                        <a:t>重新运行了之前两个数据在</a:t>
+                      </a:r>
+                      <a:r>
+                        <a:rPr lang="en-US" altLang="zh-CN" sz="1800" b="0">
+                          <a:solidFill>
+                            <a:schemeClr val="tx1"/>
+                          </a:solidFill>
+                          <a:latin typeface="+mn-ea"/>
+                          <a:cs typeface="+mn-ea"/>
+                          <a:sym typeface="+mn-ea"/>
+                        </a:rPr>
+                        <a:t>QwQ-32B</a:t>
+                      </a:r>
+                      <a:r>
+                        <a:rPr lang="zh-CN" altLang="en-US" sz="1800" b="0">
+                          <a:solidFill>
+                            <a:schemeClr val="tx1"/>
+                          </a:solidFill>
+                          <a:latin typeface="+mn-ea"/>
+                          <a:cs typeface="+mn-ea"/>
+                          <a:sym typeface="+mn-ea"/>
+                        </a:rPr>
+                        <a:t>上的结果，实验结论和之前的相差不大，在我们的四类数据集上也有提升</a:t>
+                      </a:r>
+                      <a:endParaRPr lang="zh-CN" altLang="en-US" sz="1800" b="0" dirty="0">
+                        <a:solidFill>
+                          <a:schemeClr val="tx1"/>
+                        </a:solidFill>
+                        <a:latin typeface="+mn-ea"/>
+                        <a:cs typeface="+mn-ea"/>
                         <a:sym typeface="+mn-ea"/>
                       </a:endParaRPr>
                     </a:p>
@@ -4328,11 +5209,6 @@
                     </a:solidFill>
                   </a:tcPr>
                 </a:tc>
-                <a:extLst>
-                  <a:ext uri="{0D108BD9-81ED-4DB2-BD59-A6C34878D82A}">
-                    <a16:rowId xmlns:a16="http://schemas.microsoft.com/office/drawing/2014/main" val="10000"/>
-                  </a:ext>
-                </a:extLst>
               </a:tr>
               <a:tr h="3197886">
                 <a:tc>
@@ -4443,6 +5319,9 @@
                       </a:r>
                       <a:r>
                         <a:rPr lang="en-US" altLang="zh-CN" sz="1800" b="0" i="0" dirty="0">
+                          <a:solidFill>
+                            <a:schemeClr val="tx1"/>
+                          </a:solidFill>
                           <a:effectLst/>
                           <a:latin typeface="+mn-ea"/>
                           <a:ea typeface="+mn-ea"/>
@@ -4452,6 +5331,9 @@
                       </a:r>
                       <a:r>
                         <a:rPr lang="zh-CN" altLang="en-US" sz="1800" b="0" i="0" dirty="0">
+                          <a:solidFill>
+                            <a:schemeClr val="tx1"/>
+                          </a:solidFill>
                           <a:effectLst/>
                           <a:latin typeface="+mn-ea"/>
                           <a:ea typeface="+mn-ea"/>
@@ -4461,6 +5343,9 @@
                       </a:r>
                       <a:r>
                         <a:rPr lang="en-US" altLang="zh-CN" sz="1800" b="0" i="0" dirty="0">
+                          <a:solidFill>
+                            <a:schemeClr val="tx1"/>
+                          </a:solidFill>
                           <a:effectLst/>
                           <a:latin typeface="+mn-ea"/>
                           <a:ea typeface="+mn-ea"/>
@@ -4470,6 +5355,9 @@
                       </a:r>
                       <a:r>
                         <a:rPr lang="zh-CN" altLang="en-US" sz="1800" b="0" i="0" dirty="0">
+                          <a:solidFill>
+                            <a:schemeClr val="tx1"/>
+                          </a:solidFill>
                           <a:effectLst/>
                           <a:latin typeface="+mn-ea"/>
                           <a:ea typeface="+mn-ea"/>
@@ -4478,7 +5366,10 @@
                         <a:t>、</a:t>
                       </a:r>
                       <a:r>
-                        <a:rPr lang="en-US" altLang="zh-CN" sz="1800" dirty="0">
+                        <a:rPr lang="en-US" altLang="zh-CN" sz="1800" b="0" dirty="0">
+                          <a:solidFill>
+                            <a:schemeClr val="tx1"/>
+                          </a:solidFill>
                           <a:latin typeface="+mn-ea"/>
                           <a:ea typeface="+mn-ea"/>
                           <a:cs typeface="Times New Roman" panose="02020603050405020304" pitchFamily="18" charset="0"/>
@@ -4486,7 +5377,10 @@
                         <a:t>Qwen3-4B</a:t>
                       </a:r>
                       <a:r>
-                        <a:rPr lang="zh-CN" altLang="en-US" sz="1800" dirty="0">
+                        <a:rPr lang="zh-CN" altLang="en-US" sz="1800" b="0" dirty="0">
+                          <a:solidFill>
+                            <a:schemeClr val="tx1"/>
+                          </a:solidFill>
                           <a:latin typeface="+mn-ea"/>
                           <a:ea typeface="+mn-ea"/>
                           <a:cs typeface="Times New Roman" panose="02020603050405020304" pitchFamily="18" charset="0"/>
@@ -4494,7 +5388,10 @@
                         <a:t>、</a:t>
                       </a:r>
                       <a:r>
-                        <a:rPr lang="en-US" altLang="zh-CN" sz="1800" dirty="0">
+                        <a:rPr lang="en-US" altLang="zh-CN" sz="1800" b="0" dirty="0">
+                          <a:solidFill>
+                            <a:schemeClr val="tx1"/>
+                          </a:solidFill>
                           <a:latin typeface="+mn-ea"/>
                           <a:ea typeface="+mn-ea"/>
                           <a:cs typeface="Times New Roman" panose="02020603050405020304" pitchFamily="18" charset="0"/>
@@ -4503,6 +5400,9 @@
                       </a:r>
                       <a:r>
                         <a:rPr lang="zh-CN" altLang="en-US" sz="1800" b="0" i="0" dirty="0">
+                          <a:solidFill>
+                            <a:schemeClr val="tx1"/>
+                          </a:solidFill>
                           <a:effectLst/>
                           <a:latin typeface="+mn-ea"/>
                           <a:ea typeface="+mn-ea"/>
@@ -4512,6 +5412,9 @@
                       </a:r>
                       <a:r>
                         <a:rPr lang="en-US" altLang="zh-CN" sz="1800" b="0" i="0" dirty="0" err="1">
+                          <a:solidFill>
+                            <a:schemeClr val="tx1"/>
+                          </a:solidFill>
                           <a:effectLst/>
                           <a:latin typeface="+mn-ea"/>
                           <a:ea typeface="+mn-ea"/>
@@ -4521,6 +5424,9 @@
                       </a:r>
                       <a:r>
                         <a:rPr lang="en-US" altLang="zh-CN" sz="1800" b="0" i="0" dirty="0">
+                          <a:solidFill>
+                            <a:schemeClr val="tx1"/>
+                          </a:solidFill>
                           <a:effectLst/>
                           <a:latin typeface="+mn-ea"/>
                           <a:ea typeface="+mn-ea"/>
@@ -4530,6 +5436,9 @@
                       </a:r>
                       <a:r>
                         <a:rPr lang="zh-CN" altLang="en-US" sz="1800" b="0" i="0" dirty="0">
+                          <a:solidFill>
+                            <a:schemeClr val="tx1"/>
+                          </a:solidFill>
                           <a:effectLst/>
                           <a:latin typeface="+mn-ea"/>
                           <a:ea typeface="+mn-ea"/>
@@ -4539,6 +5448,9 @@
                       </a:r>
                       <a:r>
                         <a:rPr lang="en-US" altLang="zh-CN" sz="1800" b="0" i="0" dirty="0" err="1">
+                          <a:solidFill>
+                            <a:schemeClr val="tx1"/>
+                          </a:solidFill>
                           <a:effectLst/>
                           <a:latin typeface="+mn-ea"/>
                           <a:ea typeface="+mn-ea"/>
@@ -4548,6 +5460,9 @@
                       </a:r>
                       <a:r>
                         <a:rPr lang="en-US" altLang="zh-CN" sz="1800" b="0" i="0" dirty="0">
+                          <a:solidFill>
+                            <a:schemeClr val="tx1"/>
+                          </a:solidFill>
                           <a:effectLst/>
                           <a:latin typeface="+mn-ea"/>
                           <a:ea typeface="+mn-ea"/>
@@ -4557,6 +5472,9 @@
                       </a:r>
                       <a:r>
                         <a:rPr lang="zh-CN" altLang="en-US" sz="1800" b="0" i="0" dirty="0">
+                          <a:solidFill>
+                            <a:schemeClr val="tx1"/>
+                          </a:solidFill>
                           <a:effectLst/>
                           <a:latin typeface="+mn-ea"/>
                           <a:ea typeface="+mn-ea"/>
@@ -4566,6 +5484,9 @@
                       </a:r>
                       <a:r>
                         <a:rPr lang="en-US" altLang="zh-CN" sz="1800" b="0" i="0" dirty="0">
+                          <a:solidFill>
+                            <a:schemeClr val="tx1"/>
+                          </a:solidFill>
                           <a:effectLst/>
                           <a:latin typeface="+mn-ea"/>
                           <a:ea typeface="+mn-ea"/>
@@ -4575,6 +5496,9 @@
                       </a:r>
                       <a:r>
                         <a:rPr lang="zh-CN" altLang="en-US" sz="1800" b="0" i="0" dirty="0">
+                          <a:solidFill>
+                            <a:schemeClr val="tx1"/>
+                          </a:solidFill>
                           <a:effectLst/>
                           <a:latin typeface="+mn-ea"/>
                           <a:ea typeface="+mn-ea"/>
@@ -4584,6 +5508,9 @@
                       </a:r>
                       <a:r>
                         <a:rPr lang="en-US" altLang="zh-CN" sz="1800" b="0" i="0" dirty="0">
+                          <a:solidFill>
+                            <a:schemeClr val="tx1"/>
+                          </a:solidFill>
                           <a:effectLst/>
                           <a:latin typeface="+mn-ea"/>
                           <a:ea typeface="+mn-ea"/>
@@ -4593,6 +5520,9 @@
                       </a:r>
                       <a:r>
                         <a:rPr lang="zh-CN" altLang="en-US" sz="1800" b="0" i="0" dirty="0">
+                          <a:solidFill>
+                            <a:schemeClr val="tx1"/>
+                          </a:solidFill>
                           <a:effectLst/>
                           <a:latin typeface="+mn-ea"/>
                           <a:ea typeface="+mn-ea"/>
@@ -4602,6 +5532,9 @@
                       </a:r>
                       <a:r>
                         <a:rPr lang="en-US" altLang="zh-CN" sz="1800" b="0" i="0" dirty="0" err="1">
+                          <a:solidFill>
+                            <a:schemeClr val="tx1"/>
+                          </a:solidFill>
                           <a:effectLst/>
                           <a:latin typeface="+mn-ea"/>
                           <a:ea typeface="+mn-ea"/>
@@ -4611,6 +5544,9 @@
                       </a:r>
                       <a:r>
                         <a:rPr lang="en-US" altLang="zh-CN" sz="1800" b="0" i="0" dirty="0">
+                          <a:solidFill>
+                            <a:schemeClr val="tx1"/>
+                          </a:solidFill>
                           <a:effectLst/>
                           <a:latin typeface="+mn-ea"/>
                           <a:ea typeface="+mn-ea"/>
@@ -4620,6 +5556,9 @@
                       </a:r>
                       <a:r>
                         <a:rPr lang="zh-CN" altLang="en-US" sz="1800" b="0" i="0" dirty="0">
+                          <a:solidFill>
+                            <a:schemeClr val="tx1"/>
+                          </a:solidFill>
                           <a:effectLst/>
                           <a:latin typeface="+mn-ea"/>
                           <a:ea typeface="+mn-ea"/>
@@ -4629,6 +5568,9 @@
                       </a:r>
                       <a:r>
                         <a:rPr lang="en-US" altLang="zh-CN" sz="1800" b="0" i="0" dirty="0">
+                          <a:solidFill>
+                            <a:schemeClr val="tx1"/>
+                          </a:solidFill>
                           <a:effectLst/>
                           <a:latin typeface="+mn-ea"/>
                           <a:ea typeface="+mn-ea"/>
@@ -4637,7 +5579,10 @@
                         <a:t>6</a:t>
                       </a:r>
                       <a:r>
-                        <a:rPr lang="en-US" altLang="zh-CN" sz="1800" dirty="0">
+                        <a:rPr lang="en-US" altLang="zh-CN" sz="1800" b="0" dirty="0">
+                          <a:solidFill>
+                            <a:schemeClr val="tx1"/>
+                          </a:solidFill>
                           <a:latin typeface="+mn-ea"/>
                           <a:ea typeface="+mn-ea"/>
                           <a:cs typeface="Times New Roman" panose="02020603050405020304" pitchFamily="18" charset="0"/>
@@ -4646,6 +5591,9 @@
                       </a:r>
                       <a:r>
                         <a:rPr lang="en-US" altLang="zh-CN" sz="1800" b="0" i="0" dirty="0">
+                          <a:solidFill>
+                            <a:schemeClr val="tx1"/>
+                          </a:solidFill>
                           <a:effectLst/>
                           <a:latin typeface="+mn-ea"/>
                           <a:ea typeface="+mn-ea"/>
@@ -4653,6 +5601,92 @@
                         </a:rPr>
                         <a:t>7B </a:t>
                       </a:r>
+                      <a:r>
+                        <a:rPr lang="zh-CN" altLang="en-US" sz="1800" b="0" i="0" dirty="0">
+                          <a:solidFill>
+                            <a:schemeClr val="tx1"/>
+                          </a:solidFill>
+                          <a:effectLst/>
+                          <a:latin typeface="+mn-ea"/>
+                          <a:ea typeface="+mn-ea"/>
+                          <a:cs typeface="Times New Roman" panose="02020603050405020304" pitchFamily="18" charset="0"/>
+                        </a:rPr>
+                        <a:t>。总结为均为</a:t>
+                      </a:r>
+                      <a:r>
+                        <a:rPr lang="en-US" altLang="zh-CN" sz="1800" b="0" i="0" dirty="0">
+                          <a:solidFill>
+                            <a:schemeClr val="tx1"/>
+                          </a:solidFill>
+                          <a:effectLst/>
+                          <a:latin typeface="+mn-ea"/>
+                          <a:ea typeface="+mn-ea"/>
+                          <a:cs typeface="Times New Roman" panose="02020603050405020304" pitchFamily="18" charset="0"/>
+                        </a:rPr>
+                        <a:t>6-8B</a:t>
+                      </a:r>
+                      <a:r>
+                        <a:rPr lang="zh-CN" altLang="en-US" sz="1800" b="0" i="0" dirty="0">
+                          <a:solidFill>
+                            <a:schemeClr val="tx1"/>
+                          </a:solidFill>
+                          <a:effectLst/>
+                          <a:latin typeface="+mn-ea"/>
+                          <a:ea typeface="+mn-ea"/>
+                          <a:cs typeface="Times New Roman" panose="02020603050405020304" pitchFamily="18" charset="0"/>
+                        </a:rPr>
+                        <a:t>的非推理类模型</a:t>
+                      </a:r>
+                      <a:endParaRPr lang="zh-CN" altLang="en-US" sz="1800" b="0" i="0" dirty="0">
+                        <a:solidFill>
+                          <a:schemeClr val="tx1"/>
+                        </a:solidFill>
+                        <a:effectLst/>
+                        <a:latin typeface="+mn-ea"/>
+                        <a:ea typeface="+mn-ea"/>
+                        <a:cs typeface="Times New Roman" panose="02020603050405020304" pitchFamily="18" charset="0"/>
+                      </a:endParaRPr>
+                    </a:p>
+                    <a:p>
+                      <a:pPr marL="457200" indent="-457200">
+                        <a:lnSpc>
+                          <a:spcPct val="150000"/>
+                        </a:lnSpc>
+                        <a:buAutoNum type="arabicPeriod"/>
+                      </a:pPr>
+                      <a:r>
+                        <a:rPr lang="zh-CN" altLang="en-US" sz="1800" b="0" dirty="0">
+                          <a:solidFill>
+                            <a:schemeClr val="tx1"/>
+                          </a:solidFill>
+                          <a:effectLst/>
+                          <a:latin typeface="+mn-ea"/>
+                          <a:cs typeface="Times New Roman" panose="02020603050405020304" pitchFamily="18" charset="0"/>
+                          <a:sym typeface="+mn-ea"/>
+                        </a:rPr>
+                        <a:t>之前实验结果猜测原因是：</a:t>
+                      </a:r>
+                      <a:r>
+                        <a:rPr lang="en-US" altLang="zh-CN" sz="1800" b="0" dirty="0">
+                          <a:solidFill>
+                            <a:schemeClr val="tx1"/>
+                          </a:solidFill>
+                          <a:effectLst/>
+                          <a:latin typeface="+mn-ea"/>
+                          <a:cs typeface="Times New Roman" panose="02020603050405020304" pitchFamily="18" charset="0"/>
+                          <a:sym typeface="+mn-ea"/>
+                        </a:rPr>
+                        <a:t>Qwen2.5-7B-Instruct在预训练阶段很可能已经见过大量类似的代码理解任务，微调让它接近自身在该任务上的极限。</a:t>
+                      </a:r>
+                      <a:endParaRPr lang="en-US" altLang="zh-CN" sz="1800" b="0" i="0" dirty="0">
+                        <a:solidFill>
+                          <a:schemeClr val="tx1"/>
+                        </a:solidFill>
+                        <a:effectLst/>
+                        <a:latin typeface="+mn-ea"/>
+                        <a:ea typeface="+mn-ea"/>
+                        <a:cs typeface="Times New Roman" panose="02020603050405020304" pitchFamily="18" charset="0"/>
+                      </a:endParaRPr>
                     </a:p>
                     <a:p>
                       <a:pPr marL="457200" indent="-457200">
@@ -4663,51 +5697,48 @@
                       </a:pPr>
                       <a:r>
                         <a:rPr lang="zh-CN" altLang="en-US" sz="1800" b="0" i="0" dirty="0">
+                          <a:solidFill>
+                            <a:schemeClr val="tx1"/>
+                          </a:solidFill>
                           <a:effectLst/>
                           <a:latin typeface="+mn-ea"/>
                           <a:ea typeface="+mn-ea"/>
                           <a:cs typeface="Times New Roman" panose="02020603050405020304" pitchFamily="18" charset="0"/>
                         </a:rPr>
-                        <a:t>总结为均为</a:t>
+                        <a:t>认为是之前的数据集难度极高，</a:t>
                       </a:r>
                       <a:r>
                         <a:rPr lang="en-US" altLang="zh-CN" sz="1800" b="0" i="0" dirty="0">
+                          <a:solidFill>
+                            <a:schemeClr val="tx1"/>
+                          </a:solidFill>
                           <a:effectLst/>
                           <a:latin typeface="+mn-ea"/>
                           <a:ea typeface="+mn-ea"/>
                           <a:cs typeface="Times New Roman" panose="02020603050405020304" pitchFamily="18" charset="0"/>
                         </a:rPr>
-                        <a:t>6-8B</a:t>
+                        <a:t>32B</a:t>
                       </a:r>
                       <a:r>
                         <a:rPr lang="zh-CN" altLang="en-US" sz="1800" b="0" i="0" dirty="0">
+                          <a:solidFill>
+                            <a:schemeClr val="tx1"/>
+                          </a:solidFill>
                           <a:effectLst/>
                           <a:latin typeface="+mn-ea"/>
                           <a:ea typeface="+mn-ea"/>
                           <a:cs typeface="Times New Roman" panose="02020603050405020304" pitchFamily="18" charset="0"/>
                         </a:rPr>
-                        <a:t>的非推理类模型</a:t>
+                        <a:t>模型能够学到的更多</a:t>
                       </a:r>
-                      <a:endParaRPr lang="en-US" altLang="zh-CN" sz="1800" b="0" i="0" dirty="0">
+                      <a:endParaRPr lang="zh-CN" altLang="en-US" sz="1800" b="0" i="0" dirty="0">
+                        <a:solidFill>
+                          <a:schemeClr val="tx1"/>
+                        </a:solidFill>
                         <a:effectLst/>
                         <a:latin typeface="+mn-ea"/>
                         <a:ea typeface="+mn-ea"/>
                         <a:cs typeface="Times New Roman" panose="02020603050405020304" pitchFamily="18" charset="0"/>
-                      </a:endParaRPr>
-                    </a:p>
-                    <a:p>
-                      <a:pPr marL="457200" indent="-457200" algn="l">
-                        <a:lnSpc>
-                          <a:spcPct val="150000"/>
-                        </a:lnSpc>
-                        <a:buAutoNum type="arabicPeriod"/>
-                      </a:pPr>
-                      <a:endParaRPr lang="zh-CN" altLang="en-US" sz="1800" b="0" dirty="0">
-                        <a:solidFill>
-                          <a:schemeClr val="tx1"/>
-                        </a:solidFill>
-                        <a:latin typeface="+mn-ea"/>
-                        <a:ea typeface="+mn-ea"/>
                       </a:endParaRPr>
                     </a:p>
                   </a:txBody>
@@ -4761,11 +5792,6 @@
                     </a:solidFill>
                   </a:tcPr>
                 </a:tc>
-                <a:extLst>
-                  <a:ext uri="{0D108BD9-81ED-4DB2-BD59-A6C34878D82A}">
-                    <a16:rowId xmlns:a16="http://schemas.microsoft.com/office/drawing/2014/main" val="10001"/>
-                  </a:ext>
-                </a:extLst>
               </a:tr>
               <a:tr h="1238399">
                 <a:tc>
@@ -4864,7 +5890,27 @@
                           <a:latin typeface="+mn-ea"/>
                           <a:ea typeface="+mn-ea"/>
                         </a:rPr>
-                        <a:t> </a:t>
+                        <a:t> [todo] </a:t>
+                      </a:r>
+                      <a:r>
+                        <a:rPr lang="zh-CN" altLang="en-US" sz="1800" b="0" dirty="0">
+                          <a:solidFill>
+                            <a:schemeClr val="tx1"/>
+                          </a:solidFill>
+                          <a:latin typeface="+mn-ea"/>
+                          <a:ea typeface="+mn-ea"/>
+                        </a:rPr>
+                        <a:t>讨论后续发展</a:t>
+                      </a:r>
+                      <a:r>
+                        <a:rPr lang="zh-CN" altLang="en-US" sz="1800" b="0" dirty="0">
+                          <a:solidFill>
+                            <a:schemeClr val="tx1"/>
+                          </a:solidFill>
+                          <a:latin typeface="+mn-ea"/>
+                          <a:ea typeface="+mn-ea"/>
+                        </a:rPr>
+                        <a:t>方向</a:t>
                       </a:r>
                       <a:endParaRPr lang="zh-CN" altLang="en-US" sz="1800" b="0" dirty="0">
                         <a:solidFill>
@@ -4925,11 +5971,6 @@
                     </a:solidFill>
                   </a:tcPr>
                 </a:tc>
-                <a:extLst>
-                  <a:ext uri="{0D108BD9-81ED-4DB2-BD59-A6C34878D82A}">
-                    <a16:rowId xmlns:a16="http://schemas.microsoft.com/office/drawing/2014/main" val="10002"/>
-                  </a:ext>
-                </a:extLst>
               </a:tr>
             </a:tbl>
           </a:graphicData>
@@ -5049,6 +6090,10 @@
               </a:rPr>
               <a:t>arXiv 2025.07</a:t>
             </a:r>
+            <a:endParaRPr lang="en-US" altLang="zh-CN" sz="2000" dirty="0">
+              <a:latin typeface="Times New Roman" panose="02020603050405020304" pitchFamily="18" charset="0"/>
+              <a:cs typeface="Times New Roman" panose="02020603050405020304" pitchFamily="18" charset="0"/>
+            </a:endParaRPr>
           </a:p>
           <a:p>
             <a:pPr marL="457200" indent="-457200">
@@ -5072,6 +6117,11 @@
               </a:rPr>
               <a:t>EMNLP 2025.06</a:t>
             </a:r>
+            <a:endParaRPr lang="en-US" altLang="zh-CN" sz="2000" dirty="0">
+              <a:effectLst/>
+              <a:latin typeface="Times New Roman" panose="02020603050405020304" pitchFamily="18" charset="0"/>
+              <a:cs typeface="Times New Roman" panose="02020603050405020304" pitchFamily="18" charset="0"/>
+            </a:endParaRPr>
           </a:p>
           <a:p>
             <a:pPr marL="457200" indent="-457200">
@@ -5097,6 +6147,11 @@
               </a:rPr>
               <a:t>ICML 2025.02</a:t>
             </a:r>
+            <a:endParaRPr lang="en-US" altLang="zh-CN" sz="2000" dirty="0">
+              <a:effectLst/>
+              <a:latin typeface="Times New Roman" panose="02020603050405020304" pitchFamily="18" charset="0"/>
+              <a:cs typeface="Times New Roman" panose="02020603050405020304" pitchFamily="18" charset="0"/>
+            </a:endParaRPr>
           </a:p>
           <a:p>
             <a:pPr marL="457200" indent="-457200">
@@ -5122,18 +6177,17 @@
               </a:rPr>
               <a:t> NeurIPS 2024</a:t>
             </a:r>
-          </a:p>
-        </p:txBody>
-      </p:sp>
-      <p:sp>
-        <p:nvSpPr>
-          <p:cNvPr id="9" name="文本框 8">
-            <a:extLst>
-              <a:ext uri="{FF2B5EF4-FFF2-40B4-BE49-F238E27FC236}">
-                <a16:creationId xmlns:a16="http://schemas.microsoft.com/office/drawing/2014/main" id="{2C65681A-948D-B056-0496-D0F80CCDA0D4}"/>
-              </a:ext>
-            </a:extLst>
-          </p:cNvPr>
+            <a:endParaRPr lang="en-US" altLang="zh-CN" sz="2000" dirty="0">
+              <a:effectLst/>
+              <a:latin typeface="Times New Roman" panose="02020603050405020304" pitchFamily="18" charset="0"/>
+              <a:cs typeface="Times New Roman" panose="02020603050405020304" pitchFamily="18" charset="0"/>
+            </a:endParaRPr>
+          </a:p>
+        </p:txBody>
+      </p:sp>
+      <p:sp>
+        <p:nvSpPr>
+          <p:cNvPr id="9" name="文本框 8"/>
           <p:cNvSpPr txBox="1"/>
           <p:nvPr/>
         </p:nvSpPr>
@@ -5175,20 +6229,14 @@
       </p:sp>
       <p:sp>
         <p:nvSpPr>
-          <p:cNvPr id="12" name="文本框 11">
-            <a:extLst>
-              <a:ext uri="{FF2B5EF4-FFF2-40B4-BE49-F238E27FC236}">
-                <a16:creationId xmlns:a16="http://schemas.microsoft.com/office/drawing/2014/main" id="{C8843100-A42F-2FAF-0873-1DA7978D62CC}"/>
-              </a:ext>
-            </a:extLst>
-          </p:cNvPr>
+          <p:cNvPr id="12" name="文本框 11"/>
           <p:cNvSpPr txBox="1"/>
           <p:nvPr/>
         </p:nvSpPr>
         <p:spPr>
           <a:xfrm>
-            <a:off x="2297736" y="3823178"/>
-            <a:ext cx="8548064" cy="2834430"/>
+            <a:off x="2255191" y="3847308"/>
+            <a:ext cx="8548064" cy="2999740"/>
           </a:xfrm>
           <a:prstGeom prst="rect">
             <a:avLst/>
@@ -5208,13 +6256,34 @@
               <a:buAutoNum type="arabicPeriod"/>
             </a:pPr>
             <a:r>
-              <a:rPr lang="en-US" altLang="zh-CN" sz="2000" b="0" i="0" dirty="0">
+              <a:rPr lang="en-US" altLang="zh-CN" b="0" i="0" dirty="0">
                 <a:effectLst/>
                 <a:latin typeface="Times New Roman" panose="02020603050405020304" pitchFamily="18" charset="0"/>
                 <a:cs typeface="Times New Roman" panose="02020603050405020304" pitchFamily="18" charset="0"/>
               </a:rPr>
               <a:t>Qwen2.5-Coder-Instruct  7B</a:t>
             </a:r>
+            <a:r>
+              <a:rPr lang="zh-CN" altLang="en-US" b="0" i="0" dirty="0">
+                <a:effectLst/>
+                <a:latin typeface="Times New Roman" panose="02020603050405020304" pitchFamily="18" charset="0"/>
+                <a:cs typeface="Times New Roman" panose="02020603050405020304" pitchFamily="18" charset="0"/>
+              </a:rPr>
+              <a:t>、</a:t>
+            </a:r>
+            <a:r>
+              <a:rPr lang="en-US" altLang="zh-CN" b="0" i="0" dirty="0">
+                <a:effectLst/>
+                <a:latin typeface="Times New Roman" panose="02020603050405020304" pitchFamily="18" charset="0"/>
+                <a:cs typeface="Times New Roman" panose="02020603050405020304" pitchFamily="18" charset="0"/>
+              </a:rPr>
+              <a:t>Qwen2.5-Coder-Instruct  14B</a:t>
+            </a:r>
+            <a:endParaRPr lang="en-US" altLang="zh-CN" b="0" i="0" dirty="0">
+              <a:effectLst/>
+              <a:latin typeface="Times New Roman" panose="02020603050405020304" pitchFamily="18" charset="0"/>
+              <a:cs typeface="Times New Roman" panose="02020603050405020304" pitchFamily="18" charset="0"/>
+            </a:endParaRPr>
           </a:p>
           <a:p>
             <a:pPr marL="457200" indent="-457200">
@@ -5225,13 +6294,30 @@
               <a:buAutoNum type="arabicPeriod"/>
             </a:pPr>
             <a:r>
-              <a:rPr lang="en-US" altLang="zh-CN" sz="2000" b="0" i="0" dirty="0">
-                <a:effectLst/>
+              <a:rPr lang="en-US" altLang="zh-CN" dirty="0">
                 <a:latin typeface="Times New Roman" panose="02020603050405020304" pitchFamily="18" charset="0"/>
                 <a:cs typeface="Times New Roman" panose="02020603050405020304" pitchFamily="18" charset="0"/>
               </a:rPr>
-              <a:t>Qwen2.5-Coder-Instruct  14B</a:t>
-            </a:r>
+              <a:t>Qwen3-4B</a:t>
+            </a:r>
+            <a:r>
+              <a:rPr lang="zh-CN" altLang="en-US" dirty="0">
+                <a:latin typeface="Times New Roman" panose="02020603050405020304" pitchFamily="18" charset="0"/>
+                <a:cs typeface="Times New Roman" panose="02020603050405020304" pitchFamily="18" charset="0"/>
+              </a:rPr>
+              <a:t>、</a:t>
+            </a:r>
+            <a:r>
+              <a:rPr lang="en-US" altLang="zh-CN" dirty="0">
+                <a:latin typeface="Times New Roman" panose="02020603050405020304" pitchFamily="18" charset="0"/>
+                <a:cs typeface="Times New Roman" panose="02020603050405020304" pitchFamily="18" charset="0"/>
+              </a:rPr>
+              <a:t>Qwen3-8B</a:t>
+            </a:r>
+            <a:endParaRPr lang="en-US" altLang="zh-CN" dirty="0">
+              <a:latin typeface="Times New Roman" panose="02020603050405020304" pitchFamily="18" charset="0"/>
+              <a:cs typeface="Times New Roman" panose="02020603050405020304" pitchFamily="18" charset="0"/>
+            </a:endParaRPr>
           </a:p>
           <a:p>
             <a:pPr marL="457200" indent="-457200">
@@ -5242,12 +6328,25 @@
               <a:buAutoNum type="arabicPeriod"/>
             </a:pPr>
             <a:r>
-              <a:rPr lang="en-US" altLang="zh-CN" sz="2000" dirty="0">
+              <a:rPr lang="en-US" altLang="zh-CN" b="0" i="0" dirty="0" err="1">
+                <a:effectLst/>
                 <a:latin typeface="Times New Roman" panose="02020603050405020304" pitchFamily="18" charset="0"/>
                 <a:cs typeface="Times New Roman" panose="02020603050405020304" pitchFamily="18" charset="0"/>
               </a:rPr>
-              <a:t>Qwen3-4B</a:t>
-            </a:r>
+              <a:t>Qwen</a:t>
+            </a:r>
+            <a:r>
+              <a:rPr lang="en-US" altLang="zh-CN" b="0" i="0" dirty="0">
+                <a:effectLst/>
+                <a:latin typeface="Times New Roman" panose="02020603050405020304" pitchFamily="18" charset="0"/>
+                <a:cs typeface="Times New Roman" panose="02020603050405020304" pitchFamily="18" charset="0"/>
+              </a:rPr>
+              <a:t> 2.5 7B Coder</a:t>
+            </a:r>
+            <a:endParaRPr lang="en-US" altLang="zh-CN" dirty="0">
+              <a:latin typeface="Times New Roman" panose="02020603050405020304" pitchFamily="18" charset="0"/>
+              <a:cs typeface="Times New Roman" panose="02020603050405020304" pitchFamily="18" charset="0"/>
+            </a:endParaRPr>
           </a:p>
           <a:p>
             <a:pPr marL="457200" indent="-457200">
@@ -5258,12 +6357,25 @@
               <a:buAutoNum type="arabicPeriod"/>
             </a:pPr>
             <a:r>
-              <a:rPr lang="en-US" altLang="zh-CN" sz="2000" dirty="0">
+              <a:rPr lang="en-US" altLang="zh-CN" b="0" i="0" dirty="0" err="1">
+                <a:effectLst/>
                 <a:latin typeface="Times New Roman" panose="02020603050405020304" pitchFamily="18" charset="0"/>
                 <a:cs typeface="Times New Roman" panose="02020603050405020304" pitchFamily="18" charset="0"/>
               </a:rPr>
-              <a:t>Qwen3-8B</a:t>
-            </a:r>
+              <a:t>Deepseek</a:t>
+            </a:r>
+            <a:r>
+              <a:rPr lang="en-US" altLang="zh-CN" b="0" i="0" dirty="0">
+                <a:effectLst/>
+                <a:latin typeface="Times New Roman" panose="02020603050405020304" pitchFamily="18" charset="0"/>
+                <a:cs typeface="Times New Roman" panose="02020603050405020304" pitchFamily="18" charset="0"/>
+              </a:rPr>
+              <a:t> v2 Lite Coder</a:t>
+            </a:r>
+            <a:endParaRPr lang="en-US" altLang="zh-CN" dirty="0">
+              <a:latin typeface="Times New Roman" panose="02020603050405020304" pitchFamily="18" charset="0"/>
+              <a:cs typeface="Times New Roman" panose="02020603050405020304" pitchFamily="18" charset="0"/>
+            </a:endParaRPr>
           </a:p>
           <a:p>
             <a:pPr marL="457200" indent="-457200">
@@ -5274,21 +6386,17 @@
               <a:buAutoNum type="arabicPeriod"/>
             </a:pPr>
             <a:r>
-              <a:rPr lang="en-US" altLang="zh-CN" sz="2000" b="0" i="0" dirty="0" err="1">
+              <a:rPr lang="en-US" altLang="zh-CN" b="0" i="0" dirty="0">
                 <a:effectLst/>
                 <a:latin typeface="Times New Roman" panose="02020603050405020304" pitchFamily="18" charset="0"/>
                 <a:cs typeface="Times New Roman" panose="02020603050405020304" pitchFamily="18" charset="0"/>
               </a:rPr>
-              <a:t>Qwen</a:t>
-            </a:r>
-            <a:r>
-              <a:rPr lang="en-US" altLang="zh-CN" sz="2000" b="0" i="0" dirty="0">
-                <a:effectLst/>
-                <a:latin typeface="Times New Roman" panose="02020603050405020304" pitchFamily="18" charset="0"/>
-                <a:cs typeface="Times New Roman" panose="02020603050405020304" pitchFamily="18" charset="0"/>
-              </a:rPr>
-              <a:t> 2.5 7B Coder</a:t>
-            </a:r>
+              <a:t>LLaMA 3.1 8B</a:t>
+            </a:r>
+            <a:endParaRPr lang="en-US" altLang="zh-CN" dirty="0">
+              <a:latin typeface="Times New Roman" panose="02020603050405020304" pitchFamily="18" charset="0"/>
+              <a:cs typeface="Times New Roman" panose="02020603050405020304" pitchFamily="18" charset="0"/>
+            </a:endParaRPr>
           </a:p>
           <a:p>
             <a:pPr marL="457200" indent="-457200">
@@ -5298,7 +6406,16 @@
               <a:buFontTx/>
               <a:buAutoNum type="arabicPeriod"/>
             </a:pPr>
-            <a:endParaRPr lang="en-US" altLang="zh-CN" sz="2000" dirty="0">
+            <a:r>
+              <a:rPr lang="en-US" altLang="zh-CN" b="0" i="0" dirty="0">
+                <a:effectLst/>
+                <a:latin typeface="Times New Roman" panose="02020603050405020304" pitchFamily="18" charset="0"/>
+                <a:cs typeface="Times New Roman" panose="02020603050405020304" pitchFamily="18" charset="0"/>
+              </a:rPr>
+              <a:t>Gemma 2 27B</a:t>
+            </a:r>
+            <a:endParaRPr lang="en-US" altLang="zh-CN" b="0" i="0" dirty="0">
+              <a:effectLst/>
               <a:latin typeface="Times New Roman" panose="02020603050405020304" pitchFamily="18" charset="0"/>
               <a:cs typeface="Times New Roman" panose="02020603050405020304" pitchFamily="18" charset="0"/>
             </a:endParaRPr>
@@ -5312,119 +6429,57 @@
               <a:buAutoNum type="arabicPeriod"/>
             </a:pPr>
             <a:r>
-              <a:rPr lang="en-US" altLang="zh-CN" sz="2000" b="0" i="0" dirty="0" err="1">
+              <a:rPr lang="en-US" altLang="zh-CN" b="0" i="0" dirty="0" err="1">
                 <a:effectLst/>
                 <a:latin typeface="Times New Roman" panose="02020603050405020304" pitchFamily="18" charset="0"/>
                 <a:cs typeface="Times New Roman" panose="02020603050405020304" pitchFamily="18" charset="0"/>
               </a:rPr>
-              <a:t>Deepseek</a:t>
-            </a:r>
-            <a:r>
-              <a:rPr lang="en-US" altLang="zh-CN" sz="2000" b="0" i="0" dirty="0">
+              <a:t>DeepSeekCoder</a:t>
+            </a:r>
+            <a:r>
+              <a:rPr lang="en-US" altLang="zh-CN" b="0" i="0" dirty="0">
                 <a:effectLst/>
                 <a:latin typeface="Times New Roman" panose="02020603050405020304" pitchFamily="18" charset="0"/>
                 <a:cs typeface="Times New Roman" panose="02020603050405020304" pitchFamily="18" charset="0"/>
               </a:rPr>
-              <a:t> v2 Lite Coder</a:t>
-            </a:r>
-            <a:endParaRPr lang="en-US" altLang="zh-CN" sz="2000" dirty="0">
+              <a:t> </a:t>
+            </a:r>
+            <a:r>
+              <a:rPr lang="zh-CN" altLang="en-US" b="0" i="0" dirty="0">
+                <a:effectLst/>
+                <a:latin typeface="Times New Roman" panose="02020603050405020304" pitchFamily="18" charset="0"/>
+                <a:cs typeface="Times New Roman" panose="02020603050405020304" pitchFamily="18" charset="0"/>
+              </a:rPr>
+              <a:t> </a:t>
+            </a:r>
+            <a:r>
+              <a:rPr lang="en-US" altLang="zh-CN" b="0" i="0" dirty="0">
+                <a:effectLst/>
+                <a:latin typeface="Times New Roman" panose="02020603050405020304" pitchFamily="18" charset="0"/>
+                <a:cs typeface="Times New Roman" panose="02020603050405020304" pitchFamily="18" charset="0"/>
+              </a:rPr>
+              <a:t>6</a:t>
+            </a:r>
+            <a:r>
+              <a:rPr lang="en-US" altLang="zh-CN" dirty="0">
+                <a:latin typeface="Times New Roman" panose="02020603050405020304" pitchFamily="18" charset="0"/>
+                <a:cs typeface="Times New Roman" panose="02020603050405020304" pitchFamily="18" charset="0"/>
+              </a:rPr>
+              <a:t>.</a:t>
+            </a:r>
+            <a:r>
+              <a:rPr lang="en-US" altLang="zh-CN" b="0" i="0" dirty="0">
+                <a:effectLst/>
+                <a:latin typeface="Times New Roman" panose="02020603050405020304" pitchFamily="18" charset="0"/>
+                <a:cs typeface="Times New Roman" panose="02020603050405020304" pitchFamily="18" charset="0"/>
+              </a:rPr>
+              <a:t>7B </a:t>
+            </a:r>
+            <a:endParaRPr lang="en-US" altLang="zh-CN" b="0" i="0" dirty="0">
+              <a:effectLst/>
               <a:latin typeface="Times New Roman" panose="02020603050405020304" pitchFamily="18" charset="0"/>
               <a:cs typeface="Times New Roman" panose="02020603050405020304" pitchFamily="18" charset="0"/>
             </a:endParaRPr>
-          </a:p>
-          <a:p>
-            <a:pPr marL="457200" indent="-457200">
-              <a:lnSpc>
-                <a:spcPct val="150000"/>
-              </a:lnSpc>
-              <a:buFontTx/>
-              <a:buAutoNum type="arabicPeriod"/>
-            </a:pPr>
-            <a:r>
-              <a:rPr lang="en-US" altLang="zh-CN" sz="2000" b="0" i="0" dirty="0">
-                <a:effectLst/>
-                <a:latin typeface="Times New Roman" panose="02020603050405020304" pitchFamily="18" charset="0"/>
-                <a:cs typeface="Times New Roman" panose="02020603050405020304" pitchFamily="18" charset="0"/>
-              </a:rPr>
-              <a:t>LLaMA 3.1 8B</a:t>
-            </a:r>
-            <a:endParaRPr lang="en-US" altLang="zh-CN" sz="2000" dirty="0">
-              <a:latin typeface="Times New Roman" panose="02020603050405020304" pitchFamily="18" charset="0"/>
-              <a:cs typeface="Times New Roman" panose="02020603050405020304" pitchFamily="18" charset="0"/>
-            </a:endParaRPr>
-          </a:p>
-          <a:p>
-            <a:pPr marL="457200" indent="-457200">
-              <a:lnSpc>
-                <a:spcPct val="150000"/>
-              </a:lnSpc>
-              <a:buFontTx/>
-              <a:buAutoNum type="arabicPeriod"/>
-            </a:pPr>
-            <a:r>
-              <a:rPr lang="en-US" altLang="zh-CN" sz="2000" b="0" i="0" dirty="0">
-                <a:effectLst/>
-                <a:latin typeface="Times New Roman" panose="02020603050405020304" pitchFamily="18" charset="0"/>
-                <a:cs typeface="Times New Roman" panose="02020603050405020304" pitchFamily="18" charset="0"/>
-              </a:rPr>
-              <a:t>Gemma 2 27B</a:t>
-            </a:r>
-          </a:p>
-          <a:p>
-            <a:pPr marL="457200" indent="-457200">
-              <a:lnSpc>
-                <a:spcPct val="150000"/>
-              </a:lnSpc>
-              <a:buFontTx/>
-              <a:buAutoNum type="arabicPeriod"/>
-            </a:pPr>
-            <a:r>
-              <a:rPr lang="en-US" altLang="zh-CN" sz="2000" b="0" i="0" dirty="0" err="1">
-                <a:effectLst/>
-                <a:latin typeface="Times New Roman" panose="02020603050405020304" pitchFamily="18" charset="0"/>
-                <a:cs typeface="Times New Roman" panose="02020603050405020304" pitchFamily="18" charset="0"/>
-              </a:rPr>
-              <a:t>DeepSeekCoder</a:t>
-            </a:r>
-            <a:r>
-              <a:rPr lang="en-US" altLang="zh-CN" sz="2000" b="0" i="0" dirty="0">
-                <a:effectLst/>
-                <a:latin typeface="Times New Roman" panose="02020603050405020304" pitchFamily="18" charset="0"/>
-                <a:cs typeface="Times New Roman" panose="02020603050405020304" pitchFamily="18" charset="0"/>
-              </a:rPr>
-              <a:t> </a:t>
-            </a:r>
-            <a:r>
-              <a:rPr lang="zh-CN" altLang="en-US" sz="2000" b="0" i="0" dirty="0">
-                <a:effectLst/>
-                <a:latin typeface="Times New Roman" panose="02020603050405020304" pitchFamily="18" charset="0"/>
-                <a:cs typeface="Times New Roman" panose="02020603050405020304" pitchFamily="18" charset="0"/>
-              </a:rPr>
-              <a:t> </a:t>
-            </a:r>
-            <a:r>
-              <a:rPr lang="en-US" altLang="zh-CN" sz="2000" b="0" i="0" dirty="0">
-                <a:effectLst/>
-                <a:latin typeface="Times New Roman" panose="02020603050405020304" pitchFamily="18" charset="0"/>
-                <a:cs typeface="Times New Roman" panose="02020603050405020304" pitchFamily="18" charset="0"/>
-              </a:rPr>
-              <a:t>6</a:t>
-            </a:r>
-            <a:r>
-              <a:rPr lang="en-US" altLang="zh-CN" sz="2000" dirty="0">
-                <a:latin typeface="Times New Roman" panose="02020603050405020304" pitchFamily="18" charset="0"/>
-                <a:cs typeface="Times New Roman" panose="02020603050405020304" pitchFamily="18" charset="0"/>
-              </a:rPr>
-              <a:t>.</a:t>
-            </a:r>
-            <a:r>
-              <a:rPr lang="en-US" altLang="zh-CN" sz="2000" b="0" i="0" dirty="0">
-                <a:effectLst/>
-                <a:latin typeface="Times New Roman" panose="02020603050405020304" pitchFamily="18" charset="0"/>
-                <a:cs typeface="Times New Roman" panose="02020603050405020304" pitchFamily="18" charset="0"/>
-              </a:rPr>
-              <a:t>7B </a:t>
-            </a:r>
           </a:p>
         </p:txBody>
       </p:sp>
@@ -5461,6 +6516,427 @@
         </p:nvSpPr>
         <p:spPr>
           <a:xfrm>
+            <a:off x="186055" y="119380"/>
+            <a:ext cx="10500995" cy="460375"/>
+          </a:xfrm>
+          <a:prstGeom prst="rect">
+            <a:avLst/>
+          </a:prstGeom>
+          <a:noFill/>
+        </p:spPr>
+        <p:txBody>
+          <a:bodyPr wrap="square" rtlCol="0">
+            <a:spAutoFit/>
+          </a:bodyPr>
+          <a:lstStyle/>
+          <a:p>
+            <a:pPr algn="l"/>
+            <a:r>
+              <a:rPr lang="zh-CN" altLang="en-US" sz="2400" dirty="0">
+                <a:solidFill>
+                  <a:schemeClr val="tx1"/>
+                </a:solidFill>
+              </a:rPr>
+              <a:t>进展二：</a:t>
+            </a:r>
+            <a:r>
+              <a:rPr lang="zh-CN" altLang="en-US" sz="2400" dirty="0">
+                <a:sym typeface="+mn-ea"/>
+              </a:rPr>
+              <a:t>实验</a:t>
+            </a:r>
+            <a:endParaRPr lang="zh-CN" altLang="en-US" sz="2400" dirty="0">
+              <a:sym typeface="+mn-ea"/>
+            </a:endParaRPr>
+          </a:p>
+        </p:txBody>
+      </p:sp>
+      <p:sp>
+        <p:nvSpPr>
+          <p:cNvPr id="7" name="文本框 6"/>
+          <p:cNvSpPr txBox="1"/>
+          <p:nvPr/>
+        </p:nvSpPr>
+        <p:spPr>
+          <a:xfrm>
+            <a:off x="186055" y="622935"/>
+            <a:ext cx="11762740" cy="2030095"/>
+          </a:xfrm>
+          <a:prstGeom prst="rect">
+            <a:avLst/>
+          </a:prstGeom>
+          <a:noFill/>
+        </p:spPr>
+        <p:txBody>
+          <a:bodyPr wrap="square" rtlCol="0">
+            <a:spAutoFit/>
+          </a:bodyPr>
+          <a:p>
+            <a:r>
+              <a:rPr lang="zh-CN" altLang="en-US">
+                <a:latin typeface="宋体" panose="02010600030101010101" pitchFamily="2" charset="-122"/>
+                <a:ea typeface="宋体" panose="02010600030101010101" pitchFamily="2" charset="-122"/>
+                <a:cs typeface="宋体" panose="02010600030101010101" pitchFamily="2" charset="-122"/>
+              </a:rPr>
+              <a:t>重新运行了之前两个数据在</a:t>
+            </a:r>
+            <a:r>
+              <a:rPr lang="en-US" altLang="zh-CN">
+                <a:latin typeface="宋体" panose="02010600030101010101" pitchFamily="2" charset="-122"/>
+                <a:ea typeface="宋体" panose="02010600030101010101" pitchFamily="2" charset="-122"/>
+                <a:cs typeface="宋体" panose="02010600030101010101" pitchFamily="2" charset="-122"/>
+              </a:rPr>
+              <a:t>QwQ-32B</a:t>
+            </a:r>
+            <a:r>
+              <a:rPr lang="zh-CN" altLang="en-US">
+                <a:latin typeface="宋体" panose="02010600030101010101" pitchFamily="2" charset="-122"/>
+                <a:ea typeface="宋体" panose="02010600030101010101" pitchFamily="2" charset="-122"/>
+                <a:cs typeface="宋体" panose="02010600030101010101" pitchFamily="2" charset="-122"/>
+              </a:rPr>
+              <a:t>上的结果，实验结论和之前的相差不大，在我们的四类数据集上也有提升</a:t>
+            </a:r>
+            <a:endParaRPr lang="zh-CN" altLang="en-US">
+              <a:latin typeface="宋体" panose="02010600030101010101" pitchFamily="2" charset="-122"/>
+              <a:ea typeface="宋体" panose="02010600030101010101" pitchFamily="2" charset="-122"/>
+              <a:cs typeface="宋体" panose="02010600030101010101" pitchFamily="2" charset="-122"/>
+            </a:endParaRPr>
+          </a:p>
+          <a:p>
+            <a:pPr marL="285750" indent="-285750">
+              <a:buFont typeface="Arial" panose="020B0604020202020204" pitchFamily="34" charset="0"/>
+              <a:buChar char="•"/>
+            </a:pPr>
+            <a:r>
+              <a:rPr lang="en-US" altLang="zh-CN">
+                <a:latin typeface="宋体" panose="02010600030101010101" pitchFamily="2" charset="-122"/>
+                <a:ea typeface="宋体" panose="02010600030101010101" pitchFamily="2" charset="-122"/>
+                <a:cs typeface="宋体" panose="02010600030101010101" pitchFamily="2" charset="-122"/>
+              </a:rPr>
+              <a:t>QwQ-32B</a:t>
+            </a:r>
+            <a:r>
+              <a:rPr lang="zh-CN" altLang="en-US">
+                <a:latin typeface="宋体" panose="02010600030101010101" pitchFamily="2" charset="-122"/>
+                <a:ea typeface="宋体" panose="02010600030101010101" pitchFamily="2" charset="-122"/>
+                <a:cs typeface="宋体" panose="02010600030101010101" pitchFamily="2" charset="-122"/>
+              </a:rPr>
+              <a:t>预训练阶段强化了数学和逻辑推理，但在代码推理特定任务上，原生的指令遵循能力较弱，但是它有强大的潜在推理能力，</a:t>
+            </a:r>
+            <a:r>
+              <a:rPr lang="zh-CN" altLang="en-US" b="1">
+                <a:latin typeface="宋体" panose="02010600030101010101" pitchFamily="2" charset="-122"/>
+                <a:ea typeface="宋体" panose="02010600030101010101" pitchFamily="2" charset="-122"/>
+                <a:cs typeface="宋体" panose="02010600030101010101" pitchFamily="2" charset="-122"/>
+              </a:rPr>
+              <a:t>微调能够教会它一步步跟踪执行路径</a:t>
+            </a:r>
+            <a:r>
+              <a:rPr lang="zh-CN" altLang="en-US">
+                <a:latin typeface="宋体" panose="02010600030101010101" pitchFamily="2" charset="-122"/>
+                <a:ea typeface="宋体" panose="02010600030101010101" pitchFamily="2" charset="-122"/>
+                <a:cs typeface="宋体" panose="02010600030101010101" pitchFamily="2" charset="-122"/>
+              </a:rPr>
+              <a:t>，因此激活了他的推理能力</a:t>
+            </a:r>
+            <a:endParaRPr lang="zh-CN" altLang="en-US">
+              <a:latin typeface="宋体" panose="02010600030101010101" pitchFamily="2" charset="-122"/>
+              <a:ea typeface="宋体" panose="02010600030101010101" pitchFamily="2" charset="-122"/>
+              <a:cs typeface="宋体" panose="02010600030101010101" pitchFamily="2" charset="-122"/>
+            </a:endParaRPr>
+          </a:p>
+          <a:p>
+            <a:pPr marL="285750" indent="-285750">
+              <a:buFont typeface="Arial" panose="020B0604020202020204" pitchFamily="34" charset="0"/>
+              <a:buChar char="•"/>
+            </a:pPr>
+            <a:r>
+              <a:rPr lang="en-US" altLang="zh-CN">
+                <a:latin typeface="宋体" panose="02010600030101010101" pitchFamily="2" charset="-122"/>
+                <a:ea typeface="宋体" panose="02010600030101010101" pitchFamily="2" charset="-122"/>
+                <a:cs typeface="宋体" panose="02010600030101010101" pitchFamily="2" charset="-122"/>
+              </a:rPr>
+              <a:t>Qwen2.5-7B-Instruct</a:t>
+            </a:r>
+            <a:r>
+              <a:rPr lang="zh-CN" altLang="en-US">
+                <a:latin typeface="宋体" panose="02010600030101010101" pitchFamily="2" charset="-122"/>
+                <a:ea typeface="宋体" panose="02010600030101010101" pitchFamily="2" charset="-122"/>
+                <a:cs typeface="宋体" panose="02010600030101010101" pitchFamily="2" charset="-122"/>
+              </a:rPr>
+              <a:t>在预训练阶段很可能已经见过大量类似的代码理解任务，微调让它接近自身在</a:t>
+            </a:r>
+            <a:r>
+              <a:rPr lang="zh-CN" altLang="en-US">
+                <a:latin typeface="宋体" panose="02010600030101010101" pitchFamily="2" charset="-122"/>
+                <a:ea typeface="宋体" panose="02010600030101010101" pitchFamily="2" charset="-122"/>
+                <a:cs typeface="宋体" panose="02010600030101010101" pitchFamily="2" charset="-122"/>
+              </a:rPr>
+              <a:t>该任务上的极限。</a:t>
+            </a:r>
+            <a:endParaRPr lang="zh-CN" altLang="en-US">
+              <a:latin typeface="宋体" panose="02010600030101010101" pitchFamily="2" charset="-122"/>
+              <a:ea typeface="宋体" panose="02010600030101010101" pitchFamily="2" charset="-122"/>
+              <a:cs typeface="宋体" panose="02010600030101010101" pitchFamily="2" charset="-122"/>
+            </a:endParaRPr>
+          </a:p>
+          <a:p>
+            <a:pPr marL="285750" indent="-285750">
+              <a:buFont typeface="Arial" panose="020B0604020202020204" pitchFamily="34" charset="0"/>
+              <a:buChar char="•"/>
+            </a:pPr>
+            <a:r>
+              <a:rPr lang="zh-CN" altLang="en-US">
+                <a:latin typeface="宋体" panose="02010600030101010101" pitchFamily="2" charset="-122"/>
+                <a:ea typeface="宋体" panose="02010600030101010101" pitchFamily="2" charset="-122"/>
+                <a:cs typeface="宋体" panose="02010600030101010101" pitchFamily="2" charset="-122"/>
+                <a:sym typeface="+mn-ea"/>
+              </a:rPr>
+              <a:t>认为是之前的数据集难度极高，</a:t>
+            </a:r>
+            <a:r>
+              <a:rPr lang="en-US" altLang="zh-CN">
+                <a:latin typeface="宋体" panose="02010600030101010101" pitchFamily="2" charset="-122"/>
+                <a:ea typeface="宋体" panose="02010600030101010101" pitchFamily="2" charset="-122"/>
+                <a:cs typeface="宋体" panose="02010600030101010101" pitchFamily="2" charset="-122"/>
+                <a:sym typeface="+mn-ea"/>
+              </a:rPr>
+              <a:t>32B</a:t>
+            </a:r>
+            <a:r>
+              <a:rPr lang="zh-CN" altLang="en-US">
+                <a:latin typeface="宋体" panose="02010600030101010101" pitchFamily="2" charset="-122"/>
+                <a:ea typeface="宋体" panose="02010600030101010101" pitchFamily="2" charset="-122"/>
+                <a:cs typeface="宋体" panose="02010600030101010101" pitchFamily="2" charset="-122"/>
+                <a:sym typeface="+mn-ea"/>
+              </a:rPr>
+              <a:t>模型能够学到的更多</a:t>
+            </a:r>
+            <a:endParaRPr lang="zh-CN" altLang="en-US">
+              <a:latin typeface="宋体" panose="02010600030101010101" pitchFamily="2" charset="-122"/>
+              <a:ea typeface="宋体" panose="02010600030101010101" pitchFamily="2" charset="-122"/>
+              <a:cs typeface="宋体" panose="02010600030101010101" pitchFamily="2" charset="-122"/>
+            </a:endParaRPr>
+          </a:p>
+          <a:p>
+            <a:pPr marL="285750" indent="-285750">
+              <a:buFont typeface="Arial" panose="020B0604020202020204" pitchFamily="34" charset="0"/>
+              <a:buChar char="•"/>
+            </a:pPr>
+            <a:endParaRPr lang="zh-CN" altLang="en-US">
+              <a:latin typeface="宋体" panose="02010600030101010101" pitchFamily="2" charset="-122"/>
+              <a:ea typeface="宋体" panose="02010600030101010101" pitchFamily="2" charset="-122"/>
+              <a:cs typeface="宋体" panose="02010600030101010101" pitchFamily="2" charset="-122"/>
+            </a:endParaRPr>
+          </a:p>
+        </p:txBody>
+      </p:sp>
+      <p:pic>
+        <p:nvPicPr>
+          <p:cNvPr id="8" name="图片 7"/>
+          <p:cNvPicPr>
+            <a:picLocks noChangeAspect="1"/>
+          </p:cNvPicPr>
+          <p:nvPr/>
+        </p:nvPicPr>
+        <p:blipFill>
+          <a:blip r:embed="rId1"/>
+          <a:stretch>
+            <a:fillRect/>
+          </a:stretch>
+        </p:blipFill>
+        <p:spPr>
+          <a:xfrm>
+            <a:off x="380365" y="2350135"/>
+            <a:ext cx="8065135" cy="1494790"/>
+          </a:xfrm>
+          <a:prstGeom prst="rect">
+            <a:avLst/>
+          </a:prstGeom>
+        </p:spPr>
+      </p:pic>
+      <p:pic>
+        <p:nvPicPr>
+          <p:cNvPr id="3" name="图片 2"/>
+          <p:cNvPicPr>
+            <a:picLocks noChangeAspect="1"/>
+          </p:cNvPicPr>
+          <p:nvPr/>
+        </p:nvPicPr>
+        <p:blipFill>
+          <a:blip r:embed="rId2"/>
+          <a:stretch>
+            <a:fillRect/>
+          </a:stretch>
+        </p:blipFill>
+        <p:spPr>
+          <a:xfrm>
+            <a:off x="441325" y="4018915"/>
+            <a:ext cx="8004810" cy="2842895"/>
+          </a:xfrm>
+          <a:prstGeom prst="rect">
+            <a:avLst/>
+          </a:prstGeom>
+        </p:spPr>
+      </p:pic>
+      <p:sp>
+        <p:nvSpPr>
+          <p:cNvPr id="5" name="文本框 4"/>
+          <p:cNvSpPr txBox="1"/>
+          <p:nvPr/>
+        </p:nvSpPr>
+        <p:spPr>
+          <a:xfrm>
+            <a:off x="8554720" y="3711575"/>
+            <a:ext cx="4064000" cy="2584450"/>
+          </a:xfrm>
+          <a:prstGeom prst="rect">
+            <a:avLst/>
+          </a:prstGeom>
+          <a:noFill/>
+        </p:spPr>
+        <p:txBody>
+          <a:bodyPr wrap="square" rtlCol="0">
+            <a:spAutoFit/>
+          </a:bodyPr>
+          <a:p>
+            <a:r>
+              <a:rPr lang="zh-CN" altLang="en-US"/>
+              <a:t>数据集任务</a:t>
+            </a:r>
+            <a:endParaRPr lang="zh-CN" altLang="en-US"/>
+          </a:p>
+          <a:p>
+            <a:r>
+              <a:rPr lang="zh-CN" altLang="en-US"/>
+              <a:t>训练任务</a:t>
+            </a:r>
+            <a:endParaRPr lang="zh-CN" altLang="en-US"/>
+          </a:p>
+          <a:p>
+            <a:r>
+              <a:rPr lang="en-US" altLang="zh-CN"/>
+              <a:t>1. Qwen3-8B</a:t>
+            </a:r>
+            <a:r>
+              <a:rPr lang="zh-CN" altLang="en-US"/>
+              <a:t>（</a:t>
+            </a:r>
+            <a:r>
+              <a:rPr lang="en-US" altLang="zh-CN"/>
+              <a:t>code</a:t>
+            </a:r>
+            <a:r>
+              <a:rPr lang="zh-CN" altLang="en-US"/>
+              <a:t>）</a:t>
+            </a:r>
+            <a:endParaRPr lang="zh-CN" altLang="en-US"/>
+          </a:p>
+          <a:p>
+            <a:r>
+              <a:rPr lang="en-US" altLang="zh-CN"/>
+              <a:t>2. 235-1</a:t>
+            </a:r>
+            <a:r>
+              <a:rPr lang="zh-CN" altLang="en-US"/>
+              <a:t>、</a:t>
+            </a:r>
+            <a:r>
+              <a:rPr lang="en-US" altLang="zh-CN"/>
+              <a:t>235-2</a:t>
+            </a:r>
+            <a:endParaRPr lang="en-US" altLang="zh-CN"/>
+          </a:p>
+          <a:p>
+            <a:r>
+              <a:rPr lang="en-US" altLang="zh-CN"/>
+              <a:t>3. claude-1000-format</a:t>
+            </a:r>
+            <a:endParaRPr lang="en-US" altLang="zh-CN"/>
+          </a:p>
+          <a:p>
+            <a:r>
+              <a:rPr lang="en-US" altLang="zh-CN"/>
+              <a:t>4. claude-1000-natural</a:t>
+            </a:r>
+            <a:endParaRPr lang="zh-CN" altLang="en-US"/>
+          </a:p>
+          <a:p>
+            <a:r>
+              <a:rPr lang="zh-CN" altLang="en-US"/>
+              <a:t>评估任务</a:t>
+            </a:r>
+            <a:r>
+              <a:rPr lang="en-US" altLang="zh-CN"/>
+              <a:t> </a:t>
+            </a:r>
+            <a:endParaRPr lang="en-US" altLang="zh-CN"/>
+          </a:p>
+          <a:p>
+            <a:r>
+              <a:rPr lang="en-US" altLang="zh-CN"/>
+              <a:t>1. Qwen3-8B </a:t>
+            </a:r>
+            <a:r>
+              <a:rPr lang="zh-CN" altLang="en-US"/>
+              <a:t>的四个</a:t>
+            </a:r>
+            <a:r>
+              <a:rPr lang="zh-CN" altLang="en-US"/>
+              <a:t>训练模型</a:t>
+            </a:r>
+            <a:endParaRPr lang="zh-CN" altLang="en-US"/>
+          </a:p>
+          <a:p>
+            <a:r>
+              <a:rPr lang="en-US" altLang="zh-CN"/>
+              <a:t>2. </a:t>
+            </a:r>
+            <a:r>
+              <a:rPr lang="zh-CN" altLang="en-US"/>
+              <a:t>同类工作的</a:t>
+            </a:r>
+            <a:r>
+              <a:rPr lang="zh-CN" altLang="en-US"/>
+              <a:t>四个模型</a:t>
+            </a:r>
+            <a:endParaRPr lang="zh-CN" altLang="en-US"/>
+          </a:p>
+        </p:txBody>
+      </p:sp>
+    </p:spTree>
+  </p:cSld>
+  <p:clrMapOvr>
+    <a:masterClrMapping/>
+  </p:clrMapOvr>
+</p:sld>
+</file>
+
+<file path=ppt/slides/slide5.xml><?xml version="1.0" encoding="utf-8"?>
+<p:sld xmlns:a="http://schemas.openxmlformats.org/drawingml/2006/main" xmlns:r="http://schemas.openxmlformats.org/officeDocument/2006/relationships" xmlns:p="http://schemas.openxmlformats.org/presentationml/2006/main">
+  <p:cSld>
+    <p:spTree>
+      <p:nvGrpSpPr>
+        <p:cNvPr id="1" name=""/>
+        <p:cNvGrpSpPr/>
+        <p:nvPr/>
+      </p:nvGrpSpPr>
+      <p:grpSpPr>
+        <a:xfrm>
+          <a:off x="0" y="0"/>
+          <a:ext cx="0" cy="0"/>
+          <a:chOff x="0" y="0"/>
+          <a:chExt cx="0" cy="0"/>
+        </a:xfrm>
+      </p:grpSpPr>
+      <p:sp>
+        <p:nvSpPr>
+          <p:cNvPr id="4" name="文本框 3"/>
+          <p:cNvSpPr txBox="1"/>
+          <p:nvPr/>
+        </p:nvSpPr>
+        <p:spPr>
+          <a:xfrm>
             <a:off x="176573" y="189385"/>
             <a:ext cx="11655907" cy="400110"/>
           </a:xfrm>
@@ -5489,18 +6965,16 @@
               </a:rPr>
               <a:t>arXiv 2025.07</a:t>
             </a:r>
-          </a:p>
-        </p:txBody>
-      </p:sp>
-      <p:sp>
-        <p:nvSpPr>
-          <p:cNvPr id="3" name="文本框 2">
-            <a:extLst>
-              <a:ext uri="{FF2B5EF4-FFF2-40B4-BE49-F238E27FC236}">
-                <a16:creationId xmlns:a16="http://schemas.microsoft.com/office/drawing/2014/main" id="{90601AF6-3E80-4649-81BF-575887790C77}"/>
-              </a:ext>
-            </a:extLst>
-          </p:cNvPr>
+            <a:endParaRPr lang="en-US" altLang="zh-CN" sz="2000" dirty="0">
+              <a:latin typeface="Times New Roman" panose="02020603050405020304" pitchFamily="18" charset="0"/>
+              <a:cs typeface="Times New Roman" panose="02020603050405020304" pitchFamily="18" charset="0"/>
+            </a:endParaRPr>
+          </a:p>
+        </p:txBody>
+      </p:sp>
+      <p:sp>
+        <p:nvSpPr>
+          <p:cNvPr id="3" name="文本框 2"/>
           <p:cNvSpPr txBox="1"/>
           <p:nvPr/>
         </p:nvSpPr>
@@ -5686,13 +7160,7 @@
       </p:sp>
       <p:sp>
         <p:nvSpPr>
-          <p:cNvPr id="5" name="文本框 4">
-            <a:extLst>
-              <a:ext uri="{FF2B5EF4-FFF2-40B4-BE49-F238E27FC236}">
-                <a16:creationId xmlns:a16="http://schemas.microsoft.com/office/drawing/2014/main" id="{38AB8FE1-0173-4F85-8A04-B7CC1FCFD550}"/>
-              </a:ext>
-            </a:extLst>
-          </p:cNvPr>
+          <p:cNvPr id="5" name="文本框 4"/>
           <p:cNvSpPr txBox="1"/>
           <p:nvPr/>
         </p:nvSpPr>
@@ -5841,13 +7309,7 @@
       </p:sp>
       <p:sp>
         <p:nvSpPr>
-          <p:cNvPr id="6" name="文本框 5">
-            <a:extLst>
-              <a:ext uri="{FF2B5EF4-FFF2-40B4-BE49-F238E27FC236}">
-                <a16:creationId xmlns:a16="http://schemas.microsoft.com/office/drawing/2014/main" id="{2167962E-81EF-C6C3-D3C4-C4D03F3EC38E}"/>
-              </a:ext>
-            </a:extLst>
-          </p:cNvPr>
+          <p:cNvPr id="6" name="文本框 5"/>
           <p:cNvSpPr txBox="1"/>
           <p:nvPr/>
         </p:nvSpPr>
@@ -5920,13 +7382,7 @@
       </p:sp>
       <p:sp>
         <p:nvSpPr>
-          <p:cNvPr id="7" name="文本框 6">
-            <a:extLst>
-              <a:ext uri="{FF2B5EF4-FFF2-40B4-BE49-F238E27FC236}">
-                <a16:creationId xmlns:a16="http://schemas.microsoft.com/office/drawing/2014/main" id="{261153AE-6582-D8D8-3108-AB146F758002}"/>
-              </a:ext>
-            </a:extLst>
-          </p:cNvPr>
+          <p:cNvPr id="7" name="文本框 6"/>
           <p:cNvSpPr txBox="1"/>
           <p:nvPr/>
         </p:nvSpPr>
@@ -6237,6 +7693,10 @@
               </a:rPr>
               <a:t>epoch</a:t>
             </a:r>
+            <a:endParaRPr lang="en-US" altLang="zh-CN" sz="1600" b="0" i="0" dirty="0">
+              <a:effectLst/>
+              <a:latin typeface="+mn-ea"/>
+            </a:endParaRPr>
           </a:p>
           <a:p>
             <a:r>
@@ -6410,18 +7870,18 @@
               </a:rPr>
               <a:t>epoch</a:t>
             </a:r>
-          </a:p>
-        </p:txBody>
-      </p:sp>
-      <p:sp>
-        <p:nvSpPr>
-          <p:cNvPr id="8" name="文本框 7">
-            <a:extLst>
-              <a:ext uri="{FF2B5EF4-FFF2-40B4-BE49-F238E27FC236}">
-                <a16:creationId xmlns:a16="http://schemas.microsoft.com/office/drawing/2014/main" id="{71146D7A-9CAB-04E8-E96C-7E9A37907DE1}"/>
-              </a:ext>
-            </a:extLst>
-          </p:cNvPr>
+            <a:endParaRPr lang="en-US" altLang="zh-CN" sz="1600" dirty="0">
+              <a:solidFill>
+                <a:srgbClr val="000000"/>
+              </a:solidFill>
+              <a:latin typeface="+mn-ea"/>
+            </a:endParaRPr>
+          </a:p>
+        </p:txBody>
+      </p:sp>
+      <p:sp>
+        <p:nvSpPr>
+          <p:cNvPr id="8" name="文本框 7"/>
           <p:cNvSpPr txBox="1"/>
           <p:nvPr/>
         </p:nvSpPr>
@@ -6577,11 +8037,6 @@
         </p:txBody>
       </p:sp>
     </p:spTree>
-    <p:extLst>
-      <p:ext uri="{BB962C8B-B14F-4D97-AF65-F5344CB8AC3E}">
-        <p14:creationId xmlns:p14="http://schemas.microsoft.com/office/powerpoint/2010/main" val="2859871155"/>
-      </p:ext>
-    </p:extLst>
   </p:cSld>
   <p:clrMapOvr>
     <a:masterClrMapping/>
@@ -6589,7 +8044,7 @@
 </p:sld>
 </file>
 
-<file path=ppt/slides/slide5.xml><?xml version="1.0" encoding="utf-8"?>
+<file path=ppt/slides/slide6.xml><?xml version="1.0" encoding="utf-8"?>
 <p:sld xmlns:a="http://schemas.openxmlformats.org/drawingml/2006/main" xmlns:r="http://schemas.openxmlformats.org/officeDocument/2006/relationships" xmlns:p="http://schemas.openxmlformats.org/presentationml/2006/main">
   <p:cSld>
     <p:spTree>
@@ -6642,18 +8097,16 @@
               </a:rPr>
               <a:t>arXiv 2025.07</a:t>
             </a:r>
-          </a:p>
-        </p:txBody>
-      </p:sp>
-      <p:sp>
-        <p:nvSpPr>
-          <p:cNvPr id="3" name="文本框 2">
-            <a:extLst>
-              <a:ext uri="{FF2B5EF4-FFF2-40B4-BE49-F238E27FC236}">
-                <a16:creationId xmlns:a16="http://schemas.microsoft.com/office/drawing/2014/main" id="{90601AF6-3E80-4649-81BF-575887790C77}"/>
-              </a:ext>
-            </a:extLst>
-          </p:cNvPr>
+            <a:endParaRPr lang="en-US" altLang="zh-CN" sz="2000" dirty="0">
+              <a:latin typeface="Times New Roman" panose="02020603050405020304" pitchFamily="18" charset="0"/>
+              <a:cs typeface="Times New Roman" panose="02020603050405020304" pitchFamily="18" charset="0"/>
+            </a:endParaRPr>
+          </a:p>
+        </p:txBody>
+      </p:sp>
+      <p:sp>
+        <p:nvSpPr>
+          <p:cNvPr id="3" name="文本框 2"/>
           <p:cNvSpPr txBox="1"/>
           <p:nvPr/>
         </p:nvSpPr>
@@ -6835,13 +8288,7 @@
       </p:sp>
       <p:sp>
         <p:nvSpPr>
-          <p:cNvPr id="6" name="文本框 5">
-            <a:extLst>
-              <a:ext uri="{FF2B5EF4-FFF2-40B4-BE49-F238E27FC236}">
-                <a16:creationId xmlns:a16="http://schemas.microsoft.com/office/drawing/2014/main" id="{2167962E-81EF-C6C3-D3C4-C4D03F3EC38E}"/>
-              </a:ext>
-            </a:extLst>
-          </p:cNvPr>
+          <p:cNvPr id="6" name="文本框 5"/>
           <p:cNvSpPr txBox="1"/>
           <p:nvPr/>
         </p:nvSpPr>
@@ -6914,13 +8361,7 @@
       </p:sp>
       <p:sp>
         <p:nvSpPr>
-          <p:cNvPr id="7" name="文本框 6">
-            <a:extLst>
-              <a:ext uri="{FF2B5EF4-FFF2-40B4-BE49-F238E27FC236}">
-                <a16:creationId xmlns:a16="http://schemas.microsoft.com/office/drawing/2014/main" id="{261153AE-6582-D8D8-3108-AB146F758002}"/>
-              </a:ext>
-            </a:extLst>
-          </p:cNvPr>
+          <p:cNvPr id="7" name="文本框 6"/>
           <p:cNvSpPr txBox="1"/>
           <p:nvPr/>
         </p:nvSpPr>
@@ -7121,32 +8562,30 @@
               </a:rPr>
               <a:t>epoch</a:t>
             </a:r>
+            <a:endParaRPr lang="en-US" altLang="zh-CN" sz="1600" b="0" i="0" dirty="0">
+              <a:effectLst/>
+              <a:latin typeface="+mn-ea"/>
+            </a:endParaRPr>
           </a:p>
         </p:txBody>
       </p:sp>
       <p:pic>
         <p:nvPicPr>
-          <p:cNvPr id="10" name="图片 9">
-            <a:extLst>
-              <a:ext uri="{FF2B5EF4-FFF2-40B4-BE49-F238E27FC236}">
-                <a16:creationId xmlns:a16="http://schemas.microsoft.com/office/drawing/2014/main" id="{A8446B76-8F10-CEB6-1323-A13877F07ED8}"/>
-              </a:ext>
-            </a:extLst>
-          </p:cNvPr>
+          <p:cNvPr id="10" name="图片 9"/>
           <p:cNvPicPr>
             <a:picLocks noChangeAspect="1"/>
           </p:cNvPicPr>
           <p:nvPr/>
         </p:nvPicPr>
         <p:blipFill>
-          <a:blip r:embed="rId2"/>
+          <a:blip r:embed="rId1"/>
           <a:stretch>
             <a:fillRect/>
           </a:stretch>
         </p:blipFill>
         <p:spPr>
           <a:xfrm>
-            <a:off x="1330608" y="3359631"/>
+            <a:off x="1128678" y="3353281"/>
             <a:ext cx="7371957" cy="3498369"/>
           </a:xfrm>
           <a:prstGeom prst="rect">
@@ -7156,13 +8595,7 @@
       </p:pic>
       <p:sp>
         <p:nvSpPr>
-          <p:cNvPr id="12" name="文本框 11">
-            <a:extLst>
-              <a:ext uri="{FF2B5EF4-FFF2-40B4-BE49-F238E27FC236}">
-                <a16:creationId xmlns:a16="http://schemas.microsoft.com/office/drawing/2014/main" id="{7ECD7519-01A3-DBF7-BF2D-1C8A1324C852}"/>
-              </a:ext>
-            </a:extLst>
-          </p:cNvPr>
+          <p:cNvPr id="12" name="文本框 11"/>
           <p:cNvSpPr txBox="1"/>
           <p:nvPr/>
         </p:nvSpPr>
@@ -7192,12 +8625,41 @@
           </a:p>
         </p:txBody>
       </p:sp>
+      <p:sp>
+        <p:nvSpPr>
+          <p:cNvPr id="8" name="文本框 7"/>
+          <p:cNvSpPr txBox="1"/>
+          <p:nvPr/>
+        </p:nvSpPr>
+        <p:spPr>
+          <a:xfrm>
+            <a:off x="6096000" y="1885950"/>
+            <a:ext cx="6096000" cy="645160"/>
+          </a:xfrm>
+          <a:prstGeom prst="rect">
+            <a:avLst/>
+          </a:prstGeom>
+          <a:noFill/>
+        </p:spPr>
+        <p:txBody>
+          <a:bodyPr wrap="square" rtlCol="0" anchor="t">
+            <a:spAutoFit/>
+          </a:bodyPr>
+          <a:p>
+            <a:r>
+              <a:rPr lang="en-US" altLang="zh-CN">
+                <a:sym typeface="+mn-ea"/>
+              </a:rPr>
+              <a:t>https://github.com/lingxiaotang/CodeReasoner</a:t>
+            </a:r>
+            <a:endParaRPr lang="en-US" altLang="zh-CN"/>
+          </a:p>
+          <a:p>
+            <a:endParaRPr lang="en-US" altLang="zh-CN"/>
+          </a:p>
+        </p:txBody>
+      </p:sp>
     </p:spTree>
-    <p:extLst>
-      <p:ext uri="{BB962C8B-B14F-4D97-AF65-F5344CB8AC3E}">
-        <p14:creationId xmlns:p14="http://schemas.microsoft.com/office/powerpoint/2010/main" val="786617002"/>
-      </p:ext>
-    </p:extLst>
   </p:cSld>
   <p:clrMapOvr>
     <a:masterClrMapping/>
@@ -7205,7 +8667,7 @@
 </p:sld>
 </file>
 
-<file path=ppt/slides/slide6.xml><?xml version="1.0" encoding="utf-8"?>
+<file path=ppt/slides/slide7.xml><?xml version="1.0" encoding="utf-8"?>
 <p:sld xmlns:a="http://schemas.openxmlformats.org/drawingml/2006/main" xmlns:r="http://schemas.openxmlformats.org/officeDocument/2006/relationships" xmlns:p="http://schemas.openxmlformats.org/presentationml/2006/main">
   <p:cSld>
     <p:spTree>
@@ -7268,13 +8730,7 @@
       </p:sp>
       <p:sp>
         <p:nvSpPr>
-          <p:cNvPr id="3" name="文本框 2">
-            <a:extLst>
-              <a:ext uri="{FF2B5EF4-FFF2-40B4-BE49-F238E27FC236}">
-                <a16:creationId xmlns:a16="http://schemas.microsoft.com/office/drawing/2014/main" id="{90601AF6-3E80-4649-81BF-575887790C77}"/>
-              </a:ext>
-            </a:extLst>
-          </p:cNvPr>
+          <p:cNvPr id="3" name="文本框 2"/>
           <p:cNvSpPr txBox="1"/>
           <p:nvPr/>
         </p:nvSpPr>
@@ -7451,13 +8907,7 @@
       </p:sp>
       <p:sp>
         <p:nvSpPr>
-          <p:cNvPr id="5" name="文本框 4">
-            <a:extLst>
-              <a:ext uri="{FF2B5EF4-FFF2-40B4-BE49-F238E27FC236}">
-                <a16:creationId xmlns:a16="http://schemas.microsoft.com/office/drawing/2014/main" id="{38AB8FE1-0173-4F85-8A04-B7CC1FCFD550}"/>
-              </a:ext>
-            </a:extLst>
-          </p:cNvPr>
+          <p:cNvPr id="5" name="文本框 4"/>
           <p:cNvSpPr txBox="1"/>
           <p:nvPr/>
         </p:nvSpPr>
@@ -7648,20 +9098,14 @@
       </p:sp>
       <p:sp>
         <p:nvSpPr>
-          <p:cNvPr id="6" name="文本框 5">
-            <a:extLst>
-              <a:ext uri="{FF2B5EF4-FFF2-40B4-BE49-F238E27FC236}">
-                <a16:creationId xmlns:a16="http://schemas.microsoft.com/office/drawing/2014/main" id="{2167962E-81EF-C6C3-D3C4-C4D03F3EC38E}"/>
-              </a:ext>
-            </a:extLst>
-          </p:cNvPr>
+          <p:cNvPr id="6" name="文本框 5"/>
           <p:cNvSpPr txBox="1"/>
           <p:nvPr/>
         </p:nvSpPr>
         <p:spPr>
           <a:xfrm>
             <a:off x="176572" y="2816880"/>
-            <a:ext cx="11655907" cy="338554"/>
+            <a:ext cx="11655907" cy="337185"/>
           </a:xfrm>
           <a:prstGeom prst="rect">
             <a:avLst/>
@@ -7702,7 +9146,7 @@
               <a:rPr lang="en-US" altLang="zh-CN" sz="1600" dirty="0">
                 <a:latin typeface="+mn-ea"/>
               </a:rPr>
-              <a:t>LiveCodeBench</a:t>
+              <a:t>LiveBench</a:t>
             </a:r>
             <a:r>
               <a:rPr lang="zh-CN" altLang="en-US" sz="1600" dirty="0">
@@ -7778,13 +9222,7 @@
       </p:sp>
       <p:sp>
         <p:nvSpPr>
-          <p:cNvPr id="7" name="文本框 6">
-            <a:extLst>
-              <a:ext uri="{FF2B5EF4-FFF2-40B4-BE49-F238E27FC236}">
-                <a16:creationId xmlns:a16="http://schemas.microsoft.com/office/drawing/2014/main" id="{261153AE-6582-D8D8-3108-AB146F758002}"/>
-              </a:ext>
-            </a:extLst>
-          </p:cNvPr>
+          <p:cNvPr id="7" name="文本框 6"/>
           <p:cNvSpPr txBox="1"/>
           <p:nvPr/>
         </p:nvSpPr>
@@ -7869,13 +9307,7 @@
       </p:sp>
       <p:sp>
         <p:nvSpPr>
-          <p:cNvPr id="9" name="文本框 8">
-            <a:extLst>
-              <a:ext uri="{FF2B5EF4-FFF2-40B4-BE49-F238E27FC236}">
-                <a16:creationId xmlns:a16="http://schemas.microsoft.com/office/drawing/2014/main" id="{C10B8DD0-A392-1D80-6295-69FDA5332C29}"/>
-              </a:ext>
-            </a:extLst>
-          </p:cNvPr>
+          <p:cNvPr id="9" name="文本框 8"/>
           <p:cNvSpPr txBox="1"/>
           <p:nvPr/>
         </p:nvSpPr>
@@ -7907,20 +9339,14 @@
       </p:sp>
       <p:pic>
         <p:nvPicPr>
-          <p:cNvPr id="11" name="图片 10">
-            <a:extLst>
-              <a:ext uri="{FF2B5EF4-FFF2-40B4-BE49-F238E27FC236}">
-                <a16:creationId xmlns:a16="http://schemas.microsoft.com/office/drawing/2014/main" id="{778DC543-9192-981B-D0CB-25C49F575D76}"/>
-              </a:ext>
-            </a:extLst>
-          </p:cNvPr>
+          <p:cNvPr id="11" name="图片 10"/>
           <p:cNvPicPr>
             <a:picLocks noChangeAspect="1"/>
           </p:cNvPicPr>
           <p:nvPr/>
         </p:nvPicPr>
         <p:blipFill>
-          <a:blip r:embed="rId2"/>
+          <a:blip r:embed="rId1"/>
           <a:stretch>
             <a:fillRect/>
           </a:stretch>
@@ -7937,20 +9363,14 @@
       </p:pic>
       <p:pic>
         <p:nvPicPr>
-          <p:cNvPr id="13" name="图片 12">
-            <a:extLst>
-              <a:ext uri="{FF2B5EF4-FFF2-40B4-BE49-F238E27FC236}">
-                <a16:creationId xmlns:a16="http://schemas.microsoft.com/office/drawing/2014/main" id="{EC63F787-796F-AB4E-06F8-C931750B8226}"/>
-              </a:ext>
-            </a:extLst>
-          </p:cNvPr>
+          <p:cNvPr id="13" name="图片 12"/>
           <p:cNvPicPr>
             <a:picLocks noChangeAspect="1"/>
           </p:cNvPicPr>
           <p:nvPr/>
         </p:nvPicPr>
         <p:blipFill>
-          <a:blip r:embed="rId3"/>
+          <a:blip r:embed="rId2"/>
           <a:stretch>
             <a:fillRect/>
           </a:stretch>
@@ -7967,13 +9387,7 @@
       </p:pic>
       <p:sp>
         <p:nvSpPr>
-          <p:cNvPr id="14" name="文本框 13">
-            <a:extLst>
-              <a:ext uri="{FF2B5EF4-FFF2-40B4-BE49-F238E27FC236}">
-                <a16:creationId xmlns:a16="http://schemas.microsoft.com/office/drawing/2014/main" id="{A9B77D07-56AD-1B86-E3FD-10CBEB6A64CE}"/>
-              </a:ext>
-            </a:extLst>
-          </p:cNvPr>
+          <p:cNvPr id="14" name="文本框 13"/>
           <p:cNvSpPr txBox="1"/>
           <p:nvPr/>
         </p:nvSpPr>
@@ -8003,18 +9417,13 @@
               <a:rPr lang="en-US" altLang="zh-CN" dirty="0"/>
               <a:t>4B</a:t>
             </a:r>
-          </a:p>
-        </p:txBody>
-      </p:sp>
-      <p:sp>
-        <p:nvSpPr>
-          <p:cNvPr id="15" name="文本框 14">
-            <a:extLst>
-              <a:ext uri="{FF2B5EF4-FFF2-40B4-BE49-F238E27FC236}">
-                <a16:creationId xmlns:a16="http://schemas.microsoft.com/office/drawing/2014/main" id="{397FF399-AD10-8DD3-80EC-BD84389C9BE2}"/>
-              </a:ext>
-            </a:extLst>
-          </p:cNvPr>
+            <a:endParaRPr lang="en-US" altLang="zh-CN" dirty="0"/>
+          </a:p>
+        </p:txBody>
+      </p:sp>
+      <p:sp>
+        <p:nvSpPr>
+          <p:cNvPr id="15" name="文本框 14"/>
           <p:cNvSpPr txBox="1"/>
           <p:nvPr/>
         </p:nvSpPr>
@@ -8044,15 +9453,11 @@
               <a:rPr lang="en-US" altLang="zh-CN" dirty="0"/>
               <a:t>8B</a:t>
             </a:r>
+            <a:endParaRPr lang="en-US" altLang="zh-CN" dirty="0"/>
           </a:p>
         </p:txBody>
       </p:sp>
     </p:spTree>
-    <p:extLst>
-      <p:ext uri="{BB962C8B-B14F-4D97-AF65-F5344CB8AC3E}">
-        <p14:creationId xmlns:p14="http://schemas.microsoft.com/office/powerpoint/2010/main" val="745635516"/>
-      </p:ext>
-    </p:extLst>
   </p:cSld>
   <p:clrMapOvr>
     <a:masterClrMapping/>
@@ -8060,7 +9465,7 @@
 </p:sld>
 </file>
 
-<file path=ppt/slides/slide7.xml><?xml version="1.0" encoding="utf-8"?>
+<file path=ppt/slides/slide8.xml><?xml version="1.0" encoding="utf-8"?>
 <p:sld xmlns:a="http://schemas.openxmlformats.org/drawingml/2006/main" xmlns:r="http://schemas.openxmlformats.org/officeDocument/2006/relationships" xmlns:p="http://schemas.openxmlformats.org/presentationml/2006/main">
   <p:cSld>
     <p:spTree>
@@ -8122,18 +9527,17 @@
               </a:rPr>
               <a:t>ICML 2025.02</a:t>
             </a:r>
-          </a:p>
-        </p:txBody>
-      </p:sp>
-      <p:sp>
-        <p:nvSpPr>
-          <p:cNvPr id="3" name="文本框 2">
-            <a:extLst>
-              <a:ext uri="{FF2B5EF4-FFF2-40B4-BE49-F238E27FC236}">
-                <a16:creationId xmlns:a16="http://schemas.microsoft.com/office/drawing/2014/main" id="{90601AF6-3E80-4649-81BF-575887790C77}"/>
-              </a:ext>
-            </a:extLst>
-          </p:cNvPr>
+            <a:endParaRPr lang="en-US" altLang="zh-CN" sz="2000" dirty="0">
+              <a:effectLst/>
+              <a:latin typeface="Times New Roman" panose="02020603050405020304" pitchFamily="18" charset="0"/>
+              <a:cs typeface="Times New Roman" panose="02020603050405020304" pitchFamily="18" charset="0"/>
+            </a:endParaRPr>
+          </a:p>
+        </p:txBody>
+      </p:sp>
+      <p:sp>
+        <p:nvSpPr>
+          <p:cNvPr id="3" name="文本框 2"/>
           <p:cNvSpPr txBox="1"/>
           <p:nvPr/>
         </p:nvSpPr>
@@ -8280,6 +9684,12 @@
               </a:rPr>
               <a:t>COT</a:t>
             </a:r>
+            <a:endParaRPr lang="en-US" altLang="zh-CN" sz="1600" dirty="0">
+              <a:solidFill>
+                <a:srgbClr val="000000"/>
+              </a:solidFill>
+              <a:latin typeface="+mn-ea"/>
+            </a:endParaRPr>
           </a:p>
           <a:p>
             <a:pPr>
@@ -8311,13 +9721,7 @@
       </p:sp>
       <p:sp>
         <p:nvSpPr>
-          <p:cNvPr id="5" name="文本框 4">
-            <a:extLst>
-              <a:ext uri="{FF2B5EF4-FFF2-40B4-BE49-F238E27FC236}">
-                <a16:creationId xmlns:a16="http://schemas.microsoft.com/office/drawing/2014/main" id="{38AB8FE1-0173-4F85-8A04-B7CC1FCFD550}"/>
-              </a:ext>
-            </a:extLst>
-          </p:cNvPr>
+          <p:cNvPr id="5" name="文本框 4"/>
           <p:cNvSpPr txBox="1"/>
           <p:nvPr/>
         </p:nvSpPr>
@@ -8428,49 +9832,6 @@
               </a:rPr>
               <a:t>COT</a:t>
             </a:r>
-          </a:p>
-          <a:p>
-            <a:pPr>
-              <a:lnSpc>
-                <a:spcPct val="150000"/>
-              </a:lnSpc>
-            </a:pPr>
-            <a:r>
-              <a:rPr lang="en-US" altLang="zh-CN" sz="1600" dirty="0">
-                <a:solidFill>
-                  <a:srgbClr val="000000"/>
-                </a:solidFill>
-                <a:latin typeface="+mn-ea"/>
-              </a:rPr>
-              <a:t>	2. </a:t>
-            </a:r>
-            <a:r>
-              <a:rPr lang="zh-CN" altLang="en-US" sz="1600" dirty="0">
-                <a:solidFill>
-                  <a:srgbClr val="000000"/>
-                </a:solidFill>
-                <a:latin typeface="+mn-ea"/>
-              </a:rPr>
-              <a:t>主要为函数类片段，一共</a:t>
-            </a:r>
-            <a:r>
-              <a:rPr lang="en-US" altLang="zh-CN" sz="1600" dirty="0">
-                <a:solidFill>
-                  <a:srgbClr val="000000"/>
-                </a:solidFill>
-                <a:latin typeface="+mn-ea"/>
-              </a:rPr>
-              <a:t>350w</a:t>
-            </a:r>
-            <a:r>
-              <a:rPr lang="zh-CN" altLang="en-US" sz="1600" dirty="0">
-                <a:solidFill>
-                  <a:srgbClr val="000000"/>
-                </a:solidFill>
-                <a:latin typeface="+mn-ea"/>
-              </a:rPr>
-              <a:t>条数据</a:t>
-            </a:r>
             <a:endParaRPr lang="en-US" altLang="zh-CN" sz="1600" dirty="0">
               <a:solidFill>
                 <a:srgbClr val="000000"/>
@@ -8478,17 +9839,60 @@
               <a:latin typeface="+mn-ea"/>
             </a:endParaRPr>
           </a:p>
-        </p:txBody>
-      </p:sp>
-      <p:sp>
-        <p:nvSpPr>
-          <p:cNvPr id="6" name="文本框 5">
-            <a:extLst>
-              <a:ext uri="{FF2B5EF4-FFF2-40B4-BE49-F238E27FC236}">
-                <a16:creationId xmlns:a16="http://schemas.microsoft.com/office/drawing/2014/main" id="{2167962E-81EF-C6C3-D3C4-C4D03F3EC38E}"/>
-              </a:ext>
-            </a:extLst>
-          </p:cNvPr>
+          <a:p>
+            <a:pPr>
+              <a:lnSpc>
+                <a:spcPct val="150000"/>
+              </a:lnSpc>
+            </a:pPr>
+            <a:r>
+              <a:rPr lang="en-US" altLang="zh-CN" sz="1600" dirty="0">
+                <a:solidFill>
+                  <a:srgbClr val="000000"/>
+                </a:solidFill>
+                <a:latin typeface="+mn-ea"/>
+              </a:rPr>
+              <a:t>	2. </a:t>
+            </a:r>
+            <a:r>
+              <a:rPr lang="zh-CN" altLang="en-US" sz="1600" dirty="0">
+                <a:solidFill>
+                  <a:srgbClr val="000000"/>
+                </a:solidFill>
+                <a:latin typeface="+mn-ea"/>
+              </a:rPr>
+              <a:t>主要为函数类片段，一共</a:t>
+            </a:r>
+            <a:r>
+              <a:rPr lang="en-US" altLang="zh-CN" sz="1600" dirty="0">
+                <a:solidFill>
+                  <a:srgbClr val="000000"/>
+                </a:solidFill>
+                <a:latin typeface="+mn-ea"/>
+              </a:rPr>
+              <a:t>350w</a:t>
+            </a:r>
+            <a:r>
+              <a:rPr lang="zh-CN" altLang="en-US" sz="1600" dirty="0">
+                <a:solidFill>
+                  <a:srgbClr val="000000"/>
+                </a:solidFill>
+                <a:latin typeface="+mn-ea"/>
+              </a:rPr>
+              <a:t>条数据</a:t>
+            </a:r>
+            <a:endParaRPr lang="en-US" altLang="zh-CN" sz="1600" dirty="0">
+              <a:solidFill>
+                <a:srgbClr val="000000"/>
+              </a:solidFill>
+              <a:latin typeface="+mn-ea"/>
+            </a:endParaRPr>
+          </a:p>
+        </p:txBody>
+      </p:sp>
+      <p:sp>
+        <p:nvSpPr>
+          <p:cNvPr id="6" name="文本框 5"/>
           <p:cNvSpPr txBox="1"/>
           <p:nvPr/>
         </p:nvSpPr>
@@ -8696,13 +10100,7 @@
       </p:sp>
       <p:sp>
         <p:nvSpPr>
-          <p:cNvPr id="7" name="文本框 6">
-            <a:extLst>
-              <a:ext uri="{FF2B5EF4-FFF2-40B4-BE49-F238E27FC236}">
-                <a16:creationId xmlns:a16="http://schemas.microsoft.com/office/drawing/2014/main" id="{261153AE-6582-D8D8-3108-AB146F758002}"/>
-              </a:ext>
-            </a:extLst>
-          </p:cNvPr>
+          <p:cNvPr id="7" name="文本框 6"/>
           <p:cNvSpPr txBox="1"/>
           <p:nvPr/>
         </p:nvSpPr>
@@ -8946,11 +10344,6 @@
         </p:txBody>
       </p:sp>
     </p:spTree>
-    <p:extLst>
-      <p:ext uri="{BB962C8B-B14F-4D97-AF65-F5344CB8AC3E}">
-        <p14:creationId xmlns:p14="http://schemas.microsoft.com/office/powerpoint/2010/main" val="2893872885"/>
-      </p:ext>
-    </p:extLst>
   </p:cSld>
   <p:clrMapOvr>
     <a:masterClrMapping/>
@@ -8958,7 +10351,7 @@
 </p:sld>
 </file>
 
-<file path=ppt/slides/slide8.xml><?xml version="1.0" encoding="utf-8"?>
+<file path=ppt/slides/slide9.xml><?xml version="1.0" encoding="utf-8"?>
 <p:sld xmlns:a="http://schemas.openxmlformats.org/drawingml/2006/main" xmlns:r="http://schemas.openxmlformats.org/officeDocument/2006/relationships" xmlns:p="http://schemas.openxmlformats.org/presentationml/2006/main">
   <p:cSld>
     <p:spTree>
@@ -9020,18 +10413,17 @@
               </a:rPr>
               <a:t>ICML 2025.02</a:t>
             </a:r>
-          </a:p>
-        </p:txBody>
-      </p:sp>
-      <p:sp>
-        <p:nvSpPr>
-          <p:cNvPr id="3" name="文本框 2">
-            <a:extLst>
-              <a:ext uri="{FF2B5EF4-FFF2-40B4-BE49-F238E27FC236}">
-                <a16:creationId xmlns:a16="http://schemas.microsoft.com/office/drawing/2014/main" id="{90601AF6-3E80-4649-81BF-575887790C77}"/>
-              </a:ext>
-            </a:extLst>
-          </p:cNvPr>
+            <a:endParaRPr lang="en-US" altLang="zh-CN" sz="2000" dirty="0">
+              <a:effectLst/>
+              <a:latin typeface="Times New Roman" panose="02020603050405020304" pitchFamily="18" charset="0"/>
+              <a:cs typeface="Times New Roman" panose="02020603050405020304" pitchFamily="18" charset="0"/>
+            </a:endParaRPr>
+          </a:p>
+        </p:txBody>
+      </p:sp>
+      <p:sp>
+        <p:nvSpPr>
+          <p:cNvPr id="3" name="文本框 2"/>
           <p:cNvSpPr txBox="1"/>
           <p:nvPr/>
         </p:nvSpPr>
@@ -9080,33 +10472,30 @@
               </a:rPr>
               <a:t>实验评估：</a:t>
             </a:r>
+            <a:endParaRPr lang="zh-CN" altLang="en-US" sz="1600" dirty="0">
+              <a:latin typeface="+mn-ea"/>
+            </a:endParaRPr>
           </a:p>
         </p:txBody>
       </p:sp>
       <p:pic>
         <p:nvPicPr>
-          <p:cNvPr id="8" name="图片 7">
-            <a:extLst>
-              <a:ext uri="{FF2B5EF4-FFF2-40B4-BE49-F238E27FC236}">
-                <a16:creationId xmlns:a16="http://schemas.microsoft.com/office/drawing/2014/main" id="{B8708C9A-6B3D-E4F7-1894-4B90F63A6AC6}"/>
-              </a:ext>
-            </a:extLst>
-          </p:cNvPr>
+          <p:cNvPr id="8" name="图片 7"/>
           <p:cNvPicPr>
             <a:picLocks noChangeAspect="1"/>
           </p:cNvPicPr>
           <p:nvPr/>
         </p:nvPicPr>
         <p:blipFill>
-          <a:blip r:embed="rId2"/>
+          <a:blip r:embed="rId1"/>
           <a:stretch>
             <a:fillRect/>
           </a:stretch>
         </p:blipFill>
         <p:spPr>
           <a:xfrm>
-            <a:off x="2024291" y="785456"/>
-            <a:ext cx="6161165" cy="5933265"/>
+            <a:off x="1774190" y="777240"/>
+            <a:ext cx="5976620" cy="5815330"/>
           </a:xfrm>
           <a:prstGeom prst="rect">
             <a:avLst/>
@@ -9114,792 +10503,6 @@
         </p:spPr>
       </p:pic>
     </p:spTree>
-    <p:extLst>
-      <p:ext uri="{BB962C8B-B14F-4D97-AF65-F5344CB8AC3E}">
-        <p14:creationId xmlns:p14="http://schemas.microsoft.com/office/powerpoint/2010/main" val="2963402617"/>
-      </p:ext>
-    </p:extLst>
-  </p:cSld>
-  <p:clrMapOvr>
-    <a:masterClrMapping/>
-  </p:clrMapOvr>
-</p:sld>
-</file>
-
-<file path=ppt/slides/slide9.xml><?xml version="1.0" encoding="utf-8"?>
-<p:sld xmlns:a="http://schemas.openxmlformats.org/drawingml/2006/main" xmlns:r="http://schemas.openxmlformats.org/officeDocument/2006/relationships" xmlns:p="http://schemas.openxmlformats.org/presentationml/2006/main">
-  <p:cSld>
-    <p:spTree>
-      <p:nvGrpSpPr>
-        <p:cNvPr id="1" name=""/>
-        <p:cNvGrpSpPr/>
-        <p:nvPr/>
-      </p:nvGrpSpPr>
-      <p:grpSpPr>
-        <a:xfrm>
-          <a:off x="0" y="0"/>
-          <a:ext cx="0" cy="0"/>
-          <a:chOff x="0" y="0"/>
-          <a:chExt cx="0" cy="0"/>
-        </a:xfrm>
-      </p:grpSpPr>
-      <p:sp>
-        <p:nvSpPr>
-          <p:cNvPr id="4" name="文本框 3"/>
-          <p:cNvSpPr txBox="1"/>
-          <p:nvPr/>
-        </p:nvSpPr>
-        <p:spPr>
-          <a:xfrm>
-            <a:off x="176573" y="189385"/>
-            <a:ext cx="11655907" cy="400110"/>
-          </a:xfrm>
-          <a:prstGeom prst="rect">
-            <a:avLst/>
-          </a:prstGeom>
-          <a:noFill/>
-        </p:spPr>
-        <p:txBody>
-          <a:bodyPr wrap="square" rtlCol="0">
-            <a:spAutoFit/>
-          </a:bodyPr>
-          <a:lstStyle/>
-          <a:p>
-            <a:r>
-              <a:rPr lang="en-US" altLang="zh-CN" sz="2000" i="1" dirty="0">
-                <a:latin typeface="Times New Roman" panose="02020603050405020304" pitchFamily="18" charset="0"/>
-                <a:cs typeface="Times New Roman" panose="02020603050405020304" pitchFamily="18" charset="0"/>
-              </a:rPr>
-              <a:t>4. </a:t>
-            </a:r>
-            <a:r>
-              <a:rPr lang="en-US" altLang="zh-CN" sz="2000" i="1" dirty="0">
-                <a:effectLst/>
-                <a:latin typeface="Times New Roman" panose="02020603050405020304" pitchFamily="18" charset="0"/>
-                <a:cs typeface="Times New Roman" panose="02020603050405020304" pitchFamily="18" charset="0"/>
-              </a:rPr>
-              <a:t>Semcoder: Training code language models with comprehensive semantics reasoning</a:t>
-            </a:r>
-            <a:r>
-              <a:rPr lang="en-US" altLang="zh-CN" sz="2000" dirty="0">
-                <a:effectLst/>
-                <a:latin typeface="Times New Roman" panose="02020603050405020304" pitchFamily="18" charset="0"/>
-                <a:cs typeface="Times New Roman" panose="02020603050405020304" pitchFamily="18" charset="0"/>
-              </a:rPr>
-              <a:t> NeurIPS 2024</a:t>
-            </a:r>
-          </a:p>
-        </p:txBody>
-      </p:sp>
-      <p:sp>
-        <p:nvSpPr>
-          <p:cNvPr id="3" name="文本框 2">
-            <a:extLst>
-              <a:ext uri="{FF2B5EF4-FFF2-40B4-BE49-F238E27FC236}">
-                <a16:creationId xmlns:a16="http://schemas.microsoft.com/office/drawing/2014/main" id="{90601AF6-3E80-4649-81BF-575887790C77}"/>
-              </a:ext>
-            </a:extLst>
-          </p:cNvPr>
-          <p:cNvSpPr txBox="1"/>
-          <p:nvPr/>
-        </p:nvSpPr>
-        <p:spPr>
-          <a:xfrm>
-            <a:off x="176570" y="911905"/>
-            <a:ext cx="11761078" cy="1162819"/>
-          </a:xfrm>
-          <a:prstGeom prst="rect">
-            <a:avLst/>
-          </a:prstGeom>
-          <a:ln>
-            <a:solidFill>
-              <a:schemeClr val="bg1"/>
-            </a:solidFill>
-          </a:ln>
-        </p:spPr>
-        <p:style>
-          <a:lnRef idx="2">
-            <a:schemeClr val="dk1"/>
-          </a:lnRef>
-          <a:fillRef idx="1">
-            <a:schemeClr val="lt1"/>
-          </a:fillRef>
-          <a:effectRef idx="0">
-            <a:schemeClr val="dk1"/>
-          </a:effectRef>
-          <a:fontRef idx="minor">
-            <a:schemeClr val="dk1"/>
-          </a:fontRef>
-        </p:style>
-        <p:txBody>
-          <a:bodyPr wrap="square" rtlCol="0">
-            <a:spAutoFit/>
-          </a:bodyPr>
-          <a:lstStyle/>
-          <a:p>
-            <a:pPr>
-              <a:lnSpc>
-                <a:spcPct val="150000"/>
-              </a:lnSpc>
-            </a:pPr>
-            <a:r>
-              <a:rPr lang="zh-CN" altLang="en-US" sz="1600" dirty="0">
-                <a:latin typeface="+mn-ea"/>
-              </a:rPr>
-              <a:t>方法论：</a:t>
-            </a:r>
-            <a:r>
-              <a:rPr lang="zh-CN" altLang="en-US" sz="1600" b="0" i="0" dirty="0">
-                <a:solidFill>
-                  <a:srgbClr val="000000"/>
-                </a:solidFill>
-                <a:effectLst/>
-                <a:latin typeface="+mn-ea"/>
-              </a:rPr>
-              <a:t>数据集</a:t>
-            </a:r>
-            <a:r>
-              <a:rPr lang="en-US" altLang="zh-CN" sz="1600" b="0" i="0" dirty="0">
-                <a:solidFill>
-                  <a:srgbClr val="000000"/>
-                </a:solidFill>
-                <a:effectLst/>
-                <a:latin typeface="+mn-ea"/>
-              </a:rPr>
-              <a:t>PYX</a:t>
-            </a:r>
-            <a:r>
-              <a:rPr lang="zh-CN" altLang="en-US" sz="1600" dirty="0">
-                <a:solidFill>
-                  <a:srgbClr val="000000"/>
-                </a:solidFill>
-                <a:latin typeface="+mn-ea"/>
-              </a:rPr>
-              <a:t>构建和训练方案</a:t>
-            </a:r>
-            <a:endParaRPr lang="en-US" altLang="zh-CN" sz="1600" b="0" i="0" dirty="0">
-              <a:solidFill>
-                <a:srgbClr val="000000"/>
-              </a:solidFill>
-              <a:effectLst/>
-              <a:latin typeface="+mn-ea"/>
-            </a:endParaRPr>
-          </a:p>
-          <a:p>
-            <a:pPr>
-              <a:lnSpc>
-                <a:spcPct val="150000"/>
-              </a:lnSpc>
-            </a:pPr>
-            <a:r>
-              <a:rPr lang="en-US" altLang="zh-CN" sz="1600" dirty="0">
-                <a:solidFill>
-                  <a:srgbClr val="000000"/>
-                </a:solidFill>
-                <a:latin typeface="+mn-ea"/>
-              </a:rPr>
-              <a:t>	1. </a:t>
-            </a:r>
-            <a:r>
-              <a:rPr lang="zh-CN" altLang="en-US" sz="1600" b="0" i="0" dirty="0">
-                <a:effectLst/>
-                <a:latin typeface="+mn-ea"/>
-              </a:rPr>
-              <a:t>仅使用可执行数据进行训练；先将代码解析为抽象语法树，再采样子树作为可解析的种子启发大模型生产</a:t>
-            </a:r>
-            <a:endParaRPr lang="en-US" altLang="zh-CN" sz="1600" dirty="0">
-              <a:solidFill>
-                <a:srgbClr val="000000"/>
-              </a:solidFill>
-              <a:latin typeface="+mn-ea"/>
-            </a:endParaRPr>
-          </a:p>
-          <a:p>
-            <a:pPr>
-              <a:lnSpc>
-                <a:spcPct val="150000"/>
-              </a:lnSpc>
-            </a:pPr>
-            <a:r>
-              <a:rPr lang="en-US" altLang="zh-CN" sz="1600" dirty="0">
-                <a:solidFill>
-                  <a:srgbClr val="000000"/>
-                </a:solidFill>
-                <a:latin typeface="+mn-ea"/>
-              </a:rPr>
-              <a:t>	2. </a:t>
-            </a:r>
-            <a:r>
-              <a:rPr lang="zh-CN" altLang="en-US" sz="1600" b="0" i="0" dirty="0">
-                <a:effectLst/>
-                <a:latin typeface="+mn-ea"/>
-              </a:rPr>
-              <a:t>“自然语言到代码样本 </a:t>
-            </a:r>
-            <a:r>
-              <a:rPr lang="en-US" altLang="zh-CN" sz="1600" b="0" i="0" dirty="0">
-                <a:effectLst/>
-                <a:latin typeface="+mn-ea"/>
-              </a:rPr>
-              <a:t>+ </a:t>
-            </a:r>
-            <a:r>
-              <a:rPr lang="zh-CN" altLang="en-US" sz="1600" b="0" i="0" dirty="0">
-                <a:effectLst/>
-                <a:latin typeface="+mn-ea"/>
-              </a:rPr>
-              <a:t>正向独白 </a:t>
-            </a:r>
-            <a:r>
-              <a:rPr lang="en-US" altLang="zh-CN" sz="1600" b="0" i="0" dirty="0">
-                <a:effectLst/>
-                <a:latin typeface="+mn-ea"/>
-              </a:rPr>
-              <a:t>+ </a:t>
-            </a:r>
-            <a:r>
-              <a:rPr lang="zh-CN" altLang="en-US" sz="1600" b="0" i="0" dirty="0">
-                <a:effectLst/>
-                <a:latin typeface="+mn-ea"/>
-              </a:rPr>
-              <a:t>反向独白” 的联合数据集训练，损失通过代码和独白 </a:t>
-            </a:r>
-            <a:r>
-              <a:rPr lang="en-US" altLang="zh-CN" sz="1600" b="0" i="0" dirty="0">
-                <a:effectLst/>
-                <a:latin typeface="+mn-ea"/>
-              </a:rPr>
-              <a:t>token </a:t>
-            </a:r>
-            <a:r>
-              <a:rPr lang="zh-CN" altLang="en-US" sz="1600" b="0" i="0" dirty="0">
-                <a:effectLst/>
-                <a:latin typeface="+mn-ea"/>
-              </a:rPr>
-              <a:t>的交叉熵损失累积计算</a:t>
-            </a:r>
-            <a:endParaRPr lang="zh-CN" altLang="en-US" sz="1600" dirty="0">
-              <a:latin typeface="+mn-ea"/>
-            </a:endParaRPr>
-          </a:p>
-        </p:txBody>
-      </p:sp>
-      <p:sp>
-        <p:nvSpPr>
-          <p:cNvPr id="5" name="文本框 4">
-            <a:extLst>
-              <a:ext uri="{FF2B5EF4-FFF2-40B4-BE49-F238E27FC236}">
-                <a16:creationId xmlns:a16="http://schemas.microsoft.com/office/drawing/2014/main" id="{38AB8FE1-0173-4F85-8A04-B7CC1FCFD550}"/>
-              </a:ext>
-            </a:extLst>
-          </p:cNvPr>
-          <p:cNvSpPr txBox="1"/>
-          <p:nvPr/>
-        </p:nvSpPr>
-        <p:spPr>
-          <a:xfrm>
-            <a:off x="176572" y="2393632"/>
-            <a:ext cx="11761078" cy="793359"/>
-          </a:xfrm>
-          <a:prstGeom prst="rect">
-            <a:avLst/>
-          </a:prstGeom>
-          <a:ln>
-            <a:solidFill>
-              <a:schemeClr val="bg1"/>
-            </a:solidFill>
-          </a:ln>
-        </p:spPr>
-        <p:style>
-          <a:lnRef idx="2">
-            <a:schemeClr val="dk1"/>
-          </a:lnRef>
-          <a:fillRef idx="1">
-            <a:schemeClr val="lt1"/>
-          </a:fillRef>
-          <a:effectRef idx="0">
-            <a:schemeClr val="dk1"/>
-          </a:effectRef>
-          <a:fontRef idx="minor">
-            <a:schemeClr val="dk1"/>
-          </a:fontRef>
-        </p:style>
-        <p:txBody>
-          <a:bodyPr wrap="square" rtlCol="0">
-            <a:spAutoFit/>
-          </a:bodyPr>
-          <a:lstStyle/>
-          <a:p>
-            <a:pPr>
-              <a:lnSpc>
-                <a:spcPct val="150000"/>
-              </a:lnSpc>
-            </a:pPr>
-            <a:r>
-              <a:rPr lang="zh-CN" altLang="en-US" sz="1600" dirty="0">
-                <a:latin typeface="+mn-ea"/>
-              </a:rPr>
-              <a:t>训练集：  </a:t>
-            </a:r>
-            <a:r>
-              <a:rPr lang="en-US" altLang="zh-CN" sz="1600" dirty="0">
-                <a:latin typeface="+mn-ea"/>
-              </a:rPr>
-              <a:t>1.</a:t>
-            </a:r>
-            <a:r>
-              <a:rPr lang="zh-CN" altLang="en-US" sz="1600" b="0" i="0" dirty="0">
-                <a:effectLst/>
-                <a:latin typeface="+mn-ea"/>
-              </a:rPr>
-              <a:t>仅使用可执行数据进行训练；</a:t>
-            </a:r>
-            <a:endParaRPr lang="en-US" altLang="zh-CN" sz="1600" b="0" i="0" dirty="0">
-              <a:effectLst/>
-              <a:latin typeface="+mn-ea"/>
-            </a:endParaRPr>
-          </a:p>
-          <a:p>
-            <a:pPr>
-              <a:lnSpc>
-                <a:spcPct val="150000"/>
-              </a:lnSpc>
-            </a:pPr>
-            <a:r>
-              <a:rPr lang="en-US" altLang="zh-CN" sz="1600" dirty="0">
-                <a:solidFill>
-                  <a:srgbClr val="000000"/>
-                </a:solidFill>
-                <a:latin typeface="+mn-ea"/>
-              </a:rPr>
-              <a:t>	2.</a:t>
-            </a:r>
-            <a:r>
-              <a:rPr lang="zh-CN" altLang="en-US" sz="1600" b="0" i="0" dirty="0">
-                <a:effectLst/>
-                <a:latin typeface="+mn-ea"/>
-              </a:rPr>
-              <a:t>先将真实的代码解析为抽象语法树，再采样子树作为可解析的种子启发大模型生产（</a:t>
-            </a:r>
-            <a:r>
-              <a:rPr lang="en-US" altLang="zh-CN" sz="1600" b="0" i="0" dirty="0">
-                <a:effectLst/>
-                <a:latin typeface="+mn-ea"/>
-              </a:rPr>
-              <a:t>GPT-3.5-turbo </a:t>
-            </a:r>
-            <a:r>
-              <a:rPr lang="zh-CN" altLang="en-US" sz="1600" b="0" i="0" dirty="0">
-                <a:effectLst/>
-                <a:latin typeface="+mn-ea"/>
-              </a:rPr>
-              <a:t>）</a:t>
-            </a:r>
-            <a:endParaRPr lang="en-US" altLang="zh-CN" sz="1600" dirty="0">
-              <a:solidFill>
-                <a:srgbClr val="000000"/>
-              </a:solidFill>
-              <a:latin typeface="+mn-ea"/>
-            </a:endParaRPr>
-          </a:p>
-        </p:txBody>
-      </p:sp>
-      <p:sp>
-        <p:nvSpPr>
-          <p:cNvPr id="6" name="文本框 5">
-            <a:extLst>
-              <a:ext uri="{FF2B5EF4-FFF2-40B4-BE49-F238E27FC236}">
-                <a16:creationId xmlns:a16="http://schemas.microsoft.com/office/drawing/2014/main" id="{2167962E-81EF-C6C3-D3C4-C4D03F3EC38E}"/>
-              </a:ext>
-            </a:extLst>
-          </p:cNvPr>
-          <p:cNvSpPr txBox="1"/>
-          <p:nvPr/>
-        </p:nvSpPr>
-        <p:spPr>
-          <a:xfrm>
-            <a:off x="176571" y="3505899"/>
-            <a:ext cx="11761078" cy="424155"/>
-          </a:xfrm>
-          <a:prstGeom prst="rect">
-            <a:avLst/>
-          </a:prstGeom>
-          <a:ln>
-            <a:solidFill>
-              <a:schemeClr val="bg1"/>
-            </a:solidFill>
-          </a:ln>
-        </p:spPr>
-        <p:style>
-          <a:lnRef idx="2">
-            <a:schemeClr val="dk1"/>
-          </a:lnRef>
-          <a:fillRef idx="1">
-            <a:schemeClr val="lt1"/>
-          </a:fillRef>
-          <a:effectRef idx="0">
-            <a:schemeClr val="dk1"/>
-          </a:effectRef>
-          <a:fontRef idx="minor">
-            <a:schemeClr val="dk1"/>
-          </a:fontRef>
-        </p:style>
-        <p:txBody>
-          <a:bodyPr wrap="square" rtlCol="0">
-            <a:spAutoFit/>
-          </a:bodyPr>
-          <a:lstStyle/>
-          <a:p>
-            <a:pPr>
-              <a:lnSpc>
-                <a:spcPct val="150000"/>
-              </a:lnSpc>
-            </a:pPr>
-            <a:r>
-              <a:rPr lang="zh-CN" altLang="en-US" sz="1600" dirty="0">
-                <a:latin typeface="+mn-ea"/>
-              </a:rPr>
-              <a:t>测试集：</a:t>
-            </a:r>
-            <a:r>
-              <a:rPr lang="en-US" altLang="zh-CN" sz="1600" b="0" i="0" dirty="0">
-                <a:effectLst/>
-                <a:latin typeface="+mn-ea"/>
-              </a:rPr>
-              <a:t> </a:t>
-            </a:r>
-            <a:r>
-              <a:rPr lang="en-US" altLang="zh-CN" sz="1600" b="0" i="0" dirty="0" err="1">
-                <a:effectLst/>
-                <a:latin typeface="+mn-ea"/>
-              </a:rPr>
-              <a:t>EvalPlus</a:t>
-            </a:r>
-            <a:r>
-              <a:rPr lang="zh-CN" altLang="en-US" sz="1600" dirty="0">
-                <a:latin typeface="+mn-ea"/>
-              </a:rPr>
-              <a:t>、</a:t>
-            </a:r>
-            <a:r>
-              <a:rPr lang="en-US" altLang="zh-CN" sz="1600" b="0" i="0" dirty="0">
-                <a:effectLst/>
-                <a:latin typeface="+mn-ea"/>
-              </a:rPr>
-              <a:t> LiveCodeBench-Lite</a:t>
-            </a:r>
-            <a:r>
-              <a:rPr lang="zh-CN" altLang="en-US" sz="1600" b="0" i="0" dirty="0">
-                <a:effectLst/>
-                <a:latin typeface="+mn-ea"/>
-              </a:rPr>
-              <a:t>、</a:t>
-            </a:r>
-            <a:r>
-              <a:rPr lang="en-US" altLang="zh-CN" sz="1600" b="0" i="0" dirty="0">
-                <a:effectLst/>
-                <a:latin typeface="+mn-ea"/>
-              </a:rPr>
-              <a:t> CRUXEval </a:t>
-            </a:r>
-            <a:r>
-              <a:rPr lang="zh-CN" altLang="en-US" sz="1600" b="0" i="0" dirty="0">
-                <a:effectLst/>
-                <a:latin typeface="+mn-ea"/>
-              </a:rPr>
-              <a:t>、</a:t>
-            </a:r>
-            <a:r>
-              <a:rPr lang="en-US" altLang="zh-CN" sz="1600" b="0" i="0" dirty="0">
-                <a:effectLst/>
-                <a:latin typeface="+mn-ea"/>
-              </a:rPr>
-              <a:t> LiveCodeBench -Exec</a:t>
-            </a:r>
-            <a:r>
-              <a:rPr lang="zh-CN" altLang="en-US" sz="1600" b="0" i="0" dirty="0">
-                <a:effectLst/>
-                <a:latin typeface="+mn-ea"/>
-              </a:rPr>
-              <a:t>、</a:t>
-            </a:r>
-            <a:r>
-              <a:rPr lang="en-US" altLang="zh-CN" sz="1600" dirty="0">
-                <a:latin typeface="+mn-ea"/>
-              </a:rPr>
-              <a:t>MBPP</a:t>
-            </a:r>
-            <a:r>
-              <a:rPr lang="zh-CN" altLang="en-US" sz="1600" dirty="0">
-                <a:latin typeface="+mn-ea"/>
-              </a:rPr>
-              <a:t>、</a:t>
-            </a:r>
-            <a:r>
-              <a:rPr lang="en-US" altLang="zh-CN" sz="1600" dirty="0" err="1">
-                <a:latin typeface="+mn-ea"/>
-              </a:rPr>
-              <a:t>HEval</a:t>
-            </a:r>
-            <a:endParaRPr lang="zh-CN" altLang="en-US" sz="1600" b="0" i="0" dirty="0">
-              <a:solidFill>
-                <a:srgbClr val="000000"/>
-              </a:solidFill>
-              <a:effectLst/>
-              <a:latin typeface="+mn-ea"/>
-            </a:endParaRPr>
-          </a:p>
-        </p:txBody>
-      </p:sp>
-      <p:sp>
-        <p:nvSpPr>
-          <p:cNvPr id="7" name="文本框 6">
-            <a:extLst>
-              <a:ext uri="{FF2B5EF4-FFF2-40B4-BE49-F238E27FC236}">
-                <a16:creationId xmlns:a16="http://schemas.microsoft.com/office/drawing/2014/main" id="{261153AE-6582-D8D8-3108-AB146F758002}"/>
-              </a:ext>
-            </a:extLst>
-          </p:cNvPr>
-          <p:cNvSpPr txBox="1"/>
-          <p:nvPr/>
-        </p:nvSpPr>
-        <p:spPr>
-          <a:xfrm>
-            <a:off x="176570" y="4248962"/>
-            <a:ext cx="11761078" cy="793487"/>
-          </a:xfrm>
-          <a:prstGeom prst="rect">
-            <a:avLst/>
-          </a:prstGeom>
-          <a:ln>
-            <a:solidFill>
-              <a:schemeClr val="bg1"/>
-            </a:solidFill>
-          </a:ln>
-        </p:spPr>
-        <p:style>
-          <a:lnRef idx="2">
-            <a:schemeClr val="dk1"/>
-          </a:lnRef>
-          <a:fillRef idx="1">
-            <a:schemeClr val="lt1"/>
-          </a:fillRef>
-          <a:effectRef idx="0">
-            <a:schemeClr val="dk1"/>
-          </a:effectRef>
-          <a:fontRef idx="minor">
-            <a:schemeClr val="dk1"/>
-          </a:fontRef>
-        </p:style>
-        <p:txBody>
-          <a:bodyPr wrap="square" rtlCol="0">
-            <a:spAutoFit/>
-          </a:bodyPr>
-          <a:lstStyle/>
-          <a:p>
-            <a:pPr>
-              <a:lnSpc>
-                <a:spcPct val="150000"/>
-              </a:lnSpc>
-            </a:pPr>
-            <a:r>
-              <a:rPr lang="zh-CN" altLang="en-US" sz="1600" dirty="0">
-                <a:latin typeface="+mn-ea"/>
-              </a:rPr>
-              <a:t>训练情况：</a:t>
-            </a:r>
-            <a:r>
-              <a:rPr lang="en-US" altLang="zh-CN" sz="1600" dirty="0">
-                <a:latin typeface="+mn-ea"/>
-              </a:rPr>
-              <a:t>1. </a:t>
-            </a:r>
-            <a:r>
-              <a:rPr lang="zh-CN" altLang="en-US" sz="1600" dirty="0">
-                <a:latin typeface="+mn-ea"/>
-              </a:rPr>
-              <a:t>对</a:t>
-            </a:r>
-            <a:r>
-              <a:rPr lang="en-US" altLang="zh-CN" sz="1600" b="0" i="0" dirty="0" err="1">
-                <a:effectLst/>
-                <a:latin typeface="+mn-ea"/>
-              </a:rPr>
-              <a:t>DeepSeekCoder</a:t>
-            </a:r>
-            <a:r>
-              <a:rPr lang="en-US" altLang="zh-CN" sz="1600" b="0" i="0" dirty="0">
-                <a:effectLst/>
-                <a:latin typeface="+mn-ea"/>
-              </a:rPr>
-              <a:t> </a:t>
-            </a:r>
-            <a:r>
-              <a:rPr lang="zh-CN" altLang="en-US" sz="1600" b="0" i="0" dirty="0">
-                <a:effectLst/>
-                <a:latin typeface="+mn-ea"/>
-              </a:rPr>
-              <a:t> </a:t>
-            </a:r>
-            <a:r>
-              <a:rPr lang="en-US" altLang="zh-CN" sz="1600" b="0" i="0" dirty="0">
-                <a:effectLst/>
-                <a:latin typeface="+mn-ea"/>
-              </a:rPr>
-              <a:t>6</a:t>
-            </a:r>
-            <a:r>
-              <a:rPr lang="en-US" altLang="zh-CN" sz="1600" dirty="0">
-                <a:latin typeface="+mn-ea"/>
-              </a:rPr>
-              <a:t>.</a:t>
-            </a:r>
-            <a:r>
-              <a:rPr lang="en-US" altLang="zh-CN" sz="1600" b="0" i="0" dirty="0">
-                <a:effectLst/>
-                <a:latin typeface="+mn-ea"/>
-              </a:rPr>
-              <a:t>7B </a:t>
-            </a:r>
-            <a:r>
-              <a:rPr lang="zh-CN" altLang="en-US" sz="1600" b="0" i="0" dirty="0">
-                <a:effectLst/>
-                <a:latin typeface="+mn-ea"/>
-              </a:rPr>
-              <a:t>进行训练</a:t>
-            </a:r>
-            <a:endParaRPr lang="en-US" altLang="zh-CN" sz="1600" b="0" i="0" dirty="0">
-              <a:effectLst/>
-              <a:latin typeface="+mn-ea"/>
-            </a:endParaRPr>
-          </a:p>
-          <a:p>
-            <a:pPr>
-              <a:lnSpc>
-                <a:spcPct val="150000"/>
-              </a:lnSpc>
-            </a:pPr>
-            <a:r>
-              <a:rPr lang="en-US" altLang="zh-CN" sz="1600" dirty="0">
-                <a:solidFill>
-                  <a:srgbClr val="000000"/>
-                </a:solidFill>
-                <a:latin typeface="+mn-ea"/>
-              </a:rPr>
-              <a:t>	  2. </a:t>
-            </a:r>
-            <a:r>
-              <a:rPr lang="zh-CN" altLang="en-US" sz="1600" b="0" i="0" dirty="0">
-                <a:effectLst/>
-                <a:latin typeface="+mn-ea"/>
-              </a:rPr>
-              <a:t> </a:t>
-            </a:r>
-            <a:r>
-              <a:rPr lang="en-US" altLang="zh-CN" sz="1600" b="0" i="0" dirty="0">
-                <a:effectLst/>
-                <a:latin typeface="+mn-ea"/>
-              </a:rPr>
-              <a:t>8 </a:t>
-            </a:r>
-            <a:r>
-              <a:rPr lang="zh-CN" altLang="en-US" sz="1600" b="0" i="0" dirty="0">
-                <a:effectLst/>
-                <a:latin typeface="+mn-ea"/>
-              </a:rPr>
-              <a:t>张 </a:t>
-            </a:r>
-            <a:r>
-              <a:rPr lang="en-US" altLang="zh-CN" sz="1600" b="0" i="0" dirty="0">
-                <a:effectLst/>
-                <a:latin typeface="+mn-ea"/>
-              </a:rPr>
-              <a:t>NVIDIA RTX A6000 GPU</a:t>
-            </a:r>
-            <a:r>
-              <a:rPr lang="zh-CN" altLang="en-US" sz="1600" b="0" i="0" dirty="0">
-                <a:effectLst/>
-                <a:latin typeface="+mn-ea"/>
-              </a:rPr>
-              <a:t>、训练 </a:t>
-            </a:r>
-            <a:r>
-              <a:rPr lang="en-US" altLang="zh-CN" sz="1600" b="0" i="0" dirty="0">
-                <a:effectLst/>
-                <a:latin typeface="+mn-ea"/>
-              </a:rPr>
-              <a:t>2 </a:t>
-            </a:r>
-            <a:r>
-              <a:rPr lang="zh-CN" altLang="en-US" sz="1600" b="0" i="0" dirty="0">
-                <a:effectLst/>
-                <a:latin typeface="+mn-ea"/>
-              </a:rPr>
-              <a:t>个 </a:t>
-            </a:r>
-            <a:r>
-              <a:rPr lang="en-US" altLang="zh-CN" sz="1600" b="0" i="0" dirty="0">
-                <a:effectLst/>
-                <a:latin typeface="+mn-ea"/>
-              </a:rPr>
-              <a:t>epoch</a:t>
-            </a:r>
-            <a:r>
-              <a:rPr lang="zh-CN" altLang="en-US" sz="1600" b="0" i="0" dirty="0">
-                <a:effectLst/>
-                <a:latin typeface="+mn-ea"/>
-              </a:rPr>
-              <a:t>、</a:t>
-            </a:r>
-            <a:r>
-              <a:rPr lang="en-US" altLang="zh-CN" sz="1600" b="0" i="0" dirty="0">
-                <a:effectLst/>
-                <a:latin typeface="+mn-ea"/>
-              </a:rPr>
-              <a:t>5e-5 </a:t>
-            </a:r>
-            <a:r>
-              <a:rPr lang="zh-CN" altLang="en-US" sz="1600" b="0" i="0" dirty="0">
-                <a:effectLst/>
-                <a:latin typeface="+mn-ea"/>
-              </a:rPr>
-              <a:t>的初始学习率</a:t>
-            </a:r>
-            <a:r>
-              <a:rPr lang="zh-CN" altLang="en-US" sz="1600" dirty="0">
-                <a:latin typeface="+mn-ea"/>
-              </a:rPr>
-              <a:t>、</a:t>
-            </a:r>
-            <a:r>
-              <a:rPr lang="zh-CN" altLang="en-US" sz="1600" b="0" i="0" dirty="0">
-                <a:effectLst/>
-                <a:latin typeface="+mn-ea"/>
-              </a:rPr>
-              <a:t>余弦衰减策略降至 </a:t>
-            </a:r>
-            <a:r>
-              <a:rPr lang="en-US" altLang="zh-CN" sz="1600" b="0" i="0" dirty="0">
-                <a:effectLst/>
-                <a:latin typeface="+mn-ea"/>
-              </a:rPr>
-              <a:t>5e-6</a:t>
-            </a:r>
-            <a:endParaRPr lang="en-US" altLang="zh-CN" sz="1600" dirty="0">
-              <a:solidFill>
-                <a:srgbClr val="000000"/>
-              </a:solidFill>
-              <a:latin typeface="+mn-ea"/>
-            </a:endParaRPr>
-          </a:p>
-        </p:txBody>
-      </p:sp>
-    </p:spTree>
-    <p:extLst>
-      <p:ext uri="{BB962C8B-B14F-4D97-AF65-F5344CB8AC3E}">
-        <p14:creationId xmlns:p14="http://schemas.microsoft.com/office/powerpoint/2010/main" val="1329594517"/>
-      </p:ext>
-    </p:extLst>
   </p:cSld>
   <p:clrMapOvr>
     <a:masterClrMapping/>
@@ -9908,15 +10511,15 @@
 </file>
 
 <file path=ppt/tags/tag1.xml><?xml version="1.0" encoding="utf-8"?>
-<p:tagLst xmlns:a="http://schemas.openxmlformats.org/drawingml/2006/main" xmlns:r="http://schemas.openxmlformats.org/officeDocument/2006/relationships" xmlns:p="http://schemas.openxmlformats.org/presentationml/2006/main">
-  <p:tag name="RESOURCE_RECORD_KEY" val="{&quot;10&quot;:[20179637,20211662,50039266,21564682]}"/>
+<p:tagLst xmlns:p="http://schemas.openxmlformats.org/presentationml/2006/main">
+  <p:tag name="TABLE_ENDDRAG_ORIGIN_RECT" val="929*505"/>
+  <p:tag name="TABLE_ENDDRAG_RECT" val="21*141*929*505"/>
 </p:tagLst>
 </file>
 
 <file path=ppt/tags/tag2.xml><?xml version="1.0" encoding="utf-8"?>
-<p:tagLst xmlns:a="http://schemas.openxmlformats.org/drawingml/2006/main" xmlns:r="http://schemas.openxmlformats.org/officeDocument/2006/relationships" xmlns:p="http://schemas.openxmlformats.org/presentationml/2006/main">
-  <p:tag name="TABLE_ENDDRAG_ORIGIN_RECT" val="929*505"/>
-  <p:tag name="TABLE_ENDDRAG_RECT" val="21*141*929*505"/>
+<p:tagLst xmlns:p="http://schemas.openxmlformats.org/presentationml/2006/main">
+  <p:tag name="RESOURCE_RECORD_KEY" val="{&quot;10&quot;:[20179637,20211662,50039266,21564682]}"/>
 </p:tagLst>
 </file>
 
@@ -10192,7 +10795,6 @@
       </a:style>
     </a:lnDef>
   </a:objectDefaults>
-  <a:extraClrSchemeLst/>
   <a:extLst>
     <a:ext uri="{05A4C25C-085E-4340-85A3-A5531E510DB2}">
       <thm15:themeFamily xmlns:thm15="http://schemas.microsoft.com/office/thememl/2012/main" name="Office Theme" id="{62F939B6-93AF-4DB8-9C6B-D6C7DFDC589F}" vid="{4A3C46E8-61CC-4603-A589-7422A47A8E4A}"/>
@@ -10452,8 +11054,6 @@
       </a:bgFillStyleLst>
     </a:fmtScheme>
   </a:themeElements>
-  <a:objectDefaults/>
-  <a:extraClrSchemeLst/>
   <a:extLst>
     <a:ext uri="{05A4C25C-085E-4340-85A3-A5531E510DB2}">
       <thm15:themeFamily xmlns:thm15="http://schemas.microsoft.com/office/thememl/2012/main" name="Office Theme" id="{62F939B6-93AF-4DB8-9C6B-D6C7DFDC589F}" vid="{4A3C46E8-61CC-4603-A589-7422A47A8E4A}"/>

--- a/组会记录/组会1215.pptx
+++ b/组会记录/组会1215.pptx
@@ -5,25 +5,25 @@
     <p:sldMasterId id="2147483648" r:id="rId1"/>
   </p:sldMasterIdLst>
   <p:notesMasterIdLst>
-    <p:notesMasterId r:id="rId5"/>
+    <p:notesMasterId r:id="rId13"/>
   </p:notesMasterIdLst>
   <p:sldIdLst>
-    <p:sldId id="397" r:id="rId3"/>
-    <p:sldId id="327" r:id="rId4"/>
-    <p:sldId id="368" r:id="rId6"/>
-    <p:sldId id="405" r:id="rId7"/>
-    <p:sldId id="399" r:id="rId8"/>
-    <p:sldId id="398" r:id="rId9"/>
-    <p:sldId id="400" r:id="rId10"/>
-    <p:sldId id="401" r:id="rId11"/>
-    <p:sldId id="402" r:id="rId12"/>
-    <p:sldId id="403" r:id="rId13"/>
-    <p:sldId id="404" r:id="rId14"/>
+    <p:sldId id="397" r:id="rId2"/>
+    <p:sldId id="327" r:id="rId3"/>
+    <p:sldId id="368" r:id="rId4"/>
+    <p:sldId id="405" r:id="rId5"/>
+    <p:sldId id="399" r:id="rId6"/>
+    <p:sldId id="398" r:id="rId7"/>
+    <p:sldId id="400" r:id="rId8"/>
+    <p:sldId id="401" r:id="rId9"/>
+    <p:sldId id="402" r:id="rId10"/>
+    <p:sldId id="403" r:id="rId11"/>
+    <p:sldId id="404" r:id="rId12"/>
   </p:sldIdLst>
   <p:sldSz cx="12192000" cy="6858000"/>
   <p:notesSz cx="6858000" cy="9144000"/>
   <p:custDataLst>
-    <p:tags r:id="rId18"/>
+    <p:tags r:id="rId14"/>
   </p:custDataLst>
   <p:defaultTextStyle>
     <a:defPPr>
@@ -120,6 +120,11 @@
       </a:defRPr>
     </a:lvl9pPr>
   </p:defaultTextStyle>
+  <p:extLst>
+    <p:ext uri="{EFAFB233-063F-42B5-8137-9DF3F51BA10A}">
+      <p15:sldGuideLst xmlns:p15="http://schemas.microsoft.com/office/powerpoint/2012/main"/>
+    </p:ext>
+  </p:extLst>
 </p:presentation>
 </file>
 
@@ -205,6 +210,7 @@
           <a:p>
             <a:fld id="{D2A48B96-639E-45A3-A0BA-2464DFDB1FAA}" type="datetimeFigureOut">
               <a:rPr lang="zh-CN" altLang="en-US" smtClean="0"/>
+              <a:t>2026/1/12</a:t>
             </a:fld>
             <a:endParaRPr lang="zh-CN" altLang="en-US"/>
           </a:p>
@@ -271,7 +277,6 @@
               <a:rPr lang="zh-CN" altLang="en-US"/>
               <a:t>单击此处编辑母版文本样式</a:t>
             </a:r>
-            <a:endParaRPr lang="zh-CN" altLang="en-US"/>
           </a:p>
           <a:p>
             <a:pPr lvl="1"/>
@@ -279,7 +284,6 @@
               <a:rPr lang="zh-CN" altLang="en-US"/>
               <a:t>第二级</a:t>
             </a:r>
-            <a:endParaRPr lang="zh-CN" altLang="en-US"/>
           </a:p>
           <a:p>
             <a:pPr lvl="2"/>
@@ -287,7 +291,6 @@
               <a:rPr lang="zh-CN" altLang="en-US"/>
               <a:t>第三级</a:t>
             </a:r>
-            <a:endParaRPr lang="zh-CN" altLang="en-US"/>
           </a:p>
           <a:p>
             <a:pPr lvl="3"/>
@@ -295,7 +298,6 @@
               <a:rPr lang="zh-CN" altLang="en-US"/>
               <a:t>第四级</a:t>
             </a:r>
-            <a:endParaRPr lang="zh-CN" altLang="en-US"/>
           </a:p>
           <a:p>
             <a:pPr lvl="4"/>
@@ -303,7 +305,6 @@
               <a:rPr lang="zh-CN" altLang="en-US"/>
               <a:t>第五级</a:t>
             </a:r>
-            <a:endParaRPr lang="zh-CN" altLang="en-US"/>
           </a:p>
         </p:txBody>
       </p:sp>
@@ -367,6 +368,7 @@
           <a:p>
             <a:fld id="{A6837353-30EB-4A48-80EB-173D804AEFBD}" type="slidenum">
               <a:rPr lang="zh-CN" altLang="en-US" smtClean="0"/>
+              <a:t>‹#›</a:t>
             </a:fld>
             <a:endParaRPr lang="zh-CN" altLang="en-US"/>
           </a:p>
@@ -571,7 +573,6 @@
               <a:rPr lang="zh-CN" altLang="en-US"/>
               <a:t>单击此处编辑母版标题样式</a:t>
             </a:r>
-            <a:endParaRPr lang="zh-CN" altLang="en-US"/>
           </a:p>
         </p:txBody>
       </p:sp>
@@ -636,7 +637,6 @@
               <a:rPr lang="zh-CN" altLang="en-US"/>
               <a:t>单击此处编辑母版副标题样式</a:t>
             </a:r>
-            <a:endParaRPr lang="zh-CN" altLang="en-US"/>
           </a:p>
         </p:txBody>
       </p:sp>
@@ -657,6 +657,7 @@
           <a:p>
             <a:fld id="{837840E2-13A5-46A9-A265-C77FF1EECC77}" type="datetimeFigureOut">
               <a:rPr lang="zh-CN" altLang="en-US" smtClean="0"/>
+              <a:t>2026/1/12</a:t>
             </a:fld>
             <a:endParaRPr lang="zh-CN" altLang="en-US"/>
           </a:p>
@@ -698,6 +699,7 @@
           <a:p>
             <a:fld id="{079686F9-7E47-4853-B8F4-FBCF71CB48DC}" type="slidenum">
               <a:rPr lang="zh-CN" altLang="en-US" smtClean="0"/>
+              <a:t>‹#›</a:t>
             </a:fld>
             <a:endParaRPr lang="zh-CN" altLang="en-US"/>
           </a:p>
@@ -747,7 +749,6 @@
               <a:rPr lang="zh-CN" altLang="en-US"/>
               <a:t>单击此处编辑母版标题样式</a:t>
             </a:r>
-            <a:endParaRPr lang="zh-CN" altLang="en-US"/>
           </a:p>
         </p:txBody>
       </p:sp>
@@ -771,7 +772,6 @@
               <a:rPr lang="zh-CN" altLang="en-US"/>
               <a:t>单击此处编辑母版文本样式</a:t>
             </a:r>
-            <a:endParaRPr lang="zh-CN" altLang="en-US"/>
           </a:p>
           <a:p>
             <a:pPr lvl="1"/>
@@ -779,7 +779,6 @@
               <a:rPr lang="zh-CN" altLang="en-US"/>
               <a:t>二级</a:t>
             </a:r>
-            <a:endParaRPr lang="zh-CN" altLang="en-US"/>
           </a:p>
           <a:p>
             <a:pPr lvl="2"/>
@@ -787,7 +786,6 @@
               <a:rPr lang="zh-CN" altLang="en-US"/>
               <a:t>三级</a:t>
             </a:r>
-            <a:endParaRPr lang="zh-CN" altLang="en-US"/>
           </a:p>
           <a:p>
             <a:pPr lvl="3"/>
@@ -795,7 +793,6 @@
               <a:rPr lang="zh-CN" altLang="en-US"/>
               <a:t>四级</a:t>
             </a:r>
-            <a:endParaRPr lang="zh-CN" altLang="en-US"/>
           </a:p>
           <a:p>
             <a:pPr lvl="4"/>
@@ -803,7 +800,6 @@
               <a:rPr lang="zh-CN" altLang="en-US"/>
               <a:t>五级</a:t>
             </a:r>
-            <a:endParaRPr lang="zh-CN" altLang="en-US"/>
           </a:p>
         </p:txBody>
       </p:sp>
@@ -824,6 +820,7 @@
           <a:p>
             <a:fld id="{837840E2-13A5-46A9-A265-C77FF1EECC77}" type="datetimeFigureOut">
               <a:rPr lang="zh-CN" altLang="en-US" smtClean="0"/>
+              <a:t>2026/1/12</a:t>
             </a:fld>
             <a:endParaRPr lang="zh-CN" altLang="en-US"/>
           </a:p>
@@ -865,6 +862,7 @@
           <a:p>
             <a:fld id="{079686F9-7E47-4853-B8F4-FBCF71CB48DC}" type="slidenum">
               <a:rPr lang="zh-CN" altLang="en-US" smtClean="0"/>
+              <a:t>‹#›</a:t>
             </a:fld>
             <a:endParaRPr lang="zh-CN" altLang="en-US"/>
           </a:p>
@@ -919,7 +917,6 @@
               <a:rPr lang="zh-CN" altLang="en-US"/>
               <a:t>单击此处编辑母版标题样式</a:t>
             </a:r>
-            <a:endParaRPr lang="zh-CN" altLang="en-US"/>
           </a:p>
         </p:txBody>
       </p:sp>
@@ -948,7 +945,6 @@
               <a:rPr lang="zh-CN" altLang="en-US"/>
               <a:t>单击此处编辑母版文本样式</a:t>
             </a:r>
-            <a:endParaRPr lang="zh-CN" altLang="en-US"/>
           </a:p>
           <a:p>
             <a:pPr lvl="1"/>
@@ -956,7 +952,6 @@
               <a:rPr lang="zh-CN" altLang="en-US"/>
               <a:t>二级</a:t>
             </a:r>
-            <a:endParaRPr lang="zh-CN" altLang="en-US"/>
           </a:p>
           <a:p>
             <a:pPr lvl="2"/>
@@ -964,7 +959,6 @@
               <a:rPr lang="zh-CN" altLang="en-US"/>
               <a:t>三级</a:t>
             </a:r>
-            <a:endParaRPr lang="zh-CN" altLang="en-US"/>
           </a:p>
           <a:p>
             <a:pPr lvl="3"/>
@@ -972,7 +966,6 @@
               <a:rPr lang="zh-CN" altLang="en-US"/>
               <a:t>四级</a:t>
             </a:r>
-            <a:endParaRPr lang="zh-CN" altLang="en-US"/>
           </a:p>
           <a:p>
             <a:pPr lvl="4"/>
@@ -980,7 +973,6 @@
               <a:rPr lang="zh-CN" altLang="en-US"/>
               <a:t>五级</a:t>
             </a:r>
-            <a:endParaRPr lang="zh-CN" altLang="en-US"/>
           </a:p>
         </p:txBody>
       </p:sp>
@@ -1001,6 +993,7 @@
           <a:p>
             <a:fld id="{837840E2-13A5-46A9-A265-C77FF1EECC77}" type="datetimeFigureOut">
               <a:rPr lang="zh-CN" altLang="en-US" smtClean="0"/>
+              <a:t>2026/1/12</a:t>
             </a:fld>
             <a:endParaRPr lang="zh-CN" altLang="en-US"/>
           </a:p>
@@ -1042,6 +1035,7 @@
           <a:p>
             <a:fld id="{079686F9-7E47-4853-B8F4-FBCF71CB48DC}" type="slidenum">
               <a:rPr lang="zh-CN" altLang="en-US" smtClean="0"/>
+              <a:t>‹#›</a:t>
             </a:fld>
             <a:endParaRPr lang="zh-CN" altLang="en-US"/>
           </a:p>
@@ -1091,7 +1085,6 @@
               <a:rPr lang="zh-CN" altLang="en-US"/>
               <a:t>单击此处编辑母版标题样式</a:t>
             </a:r>
-            <a:endParaRPr lang="zh-CN" altLang="en-US"/>
           </a:p>
         </p:txBody>
       </p:sp>
@@ -1115,7 +1108,6 @@
               <a:rPr lang="zh-CN" altLang="en-US"/>
               <a:t>单击此处编辑母版文本样式</a:t>
             </a:r>
-            <a:endParaRPr lang="zh-CN" altLang="en-US"/>
           </a:p>
           <a:p>
             <a:pPr lvl="1"/>
@@ -1123,7 +1115,6 @@
               <a:rPr lang="zh-CN" altLang="en-US"/>
               <a:t>二级</a:t>
             </a:r>
-            <a:endParaRPr lang="zh-CN" altLang="en-US"/>
           </a:p>
           <a:p>
             <a:pPr lvl="2"/>
@@ -1131,7 +1122,6 @@
               <a:rPr lang="zh-CN" altLang="en-US"/>
               <a:t>三级</a:t>
             </a:r>
-            <a:endParaRPr lang="zh-CN" altLang="en-US"/>
           </a:p>
           <a:p>
             <a:pPr lvl="3"/>
@@ -1139,7 +1129,6 @@
               <a:rPr lang="zh-CN" altLang="en-US"/>
               <a:t>四级</a:t>
             </a:r>
-            <a:endParaRPr lang="zh-CN" altLang="en-US"/>
           </a:p>
           <a:p>
             <a:pPr lvl="4"/>
@@ -1147,7 +1136,6 @@
               <a:rPr lang="zh-CN" altLang="en-US"/>
               <a:t>五级</a:t>
             </a:r>
-            <a:endParaRPr lang="zh-CN" altLang="en-US"/>
           </a:p>
         </p:txBody>
       </p:sp>
@@ -1168,6 +1156,7 @@
           <a:p>
             <a:fld id="{837840E2-13A5-46A9-A265-C77FF1EECC77}" type="datetimeFigureOut">
               <a:rPr lang="zh-CN" altLang="en-US" smtClean="0"/>
+              <a:t>2026/1/12</a:t>
             </a:fld>
             <a:endParaRPr lang="zh-CN" altLang="en-US"/>
           </a:p>
@@ -1209,6 +1198,7 @@
           <a:p>
             <a:fld id="{079686F9-7E47-4853-B8F4-FBCF71CB48DC}" type="slidenum">
               <a:rPr lang="zh-CN" altLang="en-US" smtClean="0"/>
+              <a:t>‹#›</a:t>
             </a:fld>
             <a:endParaRPr lang="zh-CN" altLang="en-US"/>
           </a:p>
@@ -1267,7 +1257,6 @@
               <a:rPr lang="zh-CN" altLang="en-US"/>
               <a:t>单击此处编辑母版标题样式</a:t>
             </a:r>
-            <a:endParaRPr lang="zh-CN" altLang="en-US"/>
           </a:p>
         </p:txBody>
       </p:sp>
@@ -1387,7 +1376,6 @@
               <a:rPr lang="zh-CN" altLang="en-US"/>
               <a:t>单击此处编辑母版文本样式</a:t>
             </a:r>
-            <a:endParaRPr lang="zh-CN" altLang="en-US"/>
           </a:p>
         </p:txBody>
       </p:sp>
@@ -1408,6 +1396,7 @@
           <a:p>
             <a:fld id="{837840E2-13A5-46A9-A265-C77FF1EECC77}" type="datetimeFigureOut">
               <a:rPr lang="zh-CN" altLang="en-US" smtClean="0"/>
+              <a:t>2026/1/12</a:t>
             </a:fld>
             <a:endParaRPr lang="zh-CN" altLang="en-US"/>
           </a:p>
@@ -1449,6 +1438,7 @@
           <a:p>
             <a:fld id="{079686F9-7E47-4853-B8F4-FBCF71CB48DC}" type="slidenum">
               <a:rPr lang="zh-CN" altLang="en-US" smtClean="0"/>
+              <a:t>‹#›</a:t>
             </a:fld>
             <a:endParaRPr lang="zh-CN" altLang="en-US"/>
           </a:p>
@@ -1498,7 +1488,6 @@
               <a:rPr lang="zh-CN" altLang="en-US"/>
               <a:t>单击此处编辑母版标题样式</a:t>
             </a:r>
-            <a:endParaRPr lang="zh-CN" altLang="en-US"/>
           </a:p>
         </p:txBody>
       </p:sp>
@@ -1527,7 +1516,6 @@
               <a:rPr lang="zh-CN" altLang="en-US"/>
               <a:t>单击此处编辑母版文本样式</a:t>
             </a:r>
-            <a:endParaRPr lang="zh-CN" altLang="en-US"/>
           </a:p>
           <a:p>
             <a:pPr lvl="1"/>
@@ -1535,7 +1523,6 @@
               <a:rPr lang="zh-CN" altLang="en-US"/>
               <a:t>二级</a:t>
             </a:r>
-            <a:endParaRPr lang="zh-CN" altLang="en-US"/>
           </a:p>
           <a:p>
             <a:pPr lvl="2"/>
@@ -1543,7 +1530,6 @@
               <a:rPr lang="zh-CN" altLang="en-US"/>
               <a:t>三级</a:t>
             </a:r>
-            <a:endParaRPr lang="zh-CN" altLang="en-US"/>
           </a:p>
           <a:p>
             <a:pPr lvl="3"/>
@@ -1551,7 +1537,6 @@
               <a:rPr lang="zh-CN" altLang="en-US"/>
               <a:t>四级</a:t>
             </a:r>
-            <a:endParaRPr lang="zh-CN" altLang="en-US"/>
           </a:p>
           <a:p>
             <a:pPr lvl="4"/>
@@ -1559,7 +1544,6 @@
               <a:rPr lang="zh-CN" altLang="en-US"/>
               <a:t>五级</a:t>
             </a:r>
-            <a:endParaRPr lang="zh-CN" altLang="en-US"/>
           </a:p>
         </p:txBody>
       </p:sp>
@@ -1588,7 +1572,6 @@
               <a:rPr lang="zh-CN" altLang="en-US"/>
               <a:t>单击此处编辑母版文本样式</a:t>
             </a:r>
-            <a:endParaRPr lang="zh-CN" altLang="en-US"/>
           </a:p>
           <a:p>
             <a:pPr lvl="1"/>
@@ -1596,7 +1579,6 @@
               <a:rPr lang="zh-CN" altLang="en-US"/>
               <a:t>二级</a:t>
             </a:r>
-            <a:endParaRPr lang="zh-CN" altLang="en-US"/>
           </a:p>
           <a:p>
             <a:pPr lvl="2"/>
@@ -1604,7 +1586,6 @@
               <a:rPr lang="zh-CN" altLang="en-US"/>
               <a:t>三级</a:t>
             </a:r>
-            <a:endParaRPr lang="zh-CN" altLang="en-US"/>
           </a:p>
           <a:p>
             <a:pPr lvl="3"/>
@@ -1612,7 +1593,6 @@
               <a:rPr lang="zh-CN" altLang="en-US"/>
               <a:t>四级</a:t>
             </a:r>
-            <a:endParaRPr lang="zh-CN" altLang="en-US"/>
           </a:p>
           <a:p>
             <a:pPr lvl="4"/>
@@ -1620,7 +1600,6 @@
               <a:rPr lang="zh-CN" altLang="en-US"/>
               <a:t>五级</a:t>
             </a:r>
-            <a:endParaRPr lang="zh-CN" altLang="en-US"/>
           </a:p>
         </p:txBody>
       </p:sp>
@@ -1641,6 +1620,7 @@
           <a:p>
             <a:fld id="{837840E2-13A5-46A9-A265-C77FF1EECC77}" type="datetimeFigureOut">
               <a:rPr lang="zh-CN" altLang="en-US" smtClean="0"/>
+              <a:t>2026/1/12</a:t>
             </a:fld>
             <a:endParaRPr lang="zh-CN" altLang="en-US"/>
           </a:p>
@@ -1682,6 +1662,7 @@
           <a:p>
             <a:fld id="{079686F9-7E47-4853-B8F4-FBCF71CB48DC}" type="slidenum">
               <a:rPr lang="zh-CN" altLang="en-US" smtClean="0"/>
+              <a:t>‹#›</a:t>
             </a:fld>
             <a:endParaRPr lang="zh-CN" altLang="en-US"/>
           </a:p>
@@ -1736,7 +1717,6 @@
               <a:rPr lang="zh-CN" altLang="en-US"/>
               <a:t>单击此处编辑母版标题样式</a:t>
             </a:r>
-            <a:endParaRPr lang="zh-CN" altLang="en-US"/>
           </a:p>
         </p:txBody>
       </p:sp>
@@ -1802,7 +1782,6 @@
               <a:rPr lang="zh-CN" altLang="en-US"/>
               <a:t>单击此处编辑母版文本样式</a:t>
             </a:r>
-            <a:endParaRPr lang="zh-CN" altLang="en-US"/>
           </a:p>
         </p:txBody>
       </p:sp>
@@ -1831,7 +1810,6 @@
               <a:rPr lang="zh-CN" altLang="en-US"/>
               <a:t>单击此处编辑母版文本样式</a:t>
             </a:r>
-            <a:endParaRPr lang="zh-CN" altLang="en-US"/>
           </a:p>
           <a:p>
             <a:pPr lvl="1"/>
@@ -1839,7 +1817,6 @@
               <a:rPr lang="zh-CN" altLang="en-US"/>
               <a:t>二级</a:t>
             </a:r>
-            <a:endParaRPr lang="zh-CN" altLang="en-US"/>
           </a:p>
           <a:p>
             <a:pPr lvl="2"/>
@@ -1847,7 +1824,6 @@
               <a:rPr lang="zh-CN" altLang="en-US"/>
               <a:t>三级</a:t>
             </a:r>
-            <a:endParaRPr lang="zh-CN" altLang="en-US"/>
           </a:p>
           <a:p>
             <a:pPr lvl="3"/>
@@ -1855,7 +1831,6 @@
               <a:rPr lang="zh-CN" altLang="en-US"/>
               <a:t>四级</a:t>
             </a:r>
-            <a:endParaRPr lang="zh-CN" altLang="en-US"/>
           </a:p>
           <a:p>
             <a:pPr lvl="4"/>
@@ -1863,7 +1838,6 @@
               <a:rPr lang="zh-CN" altLang="en-US"/>
               <a:t>五级</a:t>
             </a:r>
-            <a:endParaRPr lang="zh-CN" altLang="en-US"/>
           </a:p>
         </p:txBody>
       </p:sp>
@@ -1929,7 +1903,6 @@
               <a:rPr lang="zh-CN" altLang="en-US"/>
               <a:t>单击此处编辑母版文本样式</a:t>
             </a:r>
-            <a:endParaRPr lang="zh-CN" altLang="en-US"/>
           </a:p>
         </p:txBody>
       </p:sp>
@@ -1958,7 +1931,6 @@
               <a:rPr lang="zh-CN" altLang="en-US"/>
               <a:t>单击此处编辑母版文本样式</a:t>
             </a:r>
-            <a:endParaRPr lang="zh-CN" altLang="en-US"/>
           </a:p>
           <a:p>
             <a:pPr lvl="1"/>
@@ -1966,7 +1938,6 @@
               <a:rPr lang="zh-CN" altLang="en-US"/>
               <a:t>二级</a:t>
             </a:r>
-            <a:endParaRPr lang="zh-CN" altLang="en-US"/>
           </a:p>
           <a:p>
             <a:pPr lvl="2"/>
@@ -1974,7 +1945,6 @@
               <a:rPr lang="zh-CN" altLang="en-US"/>
               <a:t>三级</a:t>
             </a:r>
-            <a:endParaRPr lang="zh-CN" altLang="en-US"/>
           </a:p>
           <a:p>
             <a:pPr lvl="3"/>
@@ -1982,7 +1952,6 @@
               <a:rPr lang="zh-CN" altLang="en-US"/>
               <a:t>四级</a:t>
             </a:r>
-            <a:endParaRPr lang="zh-CN" altLang="en-US"/>
           </a:p>
           <a:p>
             <a:pPr lvl="4"/>
@@ -1990,7 +1959,6 @@
               <a:rPr lang="zh-CN" altLang="en-US"/>
               <a:t>五级</a:t>
             </a:r>
-            <a:endParaRPr lang="zh-CN" altLang="en-US"/>
           </a:p>
         </p:txBody>
       </p:sp>
@@ -2011,6 +1979,7 @@
           <a:p>
             <a:fld id="{837840E2-13A5-46A9-A265-C77FF1EECC77}" type="datetimeFigureOut">
               <a:rPr lang="zh-CN" altLang="en-US" smtClean="0"/>
+              <a:t>2026/1/12</a:t>
             </a:fld>
             <a:endParaRPr lang="zh-CN" altLang="en-US"/>
           </a:p>
@@ -2052,6 +2021,7 @@
           <a:p>
             <a:fld id="{079686F9-7E47-4853-B8F4-FBCF71CB48DC}" type="slidenum">
               <a:rPr lang="zh-CN" altLang="en-US" smtClean="0"/>
+              <a:t>‹#›</a:t>
             </a:fld>
             <a:endParaRPr lang="zh-CN" altLang="en-US"/>
           </a:p>
@@ -2101,7 +2071,6 @@
               <a:rPr lang="zh-CN" altLang="en-US"/>
               <a:t>单击此处编辑母版标题样式</a:t>
             </a:r>
-            <a:endParaRPr lang="zh-CN" altLang="en-US"/>
           </a:p>
         </p:txBody>
       </p:sp>
@@ -2122,6 +2091,7 @@
           <a:p>
             <a:fld id="{837840E2-13A5-46A9-A265-C77FF1EECC77}" type="datetimeFigureOut">
               <a:rPr lang="zh-CN" altLang="en-US" smtClean="0"/>
+              <a:t>2026/1/12</a:t>
             </a:fld>
             <a:endParaRPr lang="zh-CN" altLang="en-US"/>
           </a:p>
@@ -2163,6 +2133,7 @@
           <a:p>
             <a:fld id="{079686F9-7E47-4853-B8F4-FBCF71CB48DC}" type="slidenum">
               <a:rPr lang="zh-CN" altLang="en-US" smtClean="0"/>
+              <a:t>‹#›</a:t>
             </a:fld>
             <a:endParaRPr lang="zh-CN" altLang="en-US"/>
           </a:p>
@@ -2210,6 +2181,7 @@
           <a:p>
             <a:fld id="{837840E2-13A5-46A9-A265-C77FF1EECC77}" type="datetimeFigureOut">
               <a:rPr lang="zh-CN" altLang="en-US" smtClean="0"/>
+              <a:t>2026/1/12</a:t>
             </a:fld>
             <a:endParaRPr lang="zh-CN" altLang="en-US"/>
           </a:p>
@@ -2251,6 +2223,7 @@
           <a:p>
             <a:fld id="{079686F9-7E47-4853-B8F4-FBCF71CB48DC}" type="slidenum">
               <a:rPr lang="zh-CN" altLang="en-US" smtClean="0"/>
+              <a:t>‹#›</a:t>
             </a:fld>
             <a:endParaRPr lang="zh-CN" altLang="en-US"/>
           </a:p>
@@ -2309,7 +2282,6 @@
               <a:rPr lang="zh-CN" altLang="en-US"/>
               <a:t>单击此处编辑母版标题样式</a:t>
             </a:r>
-            <a:endParaRPr lang="zh-CN" altLang="en-US"/>
           </a:p>
         </p:txBody>
       </p:sp>
@@ -2366,7 +2338,6 @@
               <a:rPr lang="zh-CN" altLang="en-US"/>
               <a:t>单击此处编辑母版文本样式</a:t>
             </a:r>
-            <a:endParaRPr lang="zh-CN" altLang="en-US"/>
           </a:p>
           <a:p>
             <a:pPr lvl="1"/>
@@ -2374,7 +2345,6 @@
               <a:rPr lang="zh-CN" altLang="en-US"/>
               <a:t>二级</a:t>
             </a:r>
-            <a:endParaRPr lang="zh-CN" altLang="en-US"/>
           </a:p>
           <a:p>
             <a:pPr lvl="2"/>
@@ -2382,7 +2352,6 @@
               <a:rPr lang="zh-CN" altLang="en-US"/>
               <a:t>三级</a:t>
             </a:r>
-            <a:endParaRPr lang="zh-CN" altLang="en-US"/>
           </a:p>
           <a:p>
             <a:pPr lvl="3"/>
@@ -2390,7 +2359,6 @@
               <a:rPr lang="zh-CN" altLang="en-US"/>
               <a:t>四级</a:t>
             </a:r>
-            <a:endParaRPr lang="zh-CN" altLang="en-US"/>
           </a:p>
           <a:p>
             <a:pPr lvl="4"/>
@@ -2398,7 +2366,6 @@
               <a:rPr lang="zh-CN" altLang="en-US"/>
               <a:t>五级</a:t>
             </a:r>
-            <a:endParaRPr lang="zh-CN" altLang="en-US"/>
           </a:p>
         </p:txBody>
       </p:sp>
@@ -2464,7 +2431,6 @@
               <a:rPr lang="zh-CN" altLang="en-US"/>
               <a:t>单击此处编辑母版文本样式</a:t>
             </a:r>
-            <a:endParaRPr lang="zh-CN" altLang="en-US"/>
           </a:p>
         </p:txBody>
       </p:sp>
@@ -2485,6 +2451,7 @@
           <a:p>
             <a:fld id="{837840E2-13A5-46A9-A265-C77FF1EECC77}" type="datetimeFigureOut">
               <a:rPr lang="zh-CN" altLang="en-US" smtClean="0"/>
+              <a:t>2026/1/12</a:t>
             </a:fld>
             <a:endParaRPr lang="zh-CN" altLang="en-US"/>
           </a:p>
@@ -2526,6 +2493,7 @@
           <a:p>
             <a:fld id="{079686F9-7E47-4853-B8F4-FBCF71CB48DC}" type="slidenum">
               <a:rPr lang="zh-CN" altLang="en-US" smtClean="0"/>
+              <a:t>‹#›</a:t>
             </a:fld>
             <a:endParaRPr lang="zh-CN" altLang="en-US"/>
           </a:p>
@@ -2584,7 +2552,6 @@
               <a:rPr lang="zh-CN" altLang="en-US"/>
               <a:t>单击此处编辑母版标题样式</a:t>
             </a:r>
-            <a:endParaRPr lang="zh-CN" altLang="en-US"/>
           </a:p>
         </p:txBody>
       </p:sp>
@@ -2711,7 +2678,6 @@
               <a:rPr lang="zh-CN" altLang="en-US"/>
               <a:t>单击此处编辑母版文本样式</a:t>
             </a:r>
-            <a:endParaRPr lang="zh-CN" altLang="en-US"/>
           </a:p>
         </p:txBody>
       </p:sp>
@@ -2732,6 +2698,7 @@
           <a:p>
             <a:fld id="{837840E2-13A5-46A9-A265-C77FF1EECC77}" type="datetimeFigureOut">
               <a:rPr lang="zh-CN" altLang="en-US" smtClean="0"/>
+              <a:t>2026/1/12</a:t>
             </a:fld>
             <a:endParaRPr lang="zh-CN" altLang="en-US"/>
           </a:p>
@@ -2773,6 +2740,7 @@
           <a:p>
             <a:fld id="{079686F9-7E47-4853-B8F4-FBCF71CB48DC}" type="slidenum">
               <a:rPr lang="zh-CN" altLang="en-US" smtClean="0"/>
+              <a:t>‹#›</a:t>
             </a:fld>
             <a:endParaRPr lang="zh-CN" altLang="en-US"/>
           </a:p>
@@ -2837,7 +2805,6 @@
               <a:rPr lang="zh-CN" altLang="en-US"/>
               <a:t>单击此处编辑母版标题样式</a:t>
             </a:r>
-            <a:endParaRPr lang="zh-CN" altLang="en-US"/>
           </a:p>
         </p:txBody>
       </p:sp>
@@ -2871,7 +2838,6 @@
               <a:rPr lang="zh-CN" altLang="en-US"/>
               <a:t>单击此处编辑母版文本样式</a:t>
             </a:r>
-            <a:endParaRPr lang="zh-CN" altLang="en-US"/>
           </a:p>
           <a:p>
             <a:pPr lvl="1"/>
@@ -2879,7 +2845,6 @@
               <a:rPr lang="zh-CN" altLang="en-US"/>
               <a:t>二级</a:t>
             </a:r>
-            <a:endParaRPr lang="zh-CN" altLang="en-US"/>
           </a:p>
           <a:p>
             <a:pPr lvl="2"/>
@@ -2887,7 +2852,6 @@
               <a:rPr lang="zh-CN" altLang="en-US"/>
               <a:t>三级</a:t>
             </a:r>
-            <a:endParaRPr lang="zh-CN" altLang="en-US"/>
           </a:p>
           <a:p>
             <a:pPr lvl="3"/>
@@ -2895,7 +2859,6 @@
               <a:rPr lang="zh-CN" altLang="en-US"/>
               <a:t>四级</a:t>
             </a:r>
-            <a:endParaRPr lang="zh-CN" altLang="en-US"/>
           </a:p>
           <a:p>
             <a:pPr lvl="4"/>
@@ -2903,7 +2866,6 @@
               <a:rPr lang="zh-CN" altLang="en-US"/>
               <a:t>五级</a:t>
             </a:r>
-            <a:endParaRPr lang="zh-CN" altLang="en-US"/>
           </a:p>
         </p:txBody>
       </p:sp>
@@ -2942,6 +2904,7 @@
           <a:p>
             <a:fld id="{837840E2-13A5-46A9-A265-C77FF1EECC77}" type="datetimeFigureOut">
               <a:rPr lang="zh-CN" altLang="en-US" smtClean="0"/>
+              <a:t>2026/1/12</a:t>
             </a:fld>
             <a:endParaRPr lang="zh-CN" altLang="en-US"/>
           </a:p>
@@ -3019,6 +2982,7 @@
           <a:p>
             <a:fld id="{079686F9-7E47-4853-B8F4-FBCF71CB48DC}" type="slidenum">
               <a:rPr lang="zh-CN" altLang="en-US" smtClean="0"/>
+              <a:t>‹#›</a:t>
             </a:fld>
             <a:endParaRPr lang="zh-CN" altLang="en-US"/>
           </a:p>
@@ -3390,9 +3354,6 @@
               </a:rPr>
               <a:t>11</a:t>
             </a:r>
-            <a:endParaRPr lang="en-US" altLang="zh-CN" sz="3200" dirty="0">
-              <a:sym typeface="+mn-ea"/>
-            </a:endParaRPr>
           </a:p>
         </p:txBody>
       </p:sp>
@@ -3568,15 +3529,6 @@
               </a:rPr>
               <a:t>条左右是</a:t>
             </a:r>
-            <a:endParaRPr lang="zh-CN" altLang="en-US" sz="2000" dirty="0">
-              <a:solidFill>
-                <a:schemeClr val="tx2">
-                  <a:lumMod val="75000"/>
-                  <a:lumOff val="25000"/>
-                </a:schemeClr>
-              </a:solidFill>
-              <a:sym typeface="+mn-ea"/>
-            </a:endParaRPr>
           </a:p>
           <a:p>
             <a:pPr indent="0" algn="l">
@@ -3657,15 +3609,6 @@
               </a:rPr>
               <a:t>微调和评估，对比结果发现提升幅度更小</a:t>
             </a:r>
-            <a:endParaRPr lang="zh-CN" altLang="en-US" sz="2000" dirty="0">
-              <a:solidFill>
-                <a:schemeClr val="tx2">
-                  <a:lumMod val="75000"/>
-                  <a:lumOff val="25000"/>
-                </a:schemeClr>
-              </a:solidFill>
-              <a:sym typeface="+mn-ea"/>
-            </a:endParaRPr>
           </a:p>
           <a:p>
             <a:pPr indent="0" algn="l">
@@ -3770,15 +3713,6 @@
               </a:rPr>
               <a:t>微调和评估，整体表现不错</a:t>
             </a:r>
-            <a:endParaRPr lang="zh-CN" altLang="en-US" sz="2000" dirty="0">
-              <a:solidFill>
-                <a:schemeClr val="tx2">
-                  <a:lumMod val="75000"/>
-                  <a:lumOff val="25000"/>
-                </a:schemeClr>
-              </a:solidFill>
-              <a:sym typeface="+mn-ea"/>
-            </a:endParaRPr>
           </a:p>
           <a:p>
             <a:pPr indent="0" algn="l">
@@ -3823,9 +3757,6 @@
               </a:rPr>
               <a:t>非推理）与模型参数</a:t>
             </a:r>
-            <a:endParaRPr lang="zh-CN" altLang="en-US" sz="2000" dirty="0">
-              <a:sym typeface="+mn-ea"/>
-            </a:endParaRPr>
           </a:p>
           <a:p>
             <a:pPr indent="0" algn="l">
@@ -3912,9 +3843,6 @@
               </a:rPr>
               <a:t>--- P0 ---</a:t>
             </a:r>
-            <a:endParaRPr lang="en-US" altLang="zh-CN" sz="2000" dirty="0">
-              <a:sym typeface="+mn-ea"/>
-            </a:endParaRPr>
           </a:p>
           <a:p>
             <a:pPr indent="0" algn="l">
@@ -4033,11 +3961,6 @@
               </a:rPr>
               <a:t> NeurIPS 2024</a:t>
             </a:r>
-            <a:endParaRPr lang="en-US" altLang="zh-CN" sz="2000" dirty="0">
-              <a:effectLst/>
-              <a:latin typeface="Times New Roman" panose="02020603050405020304" pitchFamily="18" charset="0"/>
-              <a:cs typeface="Times New Roman" panose="02020603050405020304" pitchFamily="18" charset="0"/>
-            </a:endParaRPr>
           </a:p>
         </p:txBody>
       </p:sp>
@@ -4790,11 +4713,6 @@
               </a:rPr>
               <a:t> NeurIPS 2024</a:t>
             </a:r>
-            <a:endParaRPr lang="en-US" altLang="zh-CN" sz="2000" dirty="0">
-              <a:effectLst/>
-              <a:latin typeface="Times New Roman" panose="02020603050405020304" pitchFamily="18" charset="0"/>
-              <a:cs typeface="Times New Roman" panose="02020603050405020304" pitchFamily="18" charset="0"/>
-            </a:endParaRPr>
           </a:p>
         </p:txBody>
       </p:sp>
@@ -4849,9 +4767,6 @@
               </a:rPr>
               <a:t>实验评估：</a:t>
             </a:r>
-            <a:endParaRPr lang="zh-CN" altLang="en-US" sz="1600" dirty="0">
-              <a:latin typeface="+mn-ea"/>
-            </a:endParaRPr>
           </a:p>
         </p:txBody>
       </p:sp>
@@ -4864,7 +4779,7 @@
           <p:nvPr/>
         </p:nvPicPr>
         <p:blipFill>
-          <a:blip r:embed="rId1"/>
+          <a:blip r:embed="rId2"/>
           <a:stretch>
             <a:fillRect/>
           </a:stretch>
@@ -4930,7 +4845,6 @@
               <a:rPr lang="zh-CN" altLang="en-US" sz="3200" dirty="0"/>
               <a:t>本周内容总结</a:t>
             </a:r>
-            <a:endParaRPr lang="zh-CN" altLang="en-US" sz="3200" dirty="0"/>
           </a:p>
         </p:txBody>
       </p:sp>
@@ -4957,8 +4871,20 @@
                 <a:tableStyleId>{073A0DAA-6AF3-43AB-8588-CEC1D06C72B9}</a:tableStyleId>
               </a:tblPr>
               <a:tblGrid>
-                <a:gridCol w="1210310"/>
-                <a:gridCol w="10587990"/>
+                <a:gridCol w="1210310">
+                  <a:extLst>
+                    <a:ext uri="{9D8B030D-6E8A-4147-A177-3AD203B41FA5}">
+                      <a16:colId xmlns:a16="http://schemas.microsoft.com/office/drawing/2014/main" val="20000"/>
+                    </a:ext>
+                  </a:extLst>
+                </a:gridCol>
+                <a:gridCol w="10587990">
+                  <a:extLst>
+                    <a:ext uri="{9D8B030D-6E8A-4147-A177-3AD203B41FA5}">
+                      <a16:colId xmlns:a16="http://schemas.microsoft.com/office/drawing/2014/main" val="20001"/>
+                    </a:ext>
+                  </a:extLst>
+                </a:gridCol>
               </a:tblGrid>
               <a:tr h="1453515">
                 <a:tc>
@@ -4977,13 +4903,6 @@
                         </a:rPr>
                         <a:t>细节进展</a:t>
                       </a:r>
-                      <a:endParaRPr lang="zh-CN" altLang="en-US" sz="1800" b="0" dirty="0">
-                        <a:solidFill>
-                          <a:schemeClr val="tx1"/>
-                        </a:solidFill>
-                        <a:latin typeface="+mn-ea"/>
-                        <a:ea typeface="+mn-ea"/>
-                      </a:endParaRPr>
                     </a:p>
                   </a:txBody>
                   <a:tcPr anchor="ctr">
@@ -5079,14 +4998,6 @@
                         </a:rPr>
                         <a:t>调研了四篇相关性很强的最新工作，均与后训练微调代码推理有关</a:t>
                       </a:r>
-                      <a:endParaRPr lang="zh-CN" altLang="en-US" sz="1800" b="0" dirty="0">
-                        <a:solidFill>
-                          <a:schemeClr val="tx1"/>
-                        </a:solidFill>
-                        <a:latin typeface="+mn-ea"/>
-                        <a:cs typeface="+mn-ea"/>
-                        <a:sym typeface="+mn-ea"/>
-                      </a:endParaRPr>
                     </a:p>
                     <a:p>
                       <a:pPr marL="342900" marR="0" lvl="0" indent="-342900" algn="l" defTabSz="914400" rtl="0" eaLnBrk="1" fontAlgn="auto" latinLnBrk="0" hangingPunct="1">
@@ -5209,6 +5120,11 @@
                     </a:solidFill>
                   </a:tcPr>
                 </a:tc>
+                <a:extLst>
+                  <a:ext uri="{0D108BD9-81ED-4DB2-BD59-A6C34878D82A}">
+                    <a16:rowId xmlns:a16="http://schemas.microsoft.com/office/drawing/2014/main" val="10000"/>
+                  </a:ext>
+                </a:extLst>
               </a:tr>
               <a:tr h="3197886">
                 <a:tc>
@@ -5637,15 +5553,6 @@
                         </a:rPr>
                         <a:t>的非推理类模型</a:t>
                       </a:r>
-                      <a:endParaRPr lang="zh-CN" altLang="en-US" sz="1800" b="0" i="0" dirty="0">
-                        <a:solidFill>
-                          <a:schemeClr val="tx1"/>
-                        </a:solidFill>
-                        <a:effectLst/>
-                        <a:latin typeface="+mn-ea"/>
-                        <a:ea typeface="+mn-ea"/>
-                        <a:cs typeface="Times New Roman" panose="02020603050405020304" pitchFamily="18" charset="0"/>
-                      </a:endParaRPr>
                     </a:p>
                     <a:p>
                       <a:pPr marL="457200" indent="-457200">
@@ -5731,15 +5638,6 @@
                         </a:rPr>
                         <a:t>模型能够学到的更多</a:t>
                       </a:r>
-                      <a:endParaRPr lang="zh-CN" altLang="en-US" sz="1800" b="0" i="0" dirty="0">
-                        <a:solidFill>
-                          <a:schemeClr val="tx1"/>
-                        </a:solidFill>
-                        <a:effectLst/>
-                        <a:latin typeface="+mn-ea"/>
-                        <a:ea typeface="+mn-ea"/>
-                        <a:cs typeface="Times New Roman" panose="02020603050405020304" pitchFamily="18" charset="0"/>
-                      </a:endParaRPr>
                     </a:p>
                   </a:txBody>
                   <a:tcPr anchor="ctr">
@@ -5792,6 +5690,11 @@
                     </a:solidFill>
                   </a:tcPr>
                 </a:tc>
+                <a:extLst>
+                  <a:ext uri="{0D108BD9-81ED-4DB2-BD59-A6C34878D82A}">
+                    <a16:rowId xmlns:a16="http://schemas.microsoft.com/office/drawing/2014/main" val="10001"/>
+                  </a:ext>
+                </a:extLst>
               </a:tr>
               <a:tr h="1238399">
                 <a:tc>
@@ -5900,25 +5803,8 @@
                           <a:latin typeface="+mn-ea"/>
                           <a:ea typeface="+mn-ea"/>
                         </a:rPr>
-                        <a:t>讨论后续发展</a:t>
+                        <a:t>讨论后续发展方向</a:t>
                       </a:r>
-                      <a:r>
-                        <a:rPr lang="zh-CN" altLang="en-US" sz="1800" b="0" dirty="0">
-                          <a:solidFill>
-                            <a:schemeClr val="tx1"/>
-                          </a:solidFill>
-                          <a:latin typeface="+mn-ea"/>
-                          <a:ea typeface="+mn-ea"/>
-                        </a:rPr>
-                        <a:t>方向</a:t>
-                      </a:r>
-                      <a:endParaRPr lang="zh-CN" altLang="en-US" sz="1800" b="0" dirty="0">
-                        <a:solidFill>
-                          <a:schemeClr val="tx1"/>
-                        </a:solidFill>
-                        <a:latin typeface="+mn-ea"/>
-                        <a:ea typeface="+mn-ea"/>
-                      </a:endParaRPr>
                     </a:p>
                   </a:txBody>
                   <a:tcPr anchor="ctr">
@@ -5971,6 +5857,11 @@
                     </a:solidFill>
                   </a:tcPr>
                 </a:tc>
+                <a:extLst>
+                  <a:ext uri="{0D108BD9-81ED-4DB2-BD59-A6C34878D82A}">
+                    <a16:rowId xmlns:a16="http://schemas.microsoft.com/office/drawing/2014/main" val="10002"/>
+                  </a:ext>
+                </a:extLst>
               </a:tr>
             </a:tbl>
           </a:graphicData>
@@ -6090,10 +5981,6 @@
               </a:rPr>
               <a:t>arXiv 2025.07</a:t>
             </a:r>
-            <a:endParaRPr lang="en-US" altLang="zh-CN" sz="2000" dirty="0">
-              <a:latin typeface="Times New Roman" panose="02020603050405020304" pitchFamily="18" charset="0"/>
-              <a:cs typeface="Times New Roman" panose="02020603050405020304" pitchFamily="18" charset="0"/>
-            </a:endParaRPr>
           </a:p>
           <a:p>
             <a:pPr marL="457200" indent="-457200">
@@ -6117,11 +6004,6 @@
               </a:rPr>
               <a:t>EMNLP 2025.06</a:t>
             </a:r>
-            <a:endParaRPr lang="en-US" altLang="zh-CN" sz="2000" dirty="0">
-              <a:effectLst/>
-              <a:latin typeface="Times New Roman" panose="02020603050405020304" pitchFamily="18" charset="0"/>
-              <a:cs typeface="Times New Roman" panose="02020603050405020304" pitchFamily="18" charset="0"/>
-            </a:endParaRPr>
           </a:p>
           <a:p>
             <a:pPr marL="457200" indent="-457200">
@@ -6147,11 +6029,6 @@
               </a:rPr>
               <a:t>ICML 2025.02</a:t>
             </a:r>
-            <a:endParaRPr lang="en-US" altLang="zh-CN" sz="2000" dirty="0">
-              <a:effectLst/>
-              <a:latin typeface="Times New Roman" panose="02020603050405020304" pitchFamily="18" charset="0"/>
-              <a:cs typeface="Times New Roman" panose="02020603050405020304" pitchFamily="18" charset="0"/>
-            </a:endParaRPr>
           </a:p>
           <a:p>
             <a:pPr marL="457200" indent="-457200">
@@ -6177,11 +6054,6 @@
               </a:rPr>
               <a:t> NeurIPS 2024</a:t>
             </a:r>
-            <a:endParaRPr lang="en-US" altLang="zh-CN" sz="2000" dirty="0">
-              <a:effectLst/>
-              <a:latin typeface="Times New Roman" panose="02020603050405020304" pitchFamily="18" charset="0"/>
-              <a:cs typeface="Times New Roman" panose="02020603050405020304" pitchFamily="18" charset="0"/>
-            </a:endParaRPr>
           </a:p>
         </p:txBody>
       </p:sp>
@@ -6279,11 +6151,6 @@
               </a:rPr>
               <a:t>Qwen2.5-Coder-Instruct  14B</a:t>
             </a:r>
-            <a:endParaRPr lang="en-US" altLang="zh-CN" b="0" i="0" dirty="0">
-              <a:effectLst/>
-              <a:latin typeface="Times New Roman" panose="02020603050405020304" pitchFamily="18" charset="0"/>
-              <a:cs typeface="Times New Roman" panose="02020603050405020304" pitchFamily="18" charset="0"/>
-            </a:endParaRPr>
           </a:p>
           <a:p>
             <a:pPr marL="457200" indent="-457200">
@@ -6314,10 +6181,6 @@
               </a:rPr>
               <a:t>Qwen3-8B</a:t>
             </a:r>
-            <a:endParaRPr lang="en-US" altLang="zh-CN" dirty="0">
-              <a:latin typeface="Times New Roman" panose="02020603050405020304" pitchFamily="18" charset="0"/>
-              <a:cs typeface="Times New Roman" panose="02020603050405020304" pitchFamily="18" charset="0"/>
-            </a:endParaRPr>
           </a:p>
           <a:p>
             <a:pPr marL="457200" indent="-457200">
@@ -6414,11 +6277,6 @@
               </a:rPr>
               <a:t>Gemma 2 27B</a:t>
             </a:r>
-            <a:endParaRPr lang="en-US" altLang="zh-CN" b="0" i="0" dirty="0">
-              <a:effectLst/>
-              <a:latin typeface="Times New Roman" panose="02020603050405020304" pitchFamily="18" charset="0"/>
-              <a:cs typeface="Times New Roman" panose="02020603050405020304" pitchFamily="18" charset="0"/>
-            </a:endParaRPr>
           </a:p>
           <a:p>
             <a:pPr marL="457200" indent="-457200">
@@ -6475,11 +6333,6 @@
               </a:rPr>
               <a:t>7B </a:t>
             </a:r>
-            <a:endParaRPr lang="en-US" altLang="zh-CN" b="0" i="0" dirty="0">
-              <a:effectLst/>
-              <a:latin typeface="Times New Roman" panose="02020603050405020304" pitchFamily="18" charset="0"/>
-              <a:cs typeface="Times New Roman" panose="02020603050405020304" pitchFamily="18" charset="0"/>
-            </a:endParaRPr>
           </a:p>
         </p:txBody>
       </p:sp>
@@ -6545,9 +6398,6 @@
               </a:rPr>
               <a:t>实验</a:t>
             </a:r>
-            <a:endParaRPr lang="zh-CN" altLang="en-US" sz="2400" dirty="0">
-              <a:sym typeface="+mn-ea"/>
-            </a:endParaRPr>
           </a:p>
         </p:txBody>
       </p:sp>
@@ -6571,6 +6421,7 @@
           <a:bodyPr wrap="square" rtlCol="0">
             <a:spAutoFit/>
           </a:bodyPr>
+          <a:lstStyle/>
           <a:p>
             <a:r>
               <a:rPr lang="zh-CN" altLang="en-US">
@@ -6596,11 +6447,6 @@
               </a:rPr>
               <a:t>上的结果，实验结论和之前的相差不大，在我们的四类数据集上也有提升</a:t>
             </a:r>
-            <a:endParaRPr lang="zh-CN" altLang="en-US">
-              <a:latin typeface="宋体" panose="02010600030101010101" pitchFamily="2" charset="-122"/>
-              <a:ea typeface="宋体" panose="02010600030101010101" pitchFamily="2" charset="-122"/>
-              <a:cs typeface="宋体" panose="02010600030101010101" pitchFamily="2" charset="-122"/>
-            </a:endParaRPr>
           </a:p>
           <a:p>
             <a:pPr marL="285750" indent="-285750">
@@ -6639,11 +6485,6 @@
               </a:rPr>
               <a:t>，因此激活了他的推理能力</a:t>
             </a:r>
-            <a:endParaRPr lang="zh-CN" altLang="en-US">
-              <a:latin typeface="宋体" panose="02010600030101010101" pitchFamily="2" charset="-122"/>
-              <a:ea typeface="宋体" panose="02010600030101010101" pitchFamily="2" charset="-122"/>
-              <a:cs typeface="宋体" panose="02010600030101010101" pitchFamily="2" charset="-122"/>
-            </a:endParaRPr>
           </a:p>
           <a:p>
             <a:pPr marL="285750" indent="-285750">
@@ -6664,21 +6505,8 @@
                 <a:ea typeface="宋体" panose="02010600030101010101" pitchFamily="2" charset="-122"/>
                 <a:cs typeface="宋体" panose="02010600030101010101" pitchFamily="2" charset="-122"/>
               </a:rPr>
-              <a:t>在预训练阶段很可能已经见过大量类似的代码理解任务，微调让它接近自身在</a:t>
-            </a:r>
-            <a:r>
-              <a:rPr lang="zh-CN" altLang="en-US">
-                <a:latin typeface="宋体" panose="02010600030101010101" pitchFamily="2" charset="-122"/>
-                <a:ea typeface="宋体" panose="02010600030101010101" pitchFamily="2" charset="-122"/>
-                <a:cs typeface="宋体" panose="02010600030101010101" pitchFamily="2" charset="-122"/>
-              </a:rPr>
-              <a:t>该任务上的极限。</a:t>
-            </a:r>
-            <a:endParaRPr lang="zh-CN" altLang="en-US">
-              <a:latin typeface="宋体" panose="02010600030101010101" pitchFamily="2" charset="-122"/>
-              <a:ea typeface="宋体" panose="02010600030101010101" pitchFamily="2" charset="-122"/>
-              <a:cs typeface="宋体" panose="02010600030101010101" pitchFamily="2" charset="-122"/>
-            </a:endParaRPr>
+              <a:t>在预训练阶段很可能已经见过大量类似的代码理解任务，微调让它接近自身在该任务上的极限。</a:t>
+            </a:r>
           </a:p>
           <a:p>
             <a:pPr marL="285750" indent="-285750">
@@ -6740,7 +6568,7 @@
           <p:nvPr/>
         </p:nvPicPr>
         <p:blipFill>
-          <a:blip r:embed="rId1"/>
+          <a:blip r:embed="rId2"/>
           <a:stretch>
             <a:fillRect/>
           </a:stretch>
@@ -6764,7 +6592,7 @@
           <p:nvPr/>
         </p:nvPicPr>
         <p:blipFill>
-          <a:blip r:embed="rId2"/>
+          <a:blip r:embed="rId3"/>
           <a:stretch>
             <a:fillRect/>
           </a:stretch>
@@ -6799,19 +6627,18 @@
           <a:bodyPr wrap="square" rtlCol="0">
             <a:spAutoFit/>
           </a:bodyPr>
+          <a:lstStyle/>
           <a:p>
             <a:r>
               <a:rPr lang="zh-CN" altLang="en-US"/>
               <a:t>数据集任务</a:t>
             </a:r>
-            <a:endParaRPr lang="zh-CN" altLang="en-US"/>
           </a:p>
           <a:p>
             <a:r>
               <a:rPr lang="zh-CN" altLang="en-US"/>
               <a:t>训练任务</a:t>
             </a:r>
-            <a:endParaRPr lang="zh-CN" altLang="en-US"/>
           </a:p>
           <a:p>
             <a:r>
@@ -6830,7 +6657,6 @@
               <a:rPr lang="zh-CN" altLang="en-US"/>
               <a:t>）</a:t>
             </a:r>
-            <a:endParaRPr lang="zh-CN" altLang="en-US"/>
           </a:p>
           <a:p>
             <a:r>
@@ -6845,14 +6671,12 @@
               <a:rPr lang="en-US" altLang="zh-CN"/>
               <a:t>235-2</a:t>
             </a:r>
-            <a:endParaRPr lang="en-US" altLang="zh-CN"/>
           </a:p>
           <a:p>
             <a:r>
               <a:rPr lang="en-US" altLang="zh-CN"/>
               <a:t>3. claude-1000-format</a:t>
             </a:r>
-            <a:endParaRPr lang="en-US" altLang="zh-CN"/>
           </a:p>
           <a:p>
             <a:r>
@@ -6870,7 +6694,6 @@
               <a:rPr lang="en-US" altLang="zh-CN"/>
               <a:t> </a:t>
             </a:r>
-            <a:endParaRPr lang="en-US" altLang="zh-CN"/>
           </a:p>
           <a:p>
             <a:r>
@@ -6879,13 +6702,8 @@
             </a:r>
             <a:r>
               <a:rPr lang="zh-CN" altLang="en-US"/>
-              <a:t>的四个</a:t>
-            </a:r>
-            <a:r>
-              <a:rPr lang="zh-CN" altLang="en-US"/>
-              <a:t>训练模型</a:t>
-            </a:r>
-            <a:endParaRPr lang="zh-CN" altLang="en-US"/>
+              <a:t>的四个训练模型</a:t>
+            </a:r>
           </a:p>
           <a:p>
             <a:r>
@@ -6894,13 +6712,8 @@
             </a:r>
             <a:r>
               <a:rPr lang="zh-CN" altLang="en-US"/>
-              <a:t>同类工作的</a:t>
-            </a:r>
-            <a:r>
-              <a:rPr lang="zh-CN" altLang="en-US"/>
-              <a:t>四个模型</a:t>
-            </a:r>
-            <a:endParaRPr lang="zh-CN" altLang="en-US"/>
+              <a:t>同类工作的四个模型</a:t>
+            </a:r>
           </a:p>
         </p:txBody>
       </p:sp>
@@ -6965,10 +6778,6 @@
               </a:rPr>
               <a:t>arXiv 2025.07</a:t>
             </a:r>
-            <a:endParaRPr lang="en-US" altLang="zh-CN" sz="2000" dirty="0">
-              <a:latin typeface="Times New Roman" panose="02020603050405020304" pitchFamily="18" charset="0"/>
-              <a:cs typeface="Times New Roman" panose="02020603050405020304" pitchFamily="18" charset="0"/>
-            </a:endParaRPr>
           </a:p>
         </p:txBody>
       </p:sp>
@@ -7693,10 +7502,6 @@
               </a:rPr>
               <a:t>epoch</a:t>
             </a:r>
-            <a:endParaRPr lang="en-US" altLang="zh-CN" sz="1600" b="0" i="0" dirty="0">
-              <a:effectLst/>
-              <a:latin typeface="+mn-ea"/>
-            </a:endParaRPr>
           </a:p>
           <a:p>
             <a:r>
@@ -7870,12 +7675,6 @@
               </a:rPr>
               <a:t>epoch</a:t>
             </a:r>
-            <a:endParaRPr lang="en-US" altLang="zh-CN" sz="1600" dirty="0">
-              <a:solidFill>
-                <a:srgbClr val="000000"/>
-              </a:solidFill>
-              <a:latin typeface="+mn-ea"/>
-            </a:endParaRPr>
           </a:p>
         </p:txBody>
       </p:sp>
@@ -8097,10 +7896,6 @@
               </a:rPr>
               <a:t>arXiv 2025.07</a:t>
             </a:r>
-            <a:endParaRPr lang="en-US" altLang="zh-CN" sz="2000" dirty="0">
-              <a:latin typeface="Times New Roman" panose="02020603050405020304" pitchFamily="18" charset="0"/>
-              <a:cs typeface="Times New Roman" panose="02020603050405020304" pitchFamily="18" charset="0"/>
-            </a:endParaRPr>
           </a:p>
         </p:txBody>
       </p:sp>
@@ -8562,10 +8357,6 @@
               </a:rPr>
               <a:t>epoch</a:t>
             </a:r>
-            <a:endParaRPr lang="en-US" altLang="zh-CN" sz="1600" b="0" i="0" dirty="0">
-              <a:effectLst/>
-              <a:latin typeface="+mn-ea"/>
-            </a:endParaRPr>
           </a:p>
         </p:txBody>
       </p:sp>
@@ -8578,14 +8369,14 @@
           <p:nvPr/>
         </p:nvPicPr>
         <p:blipFill>
-          <a:blip r:embed="rId1"/>
+          <a:blip r:embed="rId2"/>
           <a:stretch>
             <a:fillRect/>
           </a:stretch>
         </p:blipFill>
         <p:spPr>
           <a:xfrm>
-            <a:off x="1128678" y="3353281"/>
+            <a:off x="1220118" y="3331139"/>
             <a:ext cx="7371957" cy="3498369"/>
           </a:xfrm>
           <a:prstGeom prst="rect">
@@ -8645,6 +8436,7 @@
           <a:bodyPr wrap="square" rtlCol="0" anchor="t">
             <a:spAutoFit/>
           </a:bodyPr>
+          <a:lstStyle/>
           <a:p>
             <a:r>
               <a:rPr lang="en-US" altLang="zh-CN">
@@ -9346,7 +9138,7 @@
           <p:nvPr/>
         </p:nvPicPr>
         <p:blipFill>
-          <a:blip r:embed="rId1"/>
+          <a:blip r:embed="rId2"/>
           <a:stretch>
             <a:fillRect/>
           </a:stretch>
@@ -9370,7 +9162,7 @@
           <p:nvPr/>
         </p:nvPicPr>
         <p:blipFill>
-          <a:blip r:embed="rId2"/>
+          <a:blip r:embed="rId3"/>
           <a:stretch>
             <a:fillRect/>
           </a:stretch>
@@ -9417,7 +9209,6 @@
               <a:rPr lang="en-US" altLang="zh-CN" dirty="0"/>
               <a:t>4B</a:t>
             </a:r>
-            <a:endParaRPr lang="en-US" altLang="zh-CN" dirty="0"/>
           </a:p>
         </p:txBody>
       </p:sp>
@@ -9453,7 +9244,6 @@
               <a:rPr lang="en-US" altLang="zh-CN" dirty="0"/>
               <a:t>8B</a:t>
             </a:r>
-            <a:endParaRPr lang="en-US" altLang="zh-CN" dirty="0"/>
           </a:p>
         </p:txBody>
       </p:sp>
@@ -9527,11 +9317,6 @@
               </a:rPr>
               <a:t>ICML 2025.02</a:t>
             </a:r>
-            <a:endParaRPr lang="en-US" altLang="zh-CN" sz="2000" dirty="0">
-              <a:effectLst/>
-              <a:latin typeface="Times New Roman" panose="02020603050405020304" pitchFamily="18" charset="0"/>
-              <a:cs typeface="Times New Roman" panose="02020603050405020304" pitchFamily="18" charset="0"/>
-            </a:endParaRPr>
           </a:p>
         </p:txBody>
       </p:sp>
@@ -9684,12 +9469,6 @@
               </a:rPr>
               <a:t>COT</a:t>
             </a:r>
-            <a:endParaRPr lang="en-US" altLang="zh-CN" sz="1600" dirty="0">
-              <a:solidFill>
-                <a:srgbClr val="000000"/>
-              </a:solidFill>
-              <a:latin typeface="+mn-ea"/>
-            </a:endParaRPr>
           </a:p>
           <a:p>
             <a:pPr>
@@ -9832,12 +9611,6 @@
               </a:rPr>
               <a:t>COT</a:t>
             </a:r>
-            <a:endParaRPr lang="en-US" altLang="zh-CN" sz="1600" dirty="0">
-              <a:solidFill>
-                <a:srgbClr val="000000"/>
-              </a:solidFill>
-              <a:latin typeface="+mn-ea"/>
-            </a:endParaRPr>
           </a:p>
           <a:p>
             <a:pPr>
@@ -10413,11 +10186,6 @@
               </a:rPr>
               <a:t>ICML 2025.02</a:t>
             </a:r>
-            <a:endParaRPr lang="en-US" altLang="zh-CN" sz="2000" dirty="0">
-              <a:effectLst/>
-              <a:latin typeface="Times New Roman" panose="02020603050405020304" pitchFamily="18" charset="0"/>
-              <a:cs typeface="Times New Roman" panose="02020603050405020304" pitchFamily="18" charset="0"/>
-            </a:endParaRPr>
           </a:p>
         </p:txBody>
       </p:sp>
@@ -10472,9 +10240,6 @@
               </a:rPr>
               <a:t>实验评估：</a:t>
             </a:r>
-            <a:endParaRPr lang="zh-CN" altLang="en-US" sz="1600" dirty="0">
-              <a:latin typeface="+mn-ea"/>
-            </a:endParaRPr>
           </a:p>
         </p:txBody>
       </p:sp>
@@ -10487,7 +10252,7 @@
           <p:nvPr/>
         </p:nvPicPr>
         <p:blipFill>
-          <a:blip r:embed="rId1"/>
+          <a:blip r:embed="rId2"/>
           <a:stretch>
             <a:fillRect/>
           </a:stretch>
@@ -10511,15 +10276,15 @@
 </file>
 
 <file path=ppt/tags/tag1.xml><?xml version="1.0" encoding="utf-8"?>
-<p:tagLst xmlns:p="http://schemas.openxmlformats.org/presentationml/2006/main">
-  <p:tag name="TABLE_ENDDRAG_ORIGIN_RECT" val="929*505"/>
-  <p:tag name="TABLE_ENDDRAG_RECT" val="21*141*929*505"/>
+<p:tagLst xmlns:a="http://schemas.openxmlformats.org/drawingml/2006/main" xmlns:r="http://schemas.openxmlformats.org/officeDocument/2006/relationships" xmlns:p="http://schemas.openxmlformats.org/presentationml/2006/main">
+  <p:tag name="RESOURCE_RECORD_KEY" val="{&quot;10&quot;:[20179637,20211662,50039266,21564682]}"/>
 </p:tagLst>
 </file>
 
 <file path=ppt/tags/tag2.xml><?xml version="1.0" encoding="utf-8"?>
-<p:tagLst xmlns:p="http://schemas.openxmlformats.org/presentationml/2006/main">
-  <p:tag name="RESOURCE_RECORD_KEY" val="{&quot;10&quot;:[20179637,20211662,50039266,21564682]}"/>
+<p:tagLst xmlns:a="http://schemas.openxmlformats.org/drawingml/2006/main" xmlns:r="http://schemas.openxmlformats.org/officeDocument/2006/relationships" xmlns:p="http://schemas.openxmlformats.org/presentationml/2006/main">
+  <p:tag name="TABLE_ENDDRAG_ORIGIN_RECT" val="929*505"/>
+  <p:tag name="TABLE_ENDDRAG_RECT" val="21*141*929*505"/>
 </p:tagLst>
 </file>
 
@@ -10795,6 +10560,7 @@
       </a:style>
     </a:lnDef>
   </a:objectDefaults>
+  <a:extraClrSchemeLst/>
   <a:extLst>
     <a:ext uri="{05A4C25C-085E-4340-85A3-A5531E510DB2}">
       <thm15:themeFamily xmlns:thm15="http://schemas.microsoft.com/office/thememl/2012/main" name="Office Theme" id="{62F939B6-93AF-4DB8-9C6B-D6C7DFDC589F}" vid="{4A3C46E8-61CC-4603-A589-7422A47A8E4A}"/>
@@ -11054,6 +10820,8 @@
       </a:bgFillStyleLst>
     </a:fmtScheme>
   </a:themeElements>
+  <a:objectDefaults/>
+  <a:extraClrSchemeLst/>
   <a:extLst>
     <a:ext uri="{05A4C25C-085E-4340-85A3-A5531E510DB2}">
       <thm15:themeFamily xmlns:thm15="http://schemas.microsoft.com/office/thememl/2012/main" name="Office Theme" id="{62F939B6-93AF-4DB8-9C6B-D6C7DFDC589F}" vid="{4A3C46E8-61CC-4603-A589-7422A47A8E4A}"/>
